--- a/reports/W04_Mid_Review_Deck.pptx
+++ b/reports/W04_Mid_Review_Deck.pptx
@@ -6,14 +6,15 @@
   </p:sldMasterIdLst>
   <p:sldIdLst>
     <p:sldId id="256" r:id="rId3"/>
-    <p:sldId id="257" r:id="rId4"/>
-    <p:sldId id="258" r:id="rId5"/>
-    <p:sldId id="259" r:id="rId6"/>
-    <p:sldId id="260" r:id="rId7"/>
-    <p:sldId id="261" r:id="rId8"/>
-    <p:sldId id="262" r:id="rId9"/>
+    <p:sldId id="258" r:id="rId4"/>
+    <p:sldId id="257" r:id="rId5"/>
+    <p:sldId id="260" r:id="rId6"/>
+    <p:sldId id="261" r:id="rId7"/>
+    <p:sldId id="262" r:id="rId8"/>
+    <p:sldId id="263" r:id="rId9"/>
+    <p:sldId id="264" r:id="rId10"/>
   </p:sldIdLst>
-  <p:sldSz cx="12191365" cy="6858000" type="screen4x3"/>
+  <p:sldSz cx="12190730" cy="6858000" type="screen4x3"/>
   <p:notesSz cx="6858000" cy="9144000"/>
   <p:defaultTextStyle>
     <a:defPPr>
@@ -3060,7 +3061,7 @@
         <p:spPr>
           <a:xfrm>
             <a:off x="1097280" y="1847088"/>
-            <a:ext cx="9994392" cy="651510"/>
+            <a:ext cx="9994392" cy="649224"/>
           </a:xfrm>
           <a:prstGeom prst="rect">
             <a:avLst/>
@@ -3068,7 +3069,7 @@
           <a:noFill/>
         </p:spPr>
         <p:txBody>
-          <a:bodyPr wrap="square" lIns="0" tIns="0" rIns="0" bIns="0" anchor="t">
+          <a:bodyPr wrap="square" lIns="0" tIns="0" rIns="0" bIns="0">
             <a:spAutoFit/>
           </a:bodyPr>
           <a:lstStyle/>
@@ -3085,7 +3086,7 @@
                 </a:solidFill>
                 <a:latin typeface="Calibri" panose="020F0502020204030204"/>
               </a:rPr>
-              <a:t>Mid-Point Review </a:t>
+              <a:t>Mid-Point Review</a:t>
             </a:r>
             <a:endParaRPr sz="4000" b="1">
               <a:solidFill>
@@ -3113,7 +3114,7 @@
           <a:noFill/>
         </p:spPr>
         <p:txBody>
-          <a:bodyPr wrap="square" lIns="0" tIns="0" rIns="0" bIns="0" anchor="t">
+          <a:bodyPr wrap="square" lIns="0" tIns="0" rIns="0" bIns="0">
             <a:spAutoFit/>
           </a:bodyPr>
           <a:lstStyle/>
@@ -3143,7 +3144,7 @@
       </p:sp>
       <p:sp>
         <p:nvSpPr>
-          <p:cNvPr id="5" name="TextBox 4"/>
+          <p:cNvPr id="4" name="TextBox 3"/>
           <p:cNvSpPr txBox="1"/>
           <p:nvPr/>
         </p:nvSpPr>
@@ -3158,7 +3159,7 @@
           <a:noFill/>
         </p:spPr>
         <p:txBody>
-          <a:bodyPr wrap="square" lIns="0" tIns="0" rIns="0" bIns="0" anchor="t">
+          <a:bodyPr wrap="square" lIns="0" tIns="0" rIns="0" bIns="0">
             <a:spAutoFit/>
           </a:bodyPr>
           <a:lstStyle/>
@@ -3188,7 +3189,7 @@
       </p:sp>
       <p:sp>
         <p:nvSpPr>
-          <p:cNvPr id="6" name="TextBox 5"/>
+          <p:cNvPr id="5" name="TextBox 4"/>
           <p:cNvSpPr txBox="1"/>
           <p:nvPr/>
         </p:nvSpPr>
@@ -3203,7 +3204,7 @@
           <a:noFill/>
         </p:spPr>
         <p:txBody>
-          <a:bodyPr wrap="square" lIns="0" tIns="0" rIns="0" bIns="0" anchor="t">
+          <a:bodyPr wrap="square" lIns="0" tIns="0" rIns="0" bIns="0">
             <a:spAutoFit/>
           </a:bodyPr>
           <a:lstStyle/>
@@ -3233,13 +3234,13 @@
       </p:sp>
       <p:sp>
         <p:nvSpPr>
-          <p:cNvPr id="7" name="Rounded Rectangle 6"/>
+          <p:cNvPr id="6" name="Rounded Rectangle 5"/>
           <p:cNvSpPr/>
           <p:nvPr/>
         </p:nvSpPr>
         <p:spPr>
           <a:xfrm>
-            <a:off x="1386687" y="4617720"/>
+            <a:off x="1389888" y="4617720"/>
             <a:ext cx="2743200" cy="1170432"/>
           </a:xfrm>
           <a:prstGeom prst="roundRect">
@@ -3274,6 +3275,9 @@
           <a:lstStyle/>
           <a:p>
             <a:pPr algn="ctr">
+              <a:lnSpc>
+                <a:spcPct val="100000"/>
+              </a:lnSpc>
               <a:spcAft>
                 <a:spcPts val="300"/>
               </a:spcAft>
@@ -3295,9 +3299,13 @@
             </a:endParaRPr>
           </a:p>
           <a:p>
-            <a:pPr algn="ctr"/>
-            <a:r>
-              <a:rPr sz="1100">
+            <a:pPr algn="ctr">
+              <a:lnSpc>
+                <a:spcPct val="100000"/>
+              </a:lnSpc>
+            </a:pPr>
+            <a:r>
+              <a:rPr sz="1100" b="0">
                 <a:solidFill>
                   <a:srgbClr val="52514E"/>
                 </a:solidFill>
@@ -3305,7 +3313,7 @@
               </a:rPr>
               <a:t>one generator, one canonical</a:t>
             </a:r>
-            <a:endParaRPr sz="1100">
+            <a:endParaRPr sz="1100" b="0">
               <a:solidFill>
                 <a:srgbClr val="52514E"/>
               </a:solidFill>
@@ -3313,9 +3321,13 @@
             </a:endParaRPr>
           </a:p>
           <a:p>
-            <a:pPr algn="ctr"/>
-            <a:r>
-              <a:rPr sz="1100">
+            <a:pPr algn="ctr">
+              <a:lnSpc>
+                <a:spcPct val="100000"/>
+              </a:lnSpc>
+            </a:pPr>
+            <a:r>
+              <a:rPr sz="1100" b="0">
                 <a:solidFill>
                   <a:srgbClr val="52514E"/>
                 </a:solidFill>
@@ -3323,7 +3335,7 @@
               </a:rPr>
               <a:t>leakage-safe split, one ledger</a:t>
             </a:r>
-            <a:endParaRPr sz="1100">
+            <a:endParaRPr sz="1100" b="0">
               <a:solidFill>
                 <a:srgbClr val="52514E"/>
               </a:solidFill>
@@ -3334,13 +3346,13 @@
       </p:sp>
       <p:sp>
         <p:nvSpPr>
-          <p:cNvPr id="8" name="Rounded Rectangle 7"/>
+          <p:cNvPr id="7" name="Rounded Rectangle 6"/>
           <p:cNvSpPr/>
           <p:nvPr/>
         </p:nvSpPr>
         <p:spPr>
           <a:xfrm>
-            <a:off x="4724247" y="4617720"/>
+            <a:off x="4727448" y="4617720"/>
             <a:ext cx="2743200" cy="1170432"/>
           </a:xfrm>
           <a:prstGeom prst="roundRect">
@@ -3375,6 +3387,9 @@
           <a:lstStyle/>
           <a:p>
             <a:pPr algn="ctr">
+              <a:lnSpc>
+                <a:spcPct val="100000"/>
+              </a:lnSpc>
               <a:spcAft>
                 <a:spcPts val="300"/>
               </a:spcAft>
@@ -3396,9 +3411,13 @@
             </a:endParaRPr>
           </a:p>
           <a:p>
-            <a:pPr algn="ctr"/>
-            <a:r>
-              <a:rPr sz="1100">
+            <a:pPr algn="ctr">
+              <a:lnSpc>
+                <a:spcPct val="100000"/>
+              </a:lnSpc>
+            </a:pPr>
+            <a:r>
+              <a:rPr sz="1100" b="0">
                 <a:solidFill>
                   <a:srgbClr val="52514E"/>
                 </a:solidFill>
@@ -3406,7 +3425,7 @@
               </a:rPr>
               <a:t>6 anomaly detectors + 5 trajectory</a:t>
             </a:r>
-            <a:endParaRPr sz="1100">
+            <a:endParaRPr sz="1100" b="0">
               <a:solidFill>
                 <a:srgbClr val="52514E"/>
               </a:solidFill>
@@ -3414,9 +3433,13 @@
             </a:endParaRPr>
           </a:p>
           <a:p>
-            <a:pPr algn="ctr"/>
-            <a:r>
-              <a:rPr sz="1100">
+            <a:pPr algn="ctr">
+              <a:lnSpc>
+                <a:spcPct val="100000"/>
+              </a:lnSpc>
+            </a:pPr>
+            <a:r>
+              <a:rPr sz="1100" b="0">
                 <a:solidFill>
                   <a:srgbClr val="52514E"/>
                 </a:solidFill>
@@ -3424,7 +3447,7 @@
               </a:rPr>
               <a:t>regressors, one shared protocol</a:t>
             </a:r>
-            <a:endParaRPr sz="1100">
+            <a:endParaRPr sz="1100" b="0">
               <a:solidFill>
                 <a:srgbClr val="52514E"/>
               </a:solidFill>
@@ -3435,13 +3458,13 @@
       </p:sp>
       <p:sp>
         <p:nvSpPr>
-          <p:cNvPr id="9" name="Rounded Rectangle 8"/>
+          <p:cNvPr id="8" name="Rounded Rectangle 7"/>
           <p:cNvSpPr/>
           <p:nvPr/>
         </p:nvSpPr>
         <p:spPr>
           <a:xfrm>
-            <a:off x="8061807" y="4617720"/>
+            <a:off x="8065008" y="4617720"/>
             <a:ext cx="2743200" cy="1170432"/>
           </a:xfrm>
           <a:prstGeom prst="roundRect">
@@ -3476,6 +3499,9 @@
           <a:lstStyle/>
           <a:p>
             <a:pPr algn="ctr">
+              <a:lnSpc>
+                <a:spcPct val="100000"/>
+              </a:lnSpc>
               <a:spcAft>
                 <a:spcPts val="300"/>
               </a:spcAft>
@@ -3497,9 +3523,13 @@
             </a:endParaRPr>
           </a:p>
           <a:p>
-            <a:pPr algn="ctr"/>
-            <a:r>
-              <a:rPr sz="1100">
+            <a:pPr algn="ctr">
+              <a:lnSpc>
+                <a:spcPct val="100000"/>
+              </a:lnSpc>
+            </a:pPr>
+            <a:r>
+              <a:rPr sz="1100" b="0">
                 <a:solidFill>
                   <a:srgbClr val="52514E"/>
                 </a:solidFill>
@@ -3507,7 +3537,7 @@
               </a:rPr>
               <a:t>100 ms Aido Rover streaming ·</a:t>
             </a:r>
-            <a:endParaRPr sz="1100">
+            <a:endParaRPr sz="1100" b="0">
               <a:solidFill>
                 <a:srgbClr val="52514E"/>
               </a:solidFill>
@@ -3515,9 +3545,13 @@
             </a:endParaRPr>
           </a:p>
           <a:p>
-            <a:pPr algn="ctr"/>
-            <a:r>
-              <a:rPr sz="1100">
+            <a:pPr algn="ctr">
+              <a:lnSpc>
+                <a:spcPct val="100000"/>
+              </a:lnSpc>
+            </a:pPr>
+            <a:r>
+              <a:rPr sz="1100" b="0">
                 <a:solidFill>
                   <a:srgbClr val="52514E"/>
                 </a:solidFill>
@@ -3525,7 +3559,7 @@
               </a:rPr>
               <a:t>50 ms Aido Humanoid planning</a:t>
             </a:r>
-            <a:endParaRPr sz="1100">
+            <a:endParaRPr sz="1100" b="0">
               <a:solidFill>
                 <a:srgbClr val="52514E"/>
               </a:solidFill>
@@ -3536,7 +3570,7 @@
       </p:sp>
       <p:sp>
         <p:nvSpPr>
-          <p:cNvPr id="10" name="TextBox 9"/>
+          <p:cNvPr id="9" name="TextBox 8"/>
           <p:cNvSpPr txBox="1"/>
           <p:nvPr/>
         </p:nvSpPr>
@@ -3551,7 +3585,7 @@
           <a:noFill/>
         </p:spPr>
         <p:txBody>
-          <a:bodyPr wrap="square" lIns="0" tIns="0" rIns="0" bIns="0" anchor="t">
+          <a:bodyPr wrap="square" lIns="0" tIns="0" rIns="0" bIns="0">
             <a:spAutoFit/>
           </a:bodyPr>
           <a:lstStyle/>
@@ -3569,51 +3603,6 @@
                 <a:latin typeface="Calibri" panose="020F0502020204030204"/>
               </a:rPr>
               <a:t>InGen Dynamics · ML &amp; NN Analyst Internship — Mid-Point Review (W1–W4)</a:t>
-            </a:r>
-            <a:endParaRPr sz="900" b="0">
-              <a:solidFill>
-                <a:srgbClr val="898781"/>
-              </a:solidFill>
-              <a:latin typeface="Calibri" panose="020F0502020204030204"/>
-            </a:endParaRPr>
-          </a:p>
-        </p:txBody>
-      </p:sp>
-      <p:sp>
-        <p:nvSpPr>
-          <p:cNvPr id="11" name="TextBox 10"/>
-          <p:cNvSpPr txBox="1"/>
-          <p:nvPr/>
-        </p:nvSpPr>
-        <p:spPr>
-          <a:xfrm>
-            <a:off x="10972800" y="6510528"/>
-            <a:ext cx="667512" cy="274320"/>
-          </a:xfrm>
-          <a:prstGeom prst="rect">
-            <a:avLst/>
-          </a:prstGeom>
-          <a:noFill/>
-        </p:spPr>
-        <p:txBody>
-          <a:bodyPr wrap="square" lIns="0" tIns="0" rIns="0" bIns="0" anchor="t">
-            <a:spAutoFit/>
-          </a:bodyPr>
-          <a:lstStyle/>
-          <a:p>
-            <a:pPr algn="r">
-              <a:lnSpc>
-                <a:spcPct val="106000"/>
-              </a:lnSpc>
-            </a:pPr>
-            <a:r>
-              <a:rPr sz="900" b="0">
-                <a:solidFill>
-                  <a:srgbClr val="898781"/>
-                </a:solidFill>
-                <a:latin typeface="Calibri" panose="020F0502020204030204"/>
-              </a:rPr>
-              <a:t>1 / 7</a:t>
             </a:r>
             <a:endParaRPr sz="900" b="0">
               <a:solidFill>
@@ -3651,7 +3640,7 @@
         <p:spPr>
           <a:xfrm>
             <a:off x="548640" y="292608"/>
-            <a:ext cx="11091672" cy="566928"/>
+            <a:ext cx="11091672" cy="374650"/>
           </a:xfrm>
           <a:prstGeom prst="rect">
             <a:avLst/>
@@ -3659,7 +3648,7 @@
           <a:noFill/>
         </p:spPr>
         <p:txBody>
-          <a:bodyPr wrap="square" lIns="0" tIns="0" rIns="0" bIns="0" anchor="t">
+          <a:bodyPr wrap="square" lIns="0" tIns="0" rIns="0" bIns="0">
             <a:spAutoFit/>
           </a:bodyPr>
           <a:lstStyle/>
@@ -3676,7 +3665,7 @@
                 </a:solidFill>
                 <a:latin typeface="Calibri" panose="020F0502020204030204"/>
               </a:rPr>
-              <a:t>All six models clear the 100 ms gate ≥12× — top F1 0.829 is a capacity effect</a:t>
+              <a:t>One world core, one split, one standard</a:t>
             </a:r>
             <a:endParaRPr sz="2300" b="1">
               <a:solidFill>
@@ -3704,7 +3693,7 @@
           <a:noFill/>
         </p:spPr>
         <p:txBody>
-          <a:bodyPr wrap="square" lIns="0" tIns="0" rIns="0" bIns="0" anchor="t">
+          <a:bodyPr wrap="square" lIns="0" tIns="0" rIns="0" bIns="0">
             <a:spAutoFit/>
           </a:bodyPr>
           <a:lstStyle/>
@@ -3721,7 +3710,7 @@
                 </a:solidFill>
                 <a:latin typeface="Calibri" panose="020F0502020204030204"/>
               </a:rPr>
-              <a:t>Headline · Aido Rover anomaly detection · 7-fold block-rotation mean ± std on the canonical split · single-sample CPU latency</a:t>
+              <a:t>Weeks 2–4 · the shared scaffolding and feature pipeline behind every number in this deck</a:t>
             </a:r>
             <a:endParaRPr sz="1300" b="0">
               <a:solidFill>
@@ -3776,1263 +3765,9 @@
           </a:p>
         </p:txBody>
       </p:sp>
-      <p:graphicFrame>
-        <p:nvGraphicFramePr>
-          <p:cNvPr id="5" name="Table 4"/>
-          <p:cNvGraphicFramePr>
-            <a:graphicFrameLocks noGrp="1"/>
-          </p:cNvGraphicFramePr>
-          <p:nvPr/>
-        </p:nvGraphicFramePr>
-        <p:xfrm>
-          <a:off x="548640" y="1417320"/>
-          <a:ext cx="5897880" cy="2139696"/>
-        </p:xfrm>
-        <a:graphic>
-          <a:graphicData uri="http://schemas.openxmlformats.org/drawingml/2006/table">
-            <a:tbl>
-              <a:tblPr>
-                <a:tableStyleId>{5C22544A-7EE6-4342-B048-85BDC9FD1C3A}</a:tableStyleId>
-              </a:tblPr>
-              <a:tblGrid>
-                <a:gridCol w="1417320"/>
-                <a:gridCol w="1417320"/>
-                <a:gridCol w="1417320"/>
-                <a:gridCol w="868680"/>
-                <a:gridCol w="777240"/>
-              </a:tblGrid>
-              <a:tr h="329184">
-                <a:tc>
-                  <a:txBody>
-                    <a:bodyPr wrap="none"/>
-                    <a:lstStyle/>
-                    <a:p>
-                      <a:pPr algn="l"/>
-                      <a:r>
-                        <a:rPr sz="1150" b="1">
-                          <a:solidFill>
-                            <a:srgbClr val="FFFFFF"/>
-                          </a:solidFill>
-                          <a:latin typeface="Calibri" panose="020F0502020204030204"/>
-                        </a:rPr>
-                        <a:t>Model</a:t>
-                      </a:r>
-                      <a:endParaRPr sz="1150" b="1">
-                        <a:solidFill>
-                          <a:srgbClr val="FFFFFF"/>
-                        </a:solidFill>
-                        <a:latin typeface="Calibri" panose="020F0502020204030204"/>
-                      </a:endParaRPr>
-                    </a:p>
-                  </a:txBody>
-                  <a:tcPr marL="73152" marR="54864" marT="18288" marB="18288" anchor="ctr">
-                    <a:solidFill>
-                      <a:srgbClr val="1C5CAB"/>
-                    </a:solidFill>
-                  </a:tcPr>
-                </a:tc>
-                <a:tc>
-                  <a:txBody>
-                    <a:bodyPr wrap="none"/>
-                    <a:lstStyle/>
-                    <a:p>
-                      <a:pPr algn="ctr"/>
-                      <a:r>
-                        <a:rPr sz="1150" b="1">
-                          <a:solidFill>
-                            <a:srgbClr val="FFFFFF"/>
-                          </a:solidFill>
-                          <a:latin typeface="Calibri" panose="020F0502020204030204"/>
-                        </a:rPr>
-                        <a:t>F1 (7-fold)</a:t>
-                      </a:r>
-                      <a:endParaRPr sz="1150" b="1">
-                        <a:solidFill>
-                          <a:srgbClr val="FFFFFF"/>
-                        </a:solidFill>
-                        <a:latin typeface="Calibri" panose="020F0502020204030204"/>
-                      </a:endParaRPr>
-                    </a:p>
-                  </a:txBody>
-                  <a:tcPr marL="73152" marR="54864" marT="18288" marB="18288" anchor="ctr">
-                    <a:solidFill>
-                      <a:srgbClr val="1C5CAB"/>
-                    </a:solidFill>
-                  </a:tcPr>
-                </a:tc>
-                <a:tc>
-                  <a:txBody>
-                    <a:bodyPr wrap="none"/>
-                    <a:lstStyle/>
-                    <a:p>
-                      <a:pPr algn="ctr"/>
-                      <a:r>
-                        <a:rPr sz="1150" b="1">
-                          <a:solidFill>
-                            <a:srgbClr val="FFFFFF"/>
-                          </a:solidFill>
-                          <a:latin typeface="Calibri" panose="020F0502020204030204"/>
-                        </a:rPr>
-                        <a:t>AUC (7-fold)</a:t>
-                      </a:r>
-                      <a:endParaRPr sz="1150" b="1">
-                        <a:solidFill>
-                          <a:srgbClr val="FFFFFF"/>
-                        </a:solidFill>
-                        <a:latin typeface="Calibri" panose="020F0502020204030204"/>
-                      </a:endParaRPr>
-                    </a:p>
-                  </a:txBody>
-                  <a:tcPr marL="73152" marR="54864" marT="18288" marB="18288" anchor="ctr">
-                    <a:solidFill>
-                      <a:srgbClr val="1C5CAB"/>
-                    </a:solidFill>
-                  </a:tcPr>
-                </a:tc>
-                <a:tc>
-                  <a:txBody>
-                    <a:bodyPr wrap="none"/>
-                    <a:lstStyle/>
-                    <a:p>
-                      <a:pPr algn="ctr"/>
-                      <a:r>
-                        <a:rPr sz="1150" b="1">
-                          <a:solidFill>
-                            <a:srgbClr val="FFFFFF"/>
-                          </a:solidFill>
-                          <a:latin typeface="Calibri" panose="020F0502020204030204"/>
-                        </a:rPr>
-                        <a:t>ms</a:t>
-                      </a:r>
-                      <a:endParaRPr sz="1150" b="1">
-                        <a:solidFill>
-                          <a:srgbClr val="FFFFFF"/>
-                        </a:solidFill>
-                        <a:latin typeface="Calibri" panose="020F0502020204030204"/>
-                      </a:endParaRPr>
-                    </a:p>
-                  </a:txBody>
-                  <a:tcPr marL="73152" marR="54864" marT="18288" marB="18288" anchor="ctr">
-                    <a:solidFill>
-                      <a:srgbClr val="1C5CAB"/>
-                    </a:solidFill>
-                  </a:tcPr>
-                </a:tc>
-                <a:tc>
-                  <a:txBody>
-                    <a:bodyPr wrap="none"/>
-                    <a:lstStyle/>
-                    <a:p>
-                      <a:pPr algn="ctr"/>
-                      <a:r>
-                        <a:rPr sz="1150" b="1">
-                          <a:solidFill>
-                            <a:srgbClr val="FFFFFF"/>
-                          </a:solidFill>
-                          <a:latin typeface="Calibri" panose="020F0502020204030204"/>
-                        </a:rPr>
-                        <a:t>≤100 ms</a:t>
-                      </a:r>
-                      <a:endParaRPr sz="1150" b="1">
-                        <a:solidFill>
-                          <a:srgbClr val="FFFFFF"/>
-                        </a:solidFill>
-                        <a:latin typeface="Calibri" panose="020F0502020204030204"/>
-                      </a:endParaRPr>
-                    </a:p>
-                  </a:txBody>
-                  <a:tcPr marL="73152" marR="54864" marT="18288" marB="18288" anchor="ctr">
-                    <a:solidFill>
-                      <a:srgbClr val="1C5CAB"/>
-                    </a:solidFill>
-                  </a:tcPr>
-                </a:tc>
-              </a:tr>
-              <a:tr h="301752">
-                <a:tc>
-                  <a:txBody>
-                    <a:bodyPr wrap="none"/>
-                    <a:lstStyle/>
-                    <a:p>
-                      <a:pPr algn="l"/>
-                      <a:r>
-                        <a:rPr sz="1150" b="0">
-                          <a:solidFill>
-                            <a:srgbClr val="1A1A1A"/>
-                          </a:solidFill>
-                          <a:latin typeface="Calibri" panose="020F0502020204030204"/>
-                        </a:rPr>
-                        <a:t>RandomForest</a:t>
-                      </a:r>
-                      <a:endParaRPr sz="1150" b="0">
-                        <a:solidFill>
-                          <a:srgbClr val="1A1A1A"/>
-                        </a:solidFill>
-                        <a:latin typeface="Calibri" panose="020F0502020204030204"/>
-                      </a:endParaRPr>
-                    </a:p>
-                  </a:txBody>
-                  <a:tcPr marL="73152" marR="54864" marT="18288" marB="18288" anchor="ctr">
-                    <a:solidFill>
-                      <a:srgbClr val="FFFFFF"/>
-                    </a:solidFill>
-                  </a:tcPr>
-                </a:tc>
-                <a:tc>
-                  <a:txBody>
-                    <a:bodyPr wrap="none"/>
-                    <a:lstStyle/>
-                    <a:p>
-                      <a:pPr algn="ctr"/>
-                      <a:r>
-                        <a:rPr sz="1150" b="0">
-                          <a:solidFill>
-                            <a:srgbClr val="1A1A1A"/>
-                          </a:solidFill>
-                          <a:latin typeface="Calibri" panose="020F0502020204030204"/>
-                        </a:rPr>
-                        <a:t>0.749 ± 0.048</a:t>
-                      </a:r>
-                      <a:endParaRPr sz="1150" b="0">
-                        <a:solidFill>
-                          <a:srgbClr val="1A1A1A"/>
-                        </a:solidFill>
-                        <a:latin typeface="Calibri" panose="020F0502020204030204"/>
-                      </a:endParaRPr>
-                    </a:p>
-                  </a:txBody>
-                  <a:tcPr marL="73152" marR="54864" marT="18288" marB="18288" anchor="ctr">
-                    <a:solidFill>
-                      <a:srgbClr val="FFFFFF"/>
-                    </a:solidFill>
-                  </a:tcPr>
-                </a:tc>
-                <a:tc>
-                  <a:txBody>
-                    <a:bodyPr wrap="none"/>
-                    <a:lstStyle/>
-                    <a:p>
-                      <a:pPr algn="ctr"/>
-                      <a:r>
-                        <a:rPr sz="1150" b="0">
-                          <a:solidFill>
-                            <a:srgbClr val="1A1A1A"/>
-                          </a:solidFill>
-                          <a:latin typeface="Calibri" panose="020F0502020204030204"/>
-                        </a:rPr>
-                        <a:t>0.960 ± 0.009</a:t>
-                      </a:r>
-                      <a:endParaRPr sz="1150" b="0">
-                        <a:solidFill>
-                          <a:srgbClr val="1A1A1A"/>
-                        </a:solidFill>
-                        <a:latin typeface="Calibri" panose="020F0502020204030204"/>
-                      </a:endParaRPr>
-                    </a:p>
-                  </a:txBody>
-                  <a:tcPr marL="73152" marR="54864" marT="18288" marB="18288" anchor="ctr">
-                    <a:solidFill>
-                      <a:srgbClr val="FFFFFF"/>
-                    </a:solidFill>
-                  </a:tcPr>
-                </a:tc>
-                <a:tc>
-                  <a:txBody>
-                    <a:bodyPr wrap="none"/>
-                    <a:lstStyle/>
-                    <a:p>
-                      <a:pPr algn="ctr"/>
-                      <a:r>
-                        <a:rPr sz="1150" b="0">
-                          <a:solidFill>
-                            <a:srgbClr val="1A1A1A"/>
-                          </a:solidFill>
-                          <a:latin typeface="Calibri" panose="020F0502020204030204"/>
-                        </a:rPr>
-                        <a:t>7.86</a:t>
-                      </a:r>
-                      <a:endParaRPr sz="1150" b="0">
-                        <a:solidFill>
-                          <a:srgbClr val="1A1A1A"/>
-                        </a:solidFill>
-                        <a:latin typeface="Calibri" panose="020F0502020204030204"/>
-                      </a:endParaRPr>
-                    </a:p>
-                  </a:txBody>
-                  <a:tcPr marL="73152" marR="54864" marT="18288" marB="18288" anchor="ctr">
-                    <a:solidFill>
-                      <a:srgbClr val="FFFFFF"/>
-                    </a:solidFill>
-                  </a:tcPr>
-                </a:tc>
-                <a:tc>
-                  <a:txBody>
-                    <a:bodyPr wrap="none"/>
-                    <a:lstStyle/>
-                    <a:p>
-                      <a:pPr algn="ctr"/>
-                      <a:r>
-                        <a:rPr sz="1150" b="1">
-                          <a:solidFill>
-                            <a:srgbClr val="006300"/>
-                          </a:solidFill>
-                          <a:latin typeface="Calibri" panose="020F0502020204030204"/>
-                        </a:rPr>
-                        <a:t>PASS</a:t>
-                      </a:r>
-                      <a:endParaRPr sz="1150" b="1">
-                        <a:solidFill>
-                          <a:srgbClr val="006300"/>
-                        </a:solidFill>
-                        <a:latin typeface="Calibri" panose="020F0502020204030204"/>
-                      </a:endParaRPr>
-                    </a:p>
-                  </a:txBody>
-                  <a:tcPr marL="73152" marR="54864" marT="18288" marB="18288" anchor="ctr">
-                    <a:solidFill>
-                      <a:srgbClr val="FFFFFF"/>
-                    </a:solidFill>
-                  </a:tcPr>
-                </a:tc>
-              </a:tr>
-              <a:tr h="301752">
-                <a:tc>
-                  <a:txBody>
-                    <a:bodyPr wrap="none"/>
-                    <a:lstStyle/>
-                    <a:p>
-                      <a:pPr algn="l"/>
-                      <a:r>
-                        <a:rPr sz="1150" b="1">
-                          <a:solidFill>
-                            <a:srgbClr val="1A1A1A"/>
-                          </a:solidFill>
-                          <a:latin typeface="Calibri" panose="020F0502020204030204"/>
-                        </a:rPr>
-                        <a:t>MLP</a:t>
-                      </a:r>
-                      <a:endParaRPr sz="1150" b="1">
-                        <a:solidFill>
-                          <a:srgbClr val="1A1A1A"/>
-                        </a:solidFill>
-                        <a:latin typeface="Calibri" panose="020F0502020204030204"/>
-                      </a:endParaRPr>
-                    </a:p>
-                  </a:txBody>
-                  <a:tcPr marL="73152" marR="54864" marT="18288" marB="18288" anchor="ctr">
-                    <a:solidFill>
-                      <a:srgbClr val="FCE9DF"/>
-                    </a:solidFill>
-                  </a:tcPr>
-                </a:tc>
-                <a:tc>
-                  <a:txBody>
-                    <a:bodyPr wrap="none"/>
-                    <a:lstStyle/>
-                    <a:p>
-                      <a:pPr algn="ctr"/>
-                      <a:r>
-                        <a:rPr sz="1150" b="0">
-                          <a:solidFill>
-                            <a:srgbClr val="1A1A1A"/>
-                          </a:solidFill>
-                          <a:latin typeface="Calibri" panose="020F0502020204030204"/>
-                        </a:rPr>
-                        <a:t>0.794 ± 0.047</a:t>
-                      </a:r>
-                      <a:endParaRPr sz="1150" b="0">
-                        <a:solidFill>
-                          <a:srgbClr val="1A1A1A"/>
-                        </a:solidFill>
-                        <a:latin typeface="Calibri" panose="020F0502020204030204"/>
-                      </a:endParaRPr>
-                    </a:p>
-                  </a:txBody>
-                  <a:tcPr marL="73152" marR="54864" marT="18288" marB="18288" anchor="ctr">
-                    <a:solidFill>
-                      <a:srgbClr val="FCE9DF"/>
-                    </a:solidFill>
-                  </a:tcPr>
-                </a:tc>
-                <a:tc>
-                  <a:txBody>
-                    <a:bodyPr wrap="none"/>
-                    <a:lstStyle/>
-                    <a:p>
-                      <a:pPr algn="ctr"/>
-                      <a:r>
-                        <a:rPr sz="1150" b="0">
-                          <a:solidFill>
-                            <a:srgbClr val="1A1A1A"/>
-                          </a:solidFill>
-                          <a:latin typeface="Calibri" panose="020F0502020204030204"/>
-                        </a:rPr>
-                        <a:t>0.979 ± 0.011</a:t>
-                      </a:r>
-                      <a:endParaRPr sz="1150" b="0">
-                        <a:solidFill>
-                          <a:srgbClr val="1A1A1A"/>
-                        </a:solidFill>
-                        <a:latin typeface="Calibri" panose="020F0502020204030204"/>
-                      </a:endParaRPr>
-                    </a:p>
-                  </a:txBody>
-                  <a:tcPr marL="73152" marR="54864" marT="18288" marB="18288" anchor="ctr">
-                    <a:solidFill>
-                      <a:srgbClr val="FCE9DF"/>
-                    </a:solidFill>
-                  </a:tcPr>
-                </a:tc>
-                <a:tc>
-                  <a:txBody>
-                    <a:bodyPr wrap="none"/>
-                    <a:lstStyle/>
-                    <a:p>
-                      <a:pPr algn="ctr"/>
-                      <a:r>
-                        <a:rPr sz="1150" b="0">
-                          <a:solidFill>
-                            <a:srgbClr val="1A1A1A"/>
-                          </a:solidFill>
-                          <a:latin typeface="Calibri" panose="020F0502020204030204"/>
-                        </a:rPr>
-                        <a:t>0.14</a:t>
-                      </a:r>
-                      <a:endParaRPr sz="1150" b="0">
-                        <a:solidFill>
-                          <a:srgbClr val="1A1A1A"/>
-                        </a:solidFill>
-                        <a:latin typeface="Calibri" panose="020F0502020204030204"/>
-                      </a:endParaRPr>
-                    </a:p>
-                  </a:txBody>
-                  <a:tcPr marL="73152" marR="54864" marT="18288" marB="18288" anchor="ctr">
-                    <a:solidFill>
-                      <a:srgbClr val="FCE9DF"/>
-                    </a:solidFill>
-                  </a:tcPr>
-                </a:tc>
-                <a:tc>
-                  <a:txBody>
-                    <a:bodyPr wrap="none"/>
-                    <a:lstStyle/>
-                    <a:p>
-                      <a:pPr algn="ctr"/>
-                      <a:r>
-                        <a:rPr sz="1150" b="1">
-                          <a:solidFill>
-                            <a:srgbClr val="006300"/>
-                          </a:solidFill>
-                          <a:latin typeface="Calibri" panose="020F0502020204030204"/>
-                        </a:rPr>
-                        <a:t>PASS</a:t>
-                      </a:r>
-                      <a:endParaRPr sz="1150" b="1">
-                        <a:solidFill>
-                          <a:srgbClr val="006300"/>
-                        </a:solidFill>
-                        <a:latin typeface="Calibri" panose="020F0502020204030204"/>
-                      </a:endParaRPr>
-                    </a:p>
-                  </a:txBody>
-                  <a:tcPr marL="73152" marR="54864" marT="18288" marB="18288" anchor="ctr">
-                    <a:solidFill>
-                      <a:srgbClr val="FCE9DF"/>
-                    </a:solidFill>
-                  </a:tcPr>
-                </a:tc>
-              </a:tr>
-              <a:tr h="301752">
-                <a:tc>
-                  <a:txBody>
-                    <a:bodyPr wrap="none"/>
-                    <a:lstStyle/>
-                    <a:p>
-                      <a:pPr algn="l"/>
-                      <a:r>
-                        <a:rPr sz="1150" b="0">
-                          <a:solidFill>
-                            <a:srgbClr val="1A1A1A"/>
-                          </a:solidFill>
-                          <a:latin typeface="Calibri" panose="020F0502020204030204"/>
-                        </a:rPr>
-                        <a:t>1D-CNN</a:t>
-                      </a:r>
-                      <a:endParaRPr sz="1150" b="0">
-                        <a:solidFill>
-                          <a:srgbClr val="1A1A1A"/>
-                        </a:solidFill>
-                        <a:latin typeface="Calibri" panose="020F0502020204030204"/>
-                      </a:endParaRPr>
-                    </a:p>
-                  </a:txBody>
-                  <a:tcPr marL="73152" marR="54864" marT="18288" marB="18288" anchor="ctr">
-                    <a:solidFill>
-                      <a:srgbClr val="FFFFFF"/>
-                    </a:solidFill>
-                  </a:tcPr>
-                </a:tc>
-                <a:tc>
-                  <a:txBody>
-                    <a:bodyPr wrap="none"/>
-                    <a:lstStyle/>
-                    <a:p>
-                      <a:pPr algn="ctr"/>
-                      <a:r>
-                        <a:rPr sz="1150" b="0">
-                          <a:solidFill>
-                            <a:srgbClr val="1A1A1A"/>
-                          </a:solidFill>
-                          <a:latin typeface="Calibri" panose="020F0502020204030204"/>
-                        </a:rPr>
-                        <a:t>0.731 ± 0.115</a:t>
-                      </a:r>
-                      <a:endParaRPr sz="1150" b="0">
-                        <a:solidFill>
-                          <a:srgbClr val="1A1A1A"/>
-                        </a:solidFill>
-                        <a:latin typeface="Calibri" panose="020F0502020204030204"/>
-                      </a:endParaRPr>
-                    </a:p>
-                  </a:txBody>
-                  <a:tcPr marL="73152" marR="54864" marT="18288" marB="18288" anchor="ctr">
-                    <a:solidFill>
-                      <a:srgbClr val="FFFFFF"/>
-                    </a:solidFill>
-                  </a:tcPr>
-                </a:tc>
-                <a:tc>
-                  <a:txBody>
-                    <a:bodyPr wrap="none"/>
-                    <a:lstStyle/>
-                    <a:p>
-                      <a:pPr algn="ctr"/>
-                      <a:r>
-                        <a:rPr sz="1150" b="0">
-                          <a:solidFill>
-                            <a:srgbClr val="1A1A1A"/>
-                          </a:solidFill>
-                          <a:latin typeface="Calibri" panose="020F0502020204030204"/>
-                        </a:rPr>
-                        <a:t>0.965 ± 0.022</a:t>
-                      </a:r>
-                      <a:endParaRPr sz="1150" b="0">
-                        <a:solidFill>
-                          <a:srgbClr val="1A1A1A"/>
-                        </a:solidFill>
-                        <a:latin typeface="Calibri" panose="020F0502020204030204"/>
-                      </a:endParaRPr>
-                    </a:p>
-                  </a:txBody>
-                  <a:tcPr marL="73152" marR="54864" marT="18288" marB="18288" anchor="ctr">
-                    <a:solidFill>
-                      <a:srgbClr val="FFFFFF"/>
-                    </a:solidFill>
-                  </a:tcPr>
-                </a:tc>
-                <a:tc>
-                  <a:txBody>
-                    <a:bodyPr wrap="none"/>
-                    <a:lstStyle/>
-                    <a:p>
-                      <a:pPr algn="ctr"/>
-                      <a:r>
-                        <a:rPr sz="1150" b="0">
-                          <a:solidFill>
-                            <a:srgbClr val="1A1A1A"/>
-                          </a:solidFill>
-                          <a:latin typeface="Calibri" panose="020F0502020204030204"/>
-                        </a:rPr>
-                        <a:t>0.15</a:t>
-                      </a:r>
-                      <a:endParaRPr sz="1150" b="0">
-                        <a:solidFill>
-                          <a:srgbClr val="1A1A1A"/>
-                        </a:solidFill>
-                        <a:latin typeface="Calibri" panose="020F0502020204030204"/>
-                      </a:endParaRPr>
-                    </a:p>
-                  </a:txBody>
-                  <a:tcPr marL="73152" marR="54864" marT="18288" marB="18288" anchor="ctr">
-                    <a:solidFill>
-                      <a:srgbClr val="FFFFFF"/>
-                    </a:solidFill>
-                  </a:tcPr>
-                </a:tc>
-                <a:tc>
-                  <a:txBody>
-                    <a:bodyPr wrap="none"/>
-                    <a:lstStyle/>
-                    <a:p>
-                      <a:pPr algn="ctr"/>
-                      <a:r>
-                        <a:rPr sz="1150" b="1">
-                          <a:solidFill>
-                            <a:srgbClr val="006300"/>
-                          </a:solidFill>
-                          <a:latin typeface="Calibri" panose="020F0502020204030204"/>
-                        </a:rPr>
-                        <a:t>PASS</a:t>
-                      </a:r>
-                      <a:endParaRPr sz="1150" b="1">
-                        <a:solidFill>
-                          <a:srgbClr val="006300"/>
-                        </a:solidFill>
-                        <a:latin typeface="Calibri" panose="020F0502020204030204"/>
-                      </a:endParaRPr>
-                    </a:p>
-                  </a:txBody>
-                  <a:tcPr marL="73152" marR="54864" marT="18288" marB="18288" anchor="ctr">
-                    <a:solidFill>
-                      <a:srgbClr val="FFFFFF"/>
-                    </a:solidFill>
-                  </a:tcPr>
-                </a:tc>
-              </a:tr>
-              <a:tr h="301752">
-                <a:tc>
-                  <a:txBody>
-                    <a:bodyPr wrap="none"/>
-                    <a:lstStyle/>
-                    <a:p>
-                      <a:pPr algn="l"/>
-                      <a:r>
-                        <a:rPr sz="1150" b="0">
-                          <a:solidFill>
-                            <a:srgbClr val="1A1A1A"/>
-                          </a:solidFill>
-                          <a:latin typeface="Calibri" panose="020F0502020204030204"/>
-                        </a:rPr>
-                        <a:t>LSTM</a:t>
-                      </a:r>
-                      <a:endParaRPr sz="1150" b="0">
-                        <a:solidFill>
-                          <a:srgbClr val="1A1A1A"/>
-                        </a:solidFill>
-                        <a:latin typeface="Calibri" panose="020F0502020204030204"/>
-                      </a:endParaRPr>
-                    </a:p>
-                  </a:txBody>
-                  <a:tcPr marL="73152" marR="54864" marT="18288" marB="18288" anchor="ctr">
-                    <a:solidFill>
-                      <a:srgbClr val="F7F8FA"/>
-                    </a:solidFill>
-                  </a:tcPr>
-                </a:tc>
-                <a:tc>
-                  <a:txBody>
-                    <a:bodyPr wrap="none"/>
-                    <a:lstStyle/>
-                    <a:p>
-                      <a:pPr algn="ctr"/>
-                      <a:r>
-                        <a:rPr sz="1150" b="0">
-                          <a:solidFill>
-                            <a:srgbClr val="1A1A1A"/>
-                          </a:solidFill>
-                          <a:latin typeface="Calibri" panose="020F0502020204030204"/>
-                        </a:rPr>
-                        <a:t>0.704 ± 0.159</a:t>
-                      </a:r>
-                      <a:endParaRPr sz="1150" b="0">
-                        <a:solidFill>
-                          <a:srgbClr val="1A1A1A"/>
-                        </a:solidFill>
-                        <a:latin typeface="Calibri" panose="020F0502020204030204"/>
-                      </a:endParaRPr>
-                    </a:p>
-                  </a:txBody>
-                  <a:tcPr marL="73152" marR="54864" marT="18288" marB="18288" anchor="ctr">
-                    <a:solidFill>
-                      <a:srgbClr val="F7F8FA"/>
-                    </a:solidFill>
-                  </a:tcPr>
-                </a:tc>
-                <a:tc>
-                  <a:txBody>
-                    <a:bodyPr wrap="none"/>
-                    <a:lstStyle/>
-                    <a:p>
-                      <a:pPr algn="ctr"/>
-                      <a:r>
-                        <a:rPr sz="1150" b="0">
-                          <a:solidFill>
-                            <a:srgbClr val="1A1A1A"/>
-                          </a:solidFill>
-                          <a:latin typeface="Calibri" panose="020F0502020204030204"/>
-                        </a:rPr>
-                        <a:t>0.969 ± 0.014</a:t>
-                      </a:r>
-                      <a:endParaRPr sz="1150" b="0">
-                        <a:solidFill>
-                          <a:srgbClr val="1A1A1A"/>
-                        </a:solidFill>
-                        <a:latin typeface="Calibri" panose="020F0502020204030204"/>
-                      </a:endParaRPr>
-                    </a:p>
-                  </a:txBody>
-                  <a:tcPr marL="73152" marR="54864" marT="18288" marB="18288" anchor="ctr">
-                    <a:solidFill>
-                      <a:srgbClr val="F7F8FA"/>
-                    </a:solidFill>
-                  </a:tcPr>
-                </a:tc>
-                <a:tc>
-                  <a:txBody>
-                    <a:bodyPr wrap="none"/>
-                    <a:lstStyle/>
-                    <a:p>
-                      <a:pPr algn="ctr"/>
-                      <a:r>
-                        <a:rPr sz="1150" b="0">
-                          <a:solidFill>
-                            <a:srgbClr val="1A1A1A"/>
-                          </a:solidFill>
-                          <a:latin typeface="Calibri" panose="020F0502020204030204"/>
-                        </a:rPr>
-                        <a:t>0.19</a:t>
-                      </a:r>
-                      <a:endParaRPr sz="1150" b="0">
-                        <a:solidFill>
-                          <a:srgbClr val="1A1A1A"/>
-                        </a:solidFill>
-                        <a:latin typeface="Calibri" panose="020F0502020204030204"/>
-                      </a:endParaRPr>
-                    </a:p>
-                  </a:txBody>
-                  <a:tcPr marL="73152" marR="54864" marT="18288" marB="18288" anchor="ctr">
-                    <a:solidFill>
-                      <a:srgbClr val="F7F8FA"/>
-                    </a:solidFill>
-                  </a:tcPr>
-                </a:tc>
-                <a:tc>
-                  <a:txBody>
-                    <a:bodyPr wrap="none"/>
-                    <a:lstStyle/>
-                    <a:p>
-                      <a:pPr algn="ctr"/>
-                      <a:r>
-                        <a:rPr sz="1150" b="1">
-                          <a:solidFill>
-                            <a:srgbClr val="006300"/>
-                          </a:solidFill>
-                          <a:latin typeface="Calibri" panose="020F0502020204030204"/>
-                        </a:rPr>
-                        <a:t>PASS</a:t>
-                      </a:r>
-                      <a:endParaRPr sz="1150" b="1">
-                        <a:solidFill>
-                          <a:srgbClr val="006300"/>
-                        </a:solidFill>
-                        <a:latin typeface="Calibri" panose="020F0502020204030204"/>
-                      </a:endParaRPr>
-                    </a:p>
-                  </a:txBody>
-                  <a:tcPr marL="73152" marR="54864" marT="18288" marB="18288" anchor="ctr">
-                    <a:solidFill>
-                      <a:srgbClr val="F7F8FA"/>
-                    </a:solidFill>
-                  </a:tcPr>
-                </a:tc>
-              </a:tr>
-              <a:tr h="301752">
-                <a:tc>
-                  <a:txBody>
-                    <a:bodyPr wrap="none"/>
-                    <a:lstStyle/>
-                    <a:p>
-                      <a:pPr algn="l"/>
-                      <a:r>
-                        <a:rPr sz="1150" b="0">
-                          <a:solidFill>
-                            <a:srgbClr val="1A1A1A"/>
-                          </a:solidFill>
-                          <a:latin typeface="Calibri" panose="020F0502020204030204"/>
-                        </a:rPr>
-                        <a:t>GRU</a:t>
-                      </a:r>
-                      <a:endParaRPr sz="1150" b="0">
-                        <a:solidFill>
-                          <a:srgbClr val="1A1A1A"/>
-                        </a:solidFill>
-                        <a:latin typeface="Calibri" panose="020F0502020204030204"/>
-                      </a:endParaRPr>
-                    </a:p>
-                  </a:txBody>
-                  <a:tcPr marL="73152" marR="54864" marT="18288" marB="18288" anchor="ctr">
-                    <a:solidFill>
-                      <a:srgbClr val="FFFFFF"/>
-                    </a:solidFill>
-                  </a:tcPr>
-                </a:tc>
-                <a:tc>
-                  <a:txBody>
-                    <a:bodyPr wrap="none"/>
-                    <a:lstStyle/>
-                    <a:p>
-                      <a:pPr algn="ctr"/>
-                      <a:r>
-                        <a:rPr sz="1150" b="0">
-                          <a:solidFill>
-                            <a:srgbClr val="1A1A1A"/>
-                          </a:solidFill>
-                          <a:latin typeface="Calibri" panose="020F0502020204030204"/>
-                        </a:rPr>
-                        <a:t>0.747 ± 0.082</a:t>
-                      </a:r>
-                      <a:endParaRPr sz="1150" b="0">
-                        <a:solidFill>
-                          <a:srgbClr val="1A1A1A"/>
-                        </a:solidFill>
-                        <a:latin typeface="Calibri" panose="020F0502020204030204"/>
-                      </a:endParaRPr>
-                    </a:p>
-                  </a:txBody>
-                  <a:tcPr marL="73152" marR="54864" marT="18288" marB="18288" anchor="ctr">
-                    <a:solidFill>
-                      <a:srgbClr val="FFFFFF"/>
-                    </a:solidFill>
-                  </a:tcPr>
-                </a:tc>
-                <a:tc>
-                  <a:txBody>
-                    <a:bodyPr wrap="none"/>
-                    <a:lstStyle/>
-                    <a:p>
-                      <a:pPr algn="ctr"/>
-                      <a:r>
-                        <a:rPr sz="1150" b="0">
-                          <a:solidFill>
-                            <a:srgbClr val="1A1A1A"/>
-                          </a:solidFill>
-                          <a:latin typeface="Calibri" panose="020F0502020204030204"/>
-                        </a:rPr>
-                        <a:t>0.975 ± 0.006</a:t>
-                      </a:r>
-                      <a:endParaRPr sz="1150" b="0">
-                        <a:solidFill>
-                          <a:srgbClr val="1A1A1A"/>
-                        </a:solidFill>
-                        <a:latin typeface="Calibri" panose="020F0502020204030204"/>
-                      </a:endParaRPr>
-                    </a:p>
-                  </a:txBody>
-                  <a:tcPr marL="73152" marR="54864" marT="18288" marB="18288" anchor="ctr">
-                    <a:solidFill>
-                      <a:srgbClr val="FFFFFF"/>
-                    </a:solidFill>
-                  </a:tcPr>
-                </a:tc>
-                <a:tc>
-                  <a:txBody>
-                    <a:bodyPr wrap="none"/>
-                    <a:lstStyle/>
-                    <a:p>
-                      <a:pPr algn="ctr"/>
-                      <a:r>
-                        <a:rPr sz="1150" b="0">
-                          <a:solidFill>
-                            <a:srgbClr val="1A1A1A"/>
-                          </a:solidFill>
-                          <a:latin typeface="Calibri" panose="020F0502020204030204"/>
-                        </a:rPr>
-                        <a:t>0.67</a:t>
-                      </a:r>
-                      <a:endParaRPr sz="1150" b="0">
-                        <a:solidFill>
-                          <a:srgbClr val="1A1A1A"/>
-                        </a:solidFill>
-                        <a:latin typeface="Calibri" panose="020F0502020204030204"/>
-                      </a:endParaRPr>
-                    </a:p>
-                  </a:txBody>
-                  <a:tcPr marL="73152" marR="54864" marT="18288" marB="18288" anchor="ctr">
-                    <a:solidFill>
-                      <a:srgbClr val="FFFFFF"/>
-                    </a:solidFill>
-                  </a:tcPr>
-                </a:tc>
-                <a:tc>
-                  <a:txBody>
-                    <a:bodyPr wrap="none"/>
-                    <a:lstStyle/>
-                    <a:p>
-                      <a:pPr algn="ctr"/>
-                      <a:r>
-                        <a:rPr sz="1150" b="1">
-                          <a:solidFill>
-                            <a:srgbClr val="006300"/>
-                          </a:solidFill>
-                          <a:latin typeface="Calibri" panose="020F0502020204030204"/>
-                        </a:rPr>
-                        <a:t>PASS</a:t>
-                      </a:r>
-                      <a:endParaRPr sz="1150" b="1">
-                        <a:solidFill>
-                          <a:srgbClr val="006300"/>
-                        </a:solidFill>
-                        <a:latin typeface="Calibri" panose="020F0502020204030204"/>
-                      </a:endParaRPr>
-                    </a:p>
-                  </a:txBody>
-                  <a:tcPr marL="73152" marR="54864" marT="18288" marB="18288" anchor="ctr">
-                    <a:solidFill>
-                      <a:srgbClr val="FFFFFF"/>
-                    </a:solidFill>
-                  </a:tcPr>
-                </a:tc>
-              </a:tr>
-              <a:tr h="301752">
-                <a:tc>
-                  <a:txBody>
-                    <a:bodyPr wrap="none"/>
-                    <a:lstStyle/>
-                    <a:p>
-                      <a:pPr algn="l"/>
-                      <a:r>
-                        <a:rPr sz="1150" b="0">
-                          <a:solidFill>
-                            <a:srgbClr val="1A1A1A"/>
-                          </a:solidFill>
-                          <a:latin typeface="Calibri" panose="020F0502020204030204"/>
-                        </a:rPr>
-                        <a:t>Transformer</a:t>
-                      </a:r>
-                      <a:endParaRPr sz="1150" b="0">
-                        <a:solidFill>
-                          <a:srgbClr val="1A1A1A"/>
-                        </a:solidFill>
-                        <a:latin typeface="Calibri" panose="020F0502020204030204"/>
-                      </a:endParaRPr>
-                    </a:p>
-                  </a:txBody>
-                  <a:tcPr marL="73152" marR="54864" marT="18288" marB="18288" anchor="ctr">
-                    <a:solidFill>
-                      <a:srgbClr val="F7F8FA"/>
-                    </a:solidFill>
-                  </a:tcPr>
-                </a:tc>
-                <a:tc>
-                  <a:txBody>
-                    <a:bodyPr wrap="none"/>
-                    <a:lstStyle/>
-                    <a:p>
-                      <a:pPr algn="ctr"/>
-                      <a:r>
-                        <a:rPr sz="1150" b="0">
-                          <a:solidFill>
-                            <a:srgbClr val="1A1A1A"/>
-                          </a:solidFill>
-                          <a:latin typeface="Calibri" panose="020F0502020204030204"/>
-                        </a:rPr>
-                        <a:t>0.829 ± 0.069</a:t>
-                      </a:r>
-                      <a:endParaRPr sz="1150" b="0">
-                        <a:solidFill>
-                          <a:srgbClr val="1A1A1A"/>
-                        </a:solidFill>
-                        <a:latin typeface="Calibri" panose="020F0502020204030204"/>
-                      </a:endParaRPr>
-                    </a:p>
-                  </a:txBody>
-                  <a:tcPr marL="73152" marR="54864" marT="18288" marB="18288" anchor="ctr">
-                    <a:solidFill>
-                      <a:srgbClr val="F7F8FA"/>
-                    </a:solidFill>
-                  </a:tcPr>
-                </a:tc>
-                <a:tc>
-                  <a:txBody>
-                    <a:bodyPr wrap="none"/>
-                    <a:lstStyle/>
-                    <a:p>
-                      <a:pPr algn="ctr"/>
-                      <a:r>
-                        <a:rPr sz="1150" b="0">
-                          <a:solidFill>
-                            <a:srgbClr val="1A1A1A"/>
-                          </a:solidFill>
-                          <a:latin typeface="Calibri" panose="020F0502020204030204"/>
-                        </a:rPr>
-                        <a:t>0.982 ± 0.005</a:t>
-                      </a:r>
-                      <a:endParaRPr sz="1150" b="0">
-                        <a:solidFill>
-                          <a:srgbClr val="1A1A1A"/>
-                        </a:solidFill>
-                        <a:latin typeface="Calibri" panose="020F0502020204030204"/>
-                      </a:endParaRPr>
-                    </a:p>
-                  </a:txBody>
-                  <a:tcPr marL="73152" marR="54864" marT="18288" marB="18288" anchor="ctr">
-                    <a:solidFill>
-                      <a:srgbClr val="F7F8FA"/>
-                    </a:solidFill>
-                  </a:tcPr>
-                </a:tc>
-                <a:tc>
-                  <a:txBody>
-                    <a:bodyPr wrap="none"/>
-                    <a:lstStyle/>
-                    <a:p>
-                      <a:pPr algn="ctr"/>
-                      <a:r>
-                        <a:rPr sz="1150" b="0">
-                          <a:solidFill>
-                            <a:srgbClr val="1A1A1A"/>
-                          </a:solidFill>
-                          <a:latin typeface="Calibri" panose="020F0502020204030204"/>
-                        </a:rPr>
-                        <a:t>0.52</a:t>
-                      </a:r>
-                      <a:endParaRPr sz="1150" b="0">
-                        <a:solidFill>
-                          <a:srgbClr val="1A1A1A"/>
-                        </a:solidFill>
-                        <a:latin typeface="Calibri" panose="020F0502020204030204"/>
-                      </a:endParaRPr>
-                    </a:p>
-                  </a:txBody>
-                  <a:tcPr marL="73152" marR="54864" marT="18288" marB="18288" anchor="ctr">
-                    <a:solidFill>
-                      <a:srgbClr val="F7F8FA"/>
-                    </a:solidFill>
-                  </a:tcPr>
-                </a:tc>
-                <a:tc>
-                  <a:txBody>
-                    <a:bodyPr wrap="none"/>
-                    <a:lstStyle/>
-                    <a:p>
-                      <a:pPr algn="ctr"/>
-                      <a:r>
-                        <a:rPr sz="1150" b="1">
-                          <a:solidFill>
-                            <a:srgbClr val="006300"/>
-                          </a:solidFill>
-                          <a:latin typeface="Calibri" panose="020F0502020204030204"/>
-                        </a:rPr>
-                        <a:t>PASS</a:t>
-                      </a:r>
-                      <a:endParaRPr sz="1150" b="1">
-                        <a:solidFill>
-                          <a:srgbClr val="006300"/>
-                        </a:solidFill>
-                        <a:latin typeface="Calibri" panose="020F0502020204030204"/>
-                      </a:endParaRPr>
-                    </a:p>
-                  </a:txBody>
-                  <a:tcPr marL="73152" marR="54864" marT="18288" marB="18288" anchor="ctr">
-                    <a:solidFill>
-                      <a:srgbClr val="F7F8FA"/>
-                    </a:solidFill>
-                  </a:tcPr>
-                </a:tc>
-              </a:tr>
-            </a:tbl>
-          </a:graphicData>
-        </a:graphic>
-      </p:graphicFrame>
-      <p:sp>
-        <p:nvSpPr>
-          <p:cNvPr id="6" name="TextBox 5"/>
-          <p:cNvSpPr txBox="1"/>
-          <p:nvPr/>
-        </p:nvSpPr>
-        <p:spPr>
-          <a:xfrm>
-            <a:off x="548640" y="3639312"/>
-            <a:ext cx="5623560" cy="228600"/>
-          </a:xfrm>
-          <a:prstGeom prst="rect">
-            <a:avLst/>
-          </a:prstGeom>
-          <a:noFill/>
-        </p:spPr>
-        <p:txBody>
-          <a:bodyPr wrap="square" lIns="0" tIns="0" rIns="0" bIns="0" anchor="t">
-            <a:spAutoFit/>
-          </a:bodyPr>
-          <a:lstStyle/>
-          <a:p>
-            <a:pPr algn="l">
-              <a:lnSpc>
-                <a:spcPct val="106000"/>
-              </a:lnSpc>
-            </a:pPr>
-            <a:r>
-              <a:rPr sz="1100" b="0">
-                <a:solidFill>
-                  <a:srgbClr val="898781"/>
-                </a:solidFill>
-                <a:latin typeface="Calibri" panose="020F0502020204030204"/>
-              </a:rPr>
-              <a:t>All six deployment-feasible; </a:t>
-            </a:r>
-            <a:r>
-              <a:rPr sz="1100" b="1">
-                <a:solidFill>
-                  <a:srgbClr val="52514E"/>
-                </a:solidFill>
-                <a:latin typeface="Calibri" panose="020F0502020204030204"/>
-              </a:rPr>
-              <a:t>highlighted row</a:t>
-            </a:r>
-            <a:r>
-              <a:rPr sz="1100" b="0">
-                <a:solidFill>
-                  <a:srgbClr val="898781"/>
-                </a:solidFill>
-                <a:latin typeface="Calibri" panose="020F0502020204030204"/>
-              </a:rPr>
-              <a:t> = recommended default.</a:t>
-            </a:r>
-            <a:endParaRPr sz="1100" b="0">
-              <a:solidFill>
-                <a:srgbClr val="898781"/>
-              </a:solidFill>
-              <a:latin typeface="Calibri" panose="020F0502020204030204"/>
-            </a:endParaRPr>
-          </a:p>
-        </p:txBody>
-      </p:sp>
-      <p:pic>
-        <p:nvPicPr>
-          <p:cNvPr id="7" name="Picture 6" descr="chartA_latency_vs_f1.png"/>
-          <p:cNvPicPr>
-            <a:picLocks noChangeAspect="1"/>
-          </p:cNvPicPr>
-          <p:nvPr/>
-        </p:nvPicPr>
-        <p:blipFill>
-          <a:blip r:embed="rId1"/>
-          <a:stretch>
-            <a:fillRect/>
-          </a:stretch>
-        </p:blipFill>
-        <p:spPr>
-          <a:xfrm>
-            <a:off x="6355080" y="1325880"/>
-            <a:ext cx="5486400" cy="4160520"/>
-          </a:xfrm>
-          <a:prstGeom prst="rect">
-            <a:avLst/>
-          </a:prstGeom>
-        </p:spPr>
-      </p:pic>
-      <p:sp>
-        <p:nvSpPr>
-          <p:cNvPr id="8" name="TextBox 7"/>
-          <p:cNvSpPr txBox="1"/>
-          <p:nvPr/>
-        </p:nvSpPr>
-        <p:spPr>
-          <a:xfrm>
-            <a:off x="548640" y="4041648"/>
-            <a:ext cx="5623560" cy="2377440"/>
-          </a:xfrm>
-          <a:prstGeom prst="rect">
-            <a:avLst/>
-          </a:prstGeom>
-          <a:noFill/>
-        </p:spPr>
-        <p:txBody>
-          <a:bodyPr wrap="square" lIns="0" tIns="0" rIns="0" bIns="0" anchor="t">
-            <a:spAutoFit/>
-          </a:bodyPr>
-          <a:lstStyle/>
-          <a:p>
-            <a:pPr algn="l">
-              <a:lnSpc>
-                <a:spcPct val="112000"/>
-              </a:lnSpc>
-              <a:spcAft>
-                <a:spcPts val="700"/>
-              </a:spcAft>
-            </a:pPr>
-            <a:r>
-              <a:rPr sz="1200" b="1">
-                <a:solidFill>
-                  <a:srgbClr val="1C5CAB"/>
-                </a:solidFill>
-                <a:latin typeface="Calibri" panose="020F0502020204030204"/>
-              </a:rPr>
-              <a:t>·  </a:t>
-            </a:r>
-            <a:r>
-              <a:rPr sz="1200" b="1">
-                <a:solidFill>
-                  <a:srgbClr val="1A1A1A"/>
-                </a:solidFill>
-                <a:latin typeface="Calibri" panose="020F0502020204030204"/>
-              </a:rPr>
-              <a:t>MLP is the recommended default</a:t>
-            </a:r>
-            <a:r>
-              <a:rPr sz="1200" b="0">
-                <a:solidFill>
-                  <a:srgbClr val="1A1A1A"/>
-                </a:solidFill>
-                <a:latin typeface="Calibri" panose="020F0502020204030204"/>
-              </a:rPr>
-              <a:t>: the Transformer's F1 edge is not real — within noise by a paired t-test (p = 0.34) and a capacity effect that reverses at matched parameters (Transformer-S 0.760, below the MLP). On the two axes that decide selection MLP is not beaten — equal F1 (0.794), better stability (best worst-fold, lowest fold variance) — at 4.5× fewer parameters.</a:t>
-            </a:r>
-            <a:endParaRPr sz="1200" b="0">
-              <a:solidFill>
-                <a:srgbClr val="1A1A1A"/>
-              </a:solidFill>
-              <a:latin typeface="Calibri" panose="020F0502020204030204"/>
-            </a:endParaRPr>
-          </a:p>
-          <a:p>
-            <a:pPr algn="l">
-              <a:lnSpc>
-                <a:spcPct val="112000"/>
-              </a:lnSpc>
-              <a:spcAft>
-                <a:spcPts val="700"/>
-              </a:spcAft>
-            </a:pPr>
-            <a:r>
-              <a:rPr sz="1200" b="1">
-                <a:solidFill>
-                  <a:srgbClr val="1C5CAB"/>
-                </a:solidFill>
-                <a:latin typeface="Calibri" panose="020F0502020204030204"/>
-              </a:rPr>
-              <a:t>·  </a:t>
-            </a:r>
-            <a:r>
-              <a:rPr sz="1200" b="1">
-                <a:solidFill>
-                  <a:srgbClr val="1A1A1A"/>
-                </a:solidFill>
-                <a:latin typeface="Calibri" panose="020F0502020204030204"/>
-              </a:rPr>
-              <a:t>Latency never binds at 10 Hz</a:t>
-            </a:r>
-            <a:r>
-              <a:rPr sz="1200" b="0">
-                <a:solidFill>
-                  <a:srgbClr val="1A1A1A"/>
-                </a:solidFill>
-                <a:latin typeface="Calibri" panose="020F0502020204030204"/>
-              </a:rPr>
-              <a:t> — the slowest model sits &gt;12× under the gate; model choice is a quality/stability decision, not a speed one.</a:t>
-            </a:r>
-            <a:endParaRPr sz="1200" b="0">
-              <a:solidFill>
-                <a:srgbClr val="1A1A1A"/>
-              </a:solidFill>
-              <a:latin typeface="Calibri" panose="020F0502020204030204"/>
-            </a:endParaRPr>
-          </a:p>
-        </p:txBody>
-      </p:sp>
-      <p:sp>
-        <p:nvSpPr>
-          <p:cNvPr id="9" name="TextBox 8"/>
+      <p:sp>
+        <p:nvSpPr>
+          <p:cNvPr id="5" name="TextBox 4"/>
           <p:cNvSpPr txBox="1"/>
           <p:nvPr/>
         </p:nvSpPr>
@@ -5047,7 +3782,7 @@
           <a:noFill/>
         </p:spPr>
         <p:txBody>
-          <a:bodyPr wrap="square" lIns="0" tIns="0" rIns="0" bIns="0" anchor="t">
+          <a:bodyPr wrap="square" lIns="0" tIns="0" rIns="0" bIns="0">
             <a:spAutoFit/>
           </a:bodyPr>
           <a:lstStyle/>
@@ -5077,43 +3812,556 @@
       </p:sp>
       <p:sp>
         <p:nvSpPr>
-          <p:cNvPr id="10" name="TextBox 9"/>
-          <p:cNvSpPr txBox="1"/>
+          <p:cNvPr id="7" name="Rounded Rectangle 6"/>
+          <p:cNvSpPr/>
           <p:nvPr/>
         </p:nvSpPr>
         <p:spPr>
           <a:xfrm>
-            <a:off x="10972800" y="6510528"/>
-            <a:ext cx="667512" cy="274320"/>
+            <a:off x="548640" y="1517904"/>
+            <a:ext cx="3630168" cy="1810512"/>
           </a:xfrm>
-          <a:prstGeom prst="rect">
-            <a:avLst/>
+          <a:prstGeom prst="roundRect">
+            <a:avLst>
+              <a:gd name="adj" fmla="val 4500"/>
+            </a:avLst>
           </a:prstGeom>
-          <a:noFill/>
+          <a:solidFill>
+            <a:srgbClr val="F2F5FA"/>
+          </a:solidFill>
+          <a:ln>
+            <a:noFill/>
+          </a:ln>
+          <a:effectLst/>
         </p:spPr>
-        <p:txBody>
-          <a:bodyPr wrap="square" lIns="0" tIns="0" rIns="0" bIns="0" anchor="t">
-            <a:spAutoFit/>
-          </a:bodyPr>
+        <p:style>
+          <a:lnRef idx="1">
+            <a:schemeClr val="accent1"/>
+          </a:lnRef>
+          <a:fillRef idx="3">
+            <a:schemeClr val="accent1"/>
+          </a:fillRef>
+          <a:effectRef idx="2">
+            <a:schemeClr val="accent1"/>
+          </a:effectRef>
+          <a:fontRef idx="minor">
+            <a:schemeClr val="lt1"/>
+          </a:fontRef>
+        </p:style>
+        <p:txBody>
+          <a:bodyPr wrap="square" lIns="128016" tIns="91440" rIns="128016" bIns="91440" rtlCol="0" anchor="t"/>
           <a:lstStyle/>
           <a:p>
-            <a:pPr algn="r">
+            <a:pPr algn="just">
+              <a:lnSpc>
+                <a:spcPct val="100000"/>
+              </a:lnSpc>
+              <a:spcAft>
+                <a:spcPts val="300"/>
+              </a:spcAft>
+            </a:pPr>
+            <a:r>
+              <a:rPr sz="1250" b="1">
+                <a:solidFill>
+                  <a:srgbClr val="1C5CAB"/>
+                </a:solidFill>
+                <a:latin typeface="Calibri" panose="020F0502020204030204"/>
+              </a:rPr>
+              <a:t>Shared world dynamics</a:t>
+            </a:r>
+            <a:endParaRPr sz="1250" b="1">
+              <a:solidFill>
+                <a:srgbClr val="1C5CAB"/>
+              </a:solidFill>
+              <a:latin typeface="Calibri" panose="020F0502020204030204"/>
+            </a:endParaRPr>
+          </a:p>
+          <a:p>
+            <a:pPr algn="just">
               <a:lnSpc>
                 <a:spcPct val="106000"/>
               </a:lnSpc>
+              <a:spcAft>
+                <a:spcPts val="0"/>
+              </a:spcAft>
             </a:pPr>
             <a:r>
-              <a:rPr sz="900" b="0">
-                <a:solidFill>
-                  <a:srgbClr val="898781"/>
-                </a:solidFill>
-                <a:latin typeface="Calibri" panose="020F0502020204030204"/>
-              </a:rPr>
-              <a:t>2 / 7</a:t>
-            </a:r>
-            <a:endParaRPr sz="900" b="0">
+              <a:rPr sz="1200" b="0">
+                <a:solidFill>
+                  <a:srgbClr val="52514E"/>
+                </a:solidFill>
+                <a:latin typeface="Calibri" panose="020F0502020204030204"/>
+              </a:rPr>
+              <a:t>One core generates the 9-channel stream — 15,000 steps at 10 Hz, calibrated 85/15 normal/anomaly, faults causal (slip + stuck) rather than injected. The W5–6 RL environments import the same core, so offline data and the online env cannot drift.</a:t>
+            </a:r>
+            <a:endParaRPr sz="1200" b="0">
               <a:solidFill>
-                <a:srgbClr val="898781"/>
+                <a:srgbClr val="52514E"/>
+              </a:solidFill>
+              <a:latin typeface="Calibri" panose="020F0502020204030204"/>
+            </a:endParaRPr>
+          </a:p>
+        </p:txBody>
+      </p:sp>
+      <p:sp>
+        <p:nvSpPr>
+          <p:cNvPr id="8" name="Rounded Rectangle 7"/>
+          <p:cNvSpPr/>
+          <p:nvPr/>
+        </p:nvSpPr>
+        <p:spPr>
+          <a:xfrm>
+            <a:off x="4279392" y="1517904"/>
+            <a:ext cx="3630168" cy="1810512"/>
+          </a:xfrm>
+          <a:prstGeom prst="roundRect">
+            <a:avLst>
+              <a:gd name="adj" fmla="val 4500"/>
+            </a:avLst>
+          </a:prstGeom>
+          <a:solidFill>
+            <a:srgbClr val="F2F5FA"/>
+          </a:solidFill>
+          <a:ln>
+            <a:noFill/>
+          </a:ln>
+          <a:effectLst/>
+        </p:spPr>
+        <p:style>
+          <a:lnRef idx="1">
+            <a:schemeClr val="accent1"/>
+          </a:lnRef>
+          <a:fillRef idx="3">
+            <a:schemeClr val="accent1"/>
+          </a:fillRef>
+          <a:effectRef idx="2">
+            <a:schemeClr val="accent1"/>
+          </a:effectRef>
+          <a:fontRef idx="minor">
+            <a:schemeClr val="lt1"/>
+          </a:fontRef>
+        </p:style>
+        <p:txBody>
+          <a:bodyPr wrap="square" lIns="128016" tIns="91440" rIns="128016" bIns="91440" rtlCol="0" anchor="t"/>
+          <a:lstStyle/>
+          <a:p>
+            <a:pPr algn="just">
+              <a:lnSpc>
+                <a:spcPct val="100000"/>
+              </a:lnSpc>
+              <a:spcAft>
+                <a:spcPts val="300"/>
+              </a:spcAft>
+            </a:pPr>
+            <a:r>
+              <a:rPr sz="1250" b="1">
+                <a:solidFill>
+                  <a:srgbClr val="1C5CAB"/>
+                </a:solidFill>
+                <a:latin typeface="Calibri" panose="020F0502020204030204"/>
+              </a:rPr>
+              <a:t>Leakage-safe canonical split</a:t>
+            </a:r>
+            <a:endParaRPr sz="1250" b="1">
+              <a:solidFill>
+                <a:srgbClr val="1C5CAB"/>
+              </a:solidFill>
+              <a:latin typeface="Calibri" panose="020F0502020204030204"/>
+            </a:endParaRPr>
+          </a:p>
+          <a:p>
+            <a:pPr algn="just">
+              <a:lnSpc>
+                <a:spcPct val="106000"/>
+              </a:lnSpc>
+              <a:spcAft>
+                <a:spcPts val="0"/>
+              </a:spcAft>
+            </a:pPr>
+            <a:r>
+              <a:rPr sz="1200" b="0">
+                <a:solidFill>
+                  <a:srgbClr val="52514E"/>
+                </a:solidFill>
+                <a:latin typeface="Calibri" panose="020F0502020204030204"/>
+              </a:rPr>
+              <a:t>Block segmentation + StratifiedGroupKFold with a 50-step purge kills window leakage at the split level; every fault event sits fully inside one block. All six model families read the same fold file instead of re-deriving a split.</a:t>
+            </a:r>
+            <a:endParaRPr sz="1200" b="0">
+              <a:solidFill>
+                <a:srgbClr val="52514E"/>
+              </a:solidFill>
+              <a:latin typeface="Calibri" panose="020F0502020204030204"/>
+            </a:endParaRPr>
+          </a:p>
+        </p:txBody>
+      </p:sp>
+      <p:sp>
+        <p:nvSpPr>
+          <p:cNvPr id="9" name="Rounded Rectangle 8"/>
+          <p:cNvSpPr/>
+          <p:nvPr/>
+        </p:nvSpPr>
+        <p:spPr>
+          <a:xfrm>
+            <a:off x="8010144" y="1517904"/>
+            <a:ext cx="3630168" cy="1810512"/>
+          </a:xfrm>
+          <a:prstGeom prst="roundRect">
+            <a:avLst>
+              <a:gd name="adj" fmla="val 4500"/>
+            </a:avLst>
+          </a:prstGeom>
+          <a:solidFill>
+            <a:srgbClr val="F2F5FA"/>
+          </a:solidFill>
+          <a:ln>
+            <a:noFill/>
+          </a:ln>
+          <a:effectLst/>
+        </p:spPr>
+        <p:style>
+          <a:lnRef idx="1">
+            <a:schemeClr val="accent1"/>
+          </a:lnRef>
+          <a:fillRef idx="3">
+            <a:schemeClr val="accent1"/>
+          </a:fillRef>
+          <a:effectRef idx="2">
+            <a:schemeClr val="accent1"/>
+          </a:effectRef>
+          <a:fontRef idx="minor">
+            <a:schemeClr val="lt1"/>
+          </a:fontRef>
+        </p:style>
+        <p:txBody>
+          <a:bodyPr wrap="square" lIns="128016" tIns="91440" rIns="128016" bIns="91440" rtlCol="0" anchor="t"/>
+          <a:lstStyle/>
+          <a:p>
+            <a:pPr algn="just">
+              <a:lnSpc>
+                <a:spcPct val="100000"/>
+              </a:lnSpc>
+              <a:spcAft>
+                <a:spcPts val="300"/>
+              </a:spcAft>
+            </a:pPr>
+            <a:r>
+              <a:rPr sz="1250" b="1">
+                <a:solidFill>
+                  <a:srgbClr val="1C5CAB"/>
+                </a:solidFill>
+                <a:latin typeface="Calibri" panose="020F0502020204030204"/>
+              </a:rPr>
+              <a:t>Two-phase fold protocol</a:t>
+            </a:r>
+            <a:endParaRPr sz="1250" b="1">
+              <a:solidFill>
+                <a:srgbClr val="1C5CAB"/>
+              </a:solidFill>
+              <a:latin typeface="Calibri" panose="020F0502020204030204"/>
+            </a:endParaRPr>
+          </a:p>
+          <a:p>
+            <a:pPr algn="just">
+              <a:lnSpc>
+                <a:spcPct val="106000"/>
+              </a:lnSpc>
+              <a:spcAft>
+                <a:spcPts val="0"/>
+              </a:spcAft>
+            </a:pPr>
+            <a:r>
+              <a:rPr sz="1200" b="0">
+                <a:solidFill>
+                  <a:srgbClr val="52514E"/>
+                </a:solidFill>
+                <a:latin typeface="Calibri" panose="020F0502020204030204"/>
+              </a:rPr>
+              <a:t>Design choices are tuned on the canonical fold only; the locked config is retrained across all 7 rotations. Mandatory per model: split sizes, seed, confusion matrix, per-class P/R/F1, timeit latency, gate verdict.</a:t>
+            </a:r>
+            <a:endParaRPr sz="1200" b="0">
+              <a:solidFill>
+                <a:srgbClr val="52514E"/>
+              </a:solidFill>
+              <a:latin typeface="Calibri" panose="020F0502020204030204"/>
+            </a:endParaRPr>
+          </a:p>
+        </p:txBody>
+      </p:sp>
+      <p:sp>
+        <p:nvSpPr>
+          <p:cNvPr id="10" name="Rounded Rectangle 9"/>
+          <p:cNvSpPr/>
+          <p:nvPr/>
+        </p:nvSpPr>
+        <p:spPr>
+          <a:xfrm>
+            <a:off x="548640" y="3529584"/>
+            <a:ext cx="3630168" cy="1810512"/>
+          </a:xfrm>
+          <a:prstGeom prst="roundRect">
+            <a:avLst>
+              <a:gd name="adj" fmla="val 4500"/>
+            </a:avLst>
+          </a:prstGeom>
+          <a:solidFill>
+            <a:srgbClr val="F2F5FA"/>
+          </a:solidFill>
+          <a:ln>
+            <a:noFill/>
+          </a:ln>
+          <a:effectLst/>
+        </p:spPr>
+        <p:style>
+          <a:lnRef idx="1">
+            <a:schemeClr val="accent1"/>
+          </a:lnRef>
+          <a:fillRef idx="3">
+            <a:schemeClr val="accent1"/>
+          </a:fillRef>
+          <a:effectRef idx="2">
+            <a:schemeClr val="accent1"/>
+          </a:effectRef>
+          <a:fontRef idx="minor">
+            <a:schemeClr val="lt1"/>
+          </a:fontRef>
+        </p:style>
+        <p:txBody>
+          <a:bodyPr wrap="square" lIns="128016" tIns="91440" rIns="128016" bIns="91440" rtlCol="0" anchor="t"/>
+          <a:lstStyle/>
+          <a:p>
+            <a:pPr algn="just">
+              <a:lnSpc>
+                <a:spcPct val="100000"/>
+              </a:lnSpc>
+              <a:spcAft>
+                <a:spcPts val="300"/>
+              </a:spcAft>
+            </a:pPr>
+            <a:r>
+              <a:rPr sz="1250" b="1">
+                <a:solidFill>
+                  <a:srgbClr val="1C5CAB"/>
+                </a:solidFill>
+                <a:latin typeface="Calibri" panose="020F0502020204030204"/>
+              </a:rPr>
+              <a:t>40-feature matrix</a:t>
+            </a:r>
+            <a:endParaRPr sz="1250" b="1">
+              <a:solidFill>
+                <a:srgbClr val="1C5CAB"/>
+              </a:solidFill>
+              <a:latin typeface="Calibri" panose="020F0502020204030204"/>
+            </a:endParaRPr>
+          </a:p>
+          <a:p>
+            <a:pPr algn="just">
+              <a:lnSpc>
+                <a:spcPct val="106000"/>
+              </a:lnSpc>
+              <a:spcAft>
+                <a:spcPts val="0"/>
+              </a:spcAft>
+            </a:pPr>
+            <a:r>
+              <a:rPr sz="1200" b="0">
+                <a:solidFill>
+                  <a:srgbClr val="52514E"/>
+                </a:solidFill>
+                <a:latin typeface="Calibri" panose="020F0502020204030204"/>
+              </a:rPr>
+              <a:t>9 raw + 25 FFT (50-step window on the 4 torque channels + LiDAR, built to capture a spectral fault signature) + 6 physical. GPS enters as per-step deltas — absolute position is a memorised map shortcut, the delta is the transferable signal.</a:t>
+            </a:r>
+            <a:endParaRPr sz="1200" b="0">
+              <a:solidFill>
+                <a:srgbClr val="52514E"/>
+              </a:solidFill>
+              <a:latin typeface="Calibri" panose="020F0502020204030204"/>
+            </a:endParaRPr>
+          </a:p>
+        </p:txBody>
+      </p:sp>
+      <p:sp>
+        <p:nvSpPr>
+          <p:cNvPr id="11" name="Rounded Rectangle 10"/>
+          <p:cNvSpPr/>
+          <p:nvPr/>
+        </p:nvSpPr>
+        <p:spPr>
+          <a:xfrm>
+            <a:off x="4279392" y="3529584"/>
+            <a:ext cx="3630168" cy="1810512"/>
+          </a:xfrm>
+          <a:prstGeom prst="roundRect">
+            <a:avLst>
+              <a:gd name="adj" fmla="val 4500"/>
+            </a:avLst>
+          </a:prstGeom>
+          <a:solidFill>
+            <a:srgbClr val="F2F5FA"/>
+          </a:solidFill>
+          <a:ln>
+            <a:noFill/>
+          </a:ln>
+          <a:effectLst/>
+        </p:spPr>
+        <p:style>
+          <a:lnRef idx="1">
+            <a:schemeClr val="accent1"/>
+          </a:lnRef>
+          <a:fillRef idx="3">
+            <a:schemeClr val="accent1"/>
+          </a:fillRef>
+          <a:effectRef idx="2">
+            <a:schemeClr val="accent1"/>
+          </a:effectRef>
+          <a:fontRef idx="minor">
+            <a:schemeClr val="lt1"/>
+          </a:fontRef>
+        </p:style>
+        <p:txBody>
+          <a:bodyPr wrap="square" lIns="128016" tIns="91440" rIns="128016" bIns="91440" rtlCol="0" anchor="t"/>
+          <a:lstStyle/>
+          <a:p>
+            <a:pPr algn="just">
+              <a:lnSpc>
+                <a:spcPct val="100000"/>
+              </a:lnSpc>
+              <a:spcAft>
+                <a:spcPts val="300"/>
+              </a:spcAft>
+            </a:pPr>
+            <a:r>
+              <a:rPr sz="1250" b="1">
+                <a:solidFill>
+                  <a:srgbClr val="1C5CAB"/>
+                </a:solidFill>
+                <a:latin typeface="Calibri" panose="020F0502020204030204"/>
+              </a:rPr>
+              <a:t>The feature lesson that carried Phase B</a:t>
+            </a:r>
+            <a:endParaRPr sz="1250" b="1">
+              <a:solidFill>
+                <a:srgbClr val="1C5CAB"/>
+              </a:solidFill>
+              <a:latin typeface="Calibri" panose="020F0502020204030204"/>
+            </a:endParaRPr>
+          </a:p>
+          <a:p>
+            <a:pPr algn="just">
+              <a:lnSpc>
+                <a:spcPct val="106000"/>
+              </a:lnSpc>
+              <a:spcAft>
+                <a:spcPts val="0"/>
+              </a:spcAft>
+            </a:pPr>
+            <a:r>
+              <a:rPr sz="1200" b="0">
+                <a:solidFill>
+                  <a:srgbClr val="52514E"/>
+                </a:solidFill>
+                <a:latin typeface="Calibri" panose="020F0502020204030204"/>
+              </a:rPr>
+              <a:t>Torque shows zero 3σ outliers — terrain already spreads it wide, so a plain outlier rule cannot work. Two cross-channel features close the gap: inter-wheel torque std (slip) and stall ratio (stuck), worth +0.27 F1 on the RF baseline before any neural model.</a:t>
+            </a:r>
+            <a:endParaRPr sz="1200" b="0">
+              <a:solidFill>
+                <a:srgbClr val="52514E"/>
+              </a:solidFill>
+              <a:latin typeface="Calibri" panose="020F0502020204030204"/>
+            </a:endParaRPr>
+          </a:p>
+        </p:txBody>
+      </p:sp>
+      <p:sp>
+        <p:nvSpPr>
+          <p:cNvPr id="12" name="Rounded Rectangle 11"/>
+          <p:cNvSpPr/>
+          <p:nvPr/>
+        </p:nvSpPr>
+        <p:spPr>
+          <a:xfrm>
+            <a:off x="8010144" y="3529584"/>
+            <a:ext cx="3630168" cy="1810512"/>
+          </a:xfrm>
+          <a:prstGeom prst="roundRect">
+            <a:avLst>
+              <a:gd name="adj" fmla="val 4500"/>
+            </a:avLst>
+          </a:prstGeom>
+          <a:solidFill>
+            <a:srgbClr val="F2F5FA"/>
+          </a:solidFill>
+          <a:ln>
+            <a:noFill/>
+          </a:ln>
+          <a:effectLst/>
+        </p:spPr>
+        <p:style>
+          <a:lnRef idx="1">
+            <a:schemeClr val="accent1"/>
+          </a:lnRef>
+          <a:fillRef idx="3">
+            <a:schemeClr val="accent1"/>
+          </a:fillRef>
+          <a:effectRef idx="2">
+            <a:schemeClr val="accent1"/>
+          </a:effectRef>
+          <a:fontRef idx="minor">
+            <a:schemeClr val="lt1"/>
+          </a:fontRef>
+        </p:style>
+        <p:txBody>
+          <a:bodyPr wrap="square" lIns="128016" tIns="91440" rIns="128016" bIns="91440" rtlCol="0" anchor="t"/>
+          <a:lstStyle/>
+          <a:p>
+            <a:pPr algn="just">
+              <a:lnSpc>
+                <a:spcPct val="100000"/>
+              </a:lnSpc>
+              <a:spcAft>
+                <a:spcPts val="300"/>
+              </a:spcAft>
+            </a:pPr>
+            <a:r>
+              <a:rPr sz="1250" b="1">
+                <a:solidFill>
+                  <a:srgbClr val="1C5CAB"/>
+                </a:solidFill>
+                <a:latin typeface="Calibri" panose="020F0502020204030204"/>
+              </a:rPr>
+              <a:t>PCA and selection</a:t>
+            </a:r>
+            <a:endParaRPr sz="1250" b="1">
+              <a:solidFill>
+                <a:srgbClr val="1C5CAB"/>
+              </a:solidFill>
+              <a:latin typeface="Calibri" panose="020F0502020204030204"/>
+            </a:endParaRPr>
+          </a:p>
+          <a:p>
+            <a:pPr algn="just">
+              <a:lnSpc>
+                <a:spcPct val="106000"/>
+              </a:lnSpc>
+              <a:spcAft>
+                <a:spcPts val="0"/>
+              </a:spcAft>
+            </a:pPr>
+            <a:r>
+              <a:rPr sz="1200" b="0">
+                <a:solidFill>
+                  <a:srgbClr val="52514E"/>
+                </a:solidFill>
+                <a:latin typeface="Calibri" panose="020F0502020204030204"/>
+              </a:rPr>
+              <a:t>40 scaled features → 19 components at 95.1% variance, fit on train only; PC1 is the torque spectral centroid, PC2 the stall ratio. Selection ranks on F1, not accuracy — with an 85% majority class, accuracy is blind to the minority.</a:t>
+            </a:r>
+            <a:endParaRPr sz="1200" b="0">
+              <a:solidFill>
+                <a:srgbClr val="52514E"/>
               </a:solidFill>
               <a:latin typeface="Calibri" panose="020F0502020204030204"/>
             </a:endParaRPr>
@@ -5147,7 +4395,7 @@
         <p:spPr>
           <a:xfrm>
             <a:off x="548640" y="292608"/>
-            <a:ext cx="11091672" cy="566928"/>
+            <a:ext cx="11091672" cy="374650"/>
           </a:xfrm>
           <a:prstGeom prst="rect">
             <a:avLst/>
@@ -5155,7 +4403,7 @@
           <a:noFill/>
         </p:spPr>
         <p:txBody>
-          <a:bodyPr wrap="square" lIns="0" tIns="0" rIns="0" bIns="0" anchor="t">
+          <a:bodyPr wrap="square" lIns="0" tIns="0" rIns="0" bIns="0">
             <a:spAutoFit/>
           </a:bodyPr>
           <a:lstStyle/>
@@ -5172,7 +4420,7 @@
                 </a:solidFill>
                 <a:latin typeface="Calibri" panose="020F0502020204030204"/>
               </a:rPr>
-              <a:t>One world core, one split, one standard — why every number here is comparable</a:t>
+              <a:t>All six models clear the 100 ms gate ≥12× </a:t>
             </a:r>
             <a:endParaRPr sz="2300" b="1">
               <a:solidFill>
@@ -5200,7 +4448,7 @@
           <a:noFill/>
         </p:spPr>
         <p:txBody>
-          <a:bodyPr wrap="square" lIns="0" tIns="0" rIns="0" bIns="0" anchor="t">
+          <a:bodyPr wrap="square" lIns="0" tIns="0" rIns="0" bIns="0">
             <a:spAutoFit/>
           </a:bodyPr>
           <a:lstStyle/>
@@ -5217,7 +4465,7 @@
                 </a:solidFill>
                 <a:latin typeface="Calibri" panose="020F0502020204030204"/>
               </a:rPr>
-              <a:t>The evaluation scaffolding shared by every model family, Weeks 2–4</a:t>
+              <a:t>Headline · Aido Rover anomaly detection · 7-fold block-rotation mean ± std on the canonical split · single-sample CPU latency</a:t>
             </a:r>
             <a:endParaRPr sz="1300" b="0">
               <a:solidFill>
@@ -5274,460 +4522,7 @@
       </p:sp>
       <p:sp>
         <p:nvSpPr>
-          <p:cNvPr id="5" name="Rounded Rectangle 4"/>
-          <p:cNvSpPr/>
-          <p:nvPr/>
-        </p:nvSpPr>
-        <p:spPr>
-          <a:xfrm>
-            <a:off x="548640" y="1905635"/>
-            <a:ext cx="3630295" cy="1885315"/>
-          </a:xfrm>
-          <a:prstGeom prst="roundRect">
-            <a:avLst>
-              <a:gd name="adj" fmla="val 4500"/>
-            </a:avLst>
-          </a:prstGeom>
-          <a:solidFill>
-            <a:srgbClr val="F2F5FA"/>
-          </a:solidFill>
-          <a:ln>
-            <a:noFill/>
-          </a:ln>
-          <a:effectLst/>
-        </p:spPr>
-        <p:style>
-          <a:lnRef idx="1">
-            <a:schemeClr val="accent1"/>
-          </a:lnRef>
-          <a:fillRef idx="3">
-            <a:schemeClr val="accent1"/>
-          </a:fillRef>
-          <a:effectRef idx="2">
-            <a:schemeClr val="accent1"/>
-          </a:effectRef>
-          <a:fontRef idx="minor">
-            <a:schemeClr val="lt1"/>
-          </a:fontRef>
-        </p:style>
-        <p:txBody>
-          <a:bodyPr wrap="square" lIns="128016" tIns="91440" rIns="128016" bIns="73152" rtlCol="0" anchor="t"/>
-          <a:lstStyle/>
-          <a:p>
-            <a:pPr algn="ctr">
-              <a:spcAft>
-                <a:spcPts val="300"/>
-              </a:spcAft>
-            </a:pPr>
-            <a:r>
-              <a:rPr sz="1400" b="1">
-                <a:solidFill>
-                  <a:srgbClr val="1C5CAB"/>
-                </a:solidFill>
-                <a:latin typeface="Calibri" panose="020F0502020204030204"/>
-              </a:rPr>
-              <a:t>Shared world dynamics</a:t>
-            </a:r>
-            <a:endParaRPr sz="1400" b="1">
-              <a:solidFill>
-                <a:srgbClr val="1C5CAB"/>
-              </a:solidFill>
-              <a:latin typeface="Calibri" panose="020F0502020204030204"/>
-            </a:endParaRPr>
-          </a:p>
-          <a:p>
-            <a:pPr>
-              <a:lnSpc>
-                <a:spcPct val="108000"/>
-              </a:lnSpc>
-            </a:pPr>
-            <a:r>
-              <a:rPr sz="1400" b="0">
-                <a:solidFill>
-                  <a:srgbClr val="1A1A1A"/>
-                </a:solidFill>
-                <a:latin typeface="Calibri" panose="020F0502020204030204"/>
-              </a:rPr>
-              <a:t>The shared world-dynamics core generates the 9-channel sensor stream (calibrated 85/15 normal/anomaly); the W5–6 RL environments import the same core, so offline data and the online env cannot drift.</a:t>
-            </a:r>
-            <a:endParaRPr sz="1400" b="0">
-              <a:solidFill>
-                <a:srgbClr val="1A1A1A"/>
-              </a:solidFill>
-              <a:latin typeface="Calibri" panose="020F0502020204030204"/>
-            </a:endParaRPr>
-          </a:p>
-        </p:txBody>
-      </p:sp>
-      <p:sp>
-        <p:nvSpPr>
-          <p:cNvPr id="6" name="Rounded Rectangle 5"/>
-          <p:cNvSpPr/>
-          <p:nvPr/>
-        </p:nvSpPr>
-        <p:spPr>
-          <a:xfrm>
-            <a:off x="4279265" y="1905635"/>
-            <a:ext cx="3630295" cy="1884680"/>
-          </a:xfrm>
-          <a:prstGeom prst="roundRect">
-            <a:avLst>
-              <a:gd name="adj" fmla="val 4500"/>
-            </a:avLst>
-          </a:prstGeom>
-          <a:solidFill>
-            <a:srgbClr val="F2F5FA"/>
-          </a:solidFill>
-          <a:ln>
-            <a:noFill/>
-          </a:ln>
-          <a:effectLst/>
-        </p:spPr>
-        <p:style>
-          <a:lnRef idx="1">
-            <a:schemeClr val="accent1"/>
-          </a:lnRef>
-          <a:fillRef idx="3">
-            <a:schemeClr val="accent1"/>
-          </a:fillRef>
-          <a:effectRef idx="2">
-            <a:schemeClr val="accent1"/>
-          </a:effectRef>
-          <a:fontRef idx="minor">
-            <a:schemeClr val="lt1"/>
-          </a:fontRef>
-        </p:style>
-        <p:txBody>
-          <a:bodyPr wrap="square" lIns="128016" tIns="91440" rIns="128016" bIns="73152" rtlCol="0" anchor="t"/>
-          <a:lstStyle/>
-          <a:p>
-            <a:pPr algn="ctr">
-              <a:spcAft>
-                <a:spcPts val="300"/>
-              </a:spcAft>
-            </a:pPr>
-            <a:r>
-              <a:rPr sz="1400" b="1">
-                <a:solidFill>
-                  <a:srgbClr val="1C5CAB"/>
-                </a:solidFill>
-                <a:latin typeface="Calibri" panose="020F0502020204030204"/>
-              </a:rPr>
-              <a:t>Leakage-safe canonical split</a:t>
-            </a:r>
-            <a:endParaRPr sz="1400" b="1">
-              <a:solidFill>
-                <a:srgbClr val="1C5CAB"/>
-              </a:solidFill>
-              <a:latin typeface="Calibri" panose="020F0502020204030204"/>
-            </a:endParaRPr>
-          </a:p>
-          <a:p>
-            <a:pPr>
-              <a:lnSpc>
-                <a:spcPct val="108000"/>
-              </a:lnSpc>
-            </a:pPr>
-            <a:r>
-              <a:rPr sz="1400" b="0">
-                <a:solidFill>
-                  <a:srgbClr val="1A1A1A"/>
-                </a:solidFill>
-                <a:latin typeface="Calibri" panose="020F0502020204030204"/>
-              </a:rPr>
-              <a:t>Block-segmented + StratifiedGroupKFold with a 50-step purge kills window leakage at the split level. All six model families read the same fold file instead of re-deriving a split.</a:t>
-            </a:r>
-            <a:endParaRPr sz="1400" b="0">
-              <a:solidFill>
-                <a:srgbClr val="1A1A1A"/>
-              </a:solidFill>
-              <a:latin typeface="Calibri" panose="020F0502020204030204"/>
-            </a:endParaRPr>
-          </a:p>
-        </p:txBody>
-      </p:sp>
-      <p:sp>
-        <p:nvSpPr>
-          <p:cNvPr id="7" name="Rounded Rectangle 6"/>
-          <p:cNvSpPr/>
-          <p:nvPr/>
-        </p:nvSpPr>
-        <p:spPr>
-          <a:xfrm>
-            <a:off x="8009890" y="1905635"/>
-            <a:ext cx="3630295" cy="1890395"/>
-          </a:xfrm>
-          <a:prstGeom prst="roundRect">
-            <a:avLst>
-              <a:gd name="adj" fmla="val 4500"/>
-            </a:avLst>
-          </a:prstGeom>
-          <a:solidFill>
-            <a:srgbClr val="F2F5FA"/>
-          </a:solidFill>
-          <a:ln>
-            <a:noFill/>
-          </a:ln>
-          <a:effectLst/>
-        </p:spPr>
-        <p:style>
-          <a:lnRef idx="1">
-            <a:schemeClr val="accent1"/>
-          </a:lnRef>
-          <a:fillRef idx="3">
-            <a:schemeClr val="accent1"/>
-          </a:fillRef>
-          <a:effectRef idx="2">
-            <a:schemeClr val="accent1"/>
-          </a:effectRef>
-          <a:fontRef idx="minor">
-            <a:schemeClr val="lt1"/>
-          </a:fontRef>
-        </p:style>
-        <p:txBody>
-          <a:bodyPr wrap="square" lIns="128016" tIns="91440" rIns="128016" bIns="73152" rtlCol="0" anchor="t"/>
-          <a:lstStyle/>
-          <a:p>
-            <a:pPr algn="ctr">
-              <a:spcAft>
-                <a:spcPts val="300"/>
-              </a:spcAft>
-            </a:pPr>
-            <a:r>
-              <a:rPr sz="1400" b="1">
-                <a:solidFill>
-                  <a:srgbClr val="1C5CAB"/>
-                </a:solidFill>
-                <a:latin typeface="Calibri" panose="020F0502020204030204"/>
-              </a:rPr>
-              <a:t>Two-phase fold protocol</a:t>
-            </a:r>
-            <a:endParaRPr sz="1400" b="1">
-              <a:solidFill>
-                <a:srgbClr val="1C5CAB"/>
-              </a:solidFill>
-              <a:latin typeface="Calibri" panose="020F0502020204030204"/>
-            </a:endParaRPr>
-          </a:p>
-          <a:p>
-            <a:pPr>
-              <a:lnSpc>
-                <a:spcPct val="108000"/>
-              </a:lnSpc>
-            </a:pPr>
-            <a:r>
-              <a:rPr sz="1400" b="0">
-                <a:solidFill>
-                  <a:srgbClr val="1A1A1A"/>
-                </a:solidFill>
-                <a:latin typeface="Calibri" panose="020F0502020204030204"/>
-              </a:rPr>
-              <a:t>Design choices are tuned on the canonical fold only; the locked config is retrained across all 7 fold rotations — the ledger reports mean ± std F1/AUC with per-fold columns.</a:t>
-            </a:r>
-            <a:endParaRPr sz="1400" b="0">
-              <a:solidFill>
-                <a:srgbClr val="1A1A1A"/>
-              </a:solidFill>
-              <a:latin typeface="Calibri" panose="020F0502020204030204"/>
-            </a:endParaRPr>
-          </a:p>
-        </p:txBody>
-      </p:sp>
-      <p:sp>
-        <p:nvSpPr>
-          <p:cNvPr id="8" name="Rounded Rectangle 7"/>
-          <p:cNvSpPr/>
-          <p:nvPr/>
-        </p:nvSpPr>
-        <p:spPr>
-          <a:xfrm>
-            <a:off x="548640" y="4041775"/>
-            <a:ext cx="5504815" cy="1905635"/>
-          </a:xfrm>
-          <a:prstGeom prst="roundRect">
-            <a:avLst>
-              <a:gd name="adj" fmla="val 4500"/>
-            </a:avLst>
-          </a:prstGeom>
-          <a:solidFill>
-            <a:srgbClr val="F2F5FA"/>
-          </a:solidFill>
-          <a:ln>
-            <a:noFill/>
-          </a:ln>
-          <a:effectLst/>
-        </p:spPr>
-        <p:style>
-          <a:lnRef idx="1">
-            <a:schemeClr val="accent1"/>
-          </a:lnRef>
-          <a:fillRef idx="3">
-            <a:schemeClr val="accent1"/>
-          </a:fillRef>
-          <a:effectRef idx="2">
-            <a:schemeClr val="accent1"/>
-          </a:effectRef>
-          <a:fontRef idx="minor">
-            <a:schemeClr val="lt1"/>
-          </a:fontRef>
-        </p:style>
-        <p:txBody>
-          <a:bodyPr wrap="square" lIns="128016" tIns="91440" rIns="128016" bIns="73152" rtlCol="0" anchor="t"/>
-          <a:lstStyle/>
-          <a:p>
-            <a:pPr algn="ctr">
-              <a:spcAft>
-                <a:spcPts val="300"/>
-              </a:spcAft>
-            </a:pPr>
-            <a:r>
-              <a:rPr sz="1400" b="1">
-                <a:solidFill>
-                  <a:srgbClr val="1C5CAB"/>
-                </a:solidFill>
-                <a:latin typeface="Calibri" panose="020F0502020204030204"/>
-              </a:rPr>
-              <a:t>Mandatory reporting standard</a:t>
-            </a:r>
-            <a:endParaRPr sz="1400" b="1">
-              <a:solidFill>
-                <a:srgbClr val="1C5CAB"/>
-              </a:solidFill>
-              <a:latin typeface="Calibri" panose="020F0502020204030204"/>
-            </a:endParaRPr>
-          </a:p>
-          <a:p>
-            <a:pPr>
-              <a:lnSpc>
-                <a:spcPct val="108000"/>
-              </a:lnSpc>
-            </a:pPr>
-            <a:r>
-              <a:rPr sz="1400" b="0">
-                <a:solidFill>
-                  <a:srgbClr val="1A1A1A"/>
-                </a:solidFill>
-                <a:latin typeface="Calibri" panose="020F0502020204030204"/>
-              </a:rPr>
-              <a:t>Split sizes · hyperparameters + seed · confusion matrix · per-class P/R/F1 · timeit latency · feasibility verdict against the platform gate </a:t>
-            </a:r>
-            <a:r>
-              <a:rPr lang="en-US" sz="1400" b="0">
-                <a:solidFill>
-                  <a:srgbClr val="1A1A1A"/>
-                </a:solidFill>
-                <a:latin typeface="Calibri" panose="020F0502020204030204"/>
-              </a:rPr>
-              <a:t>for</a:t>
-            </a:r>
-            <a:r>
-              <a:rPr sz="1400" b="0">
-                <a:solidFill>
-                  <a:srgbClr val="1A1A1A"/>
-                </a:solidFill>
-                <a:latin typeface="Calibri" panose="020F0502020204030204"/>
-              </a:rPr>
-              <a:t> every model.</a:t>
-            </a:r>
-            <a:endParaRPr sz="1400" b="0">
-              <a:solidFill>
-                <a:srgbClr val="1A1A1A"/>
-              </a:solidFill>
-              <a:latin typeface="Calibri" panose="020F0502020204030204"/>
-            </a:endParaRPr>
-          </a:p>
-        </p:txBody>
-      </p:sp>
-      <p:sp>
-        <p:nvSpPr>
-          <p:cNvPr id="9" name="Rounded Rectangle 8"/>
-          <p:cNvSpPr/>
-          <p:nvPr/>
-        </p:nvSpPr>
-        <p:spPr>
-          <a:xfrm>
-            <a:off x="6203950" y="4041775"/>
-            <a:ext cx="5504815" cy="1905635"/>
-          </a:xfrm>
-          <a:prstGeom prst="roundRect">
-            <a:avLst>
-              <a:gd name="adj" fmla="val 4500"/>
-            </a:avLst>
-          </a:prstGeom>
-          <a:solidFill>
-            <a:srgbClr val="F2F5FA"/>
-          </a:solidFill>
-          <a:ln>
-            <a:noFill/>
-          </a:ln>
-          <a:effectLst/>
-        </p:spPr>
-        <p:style>
-          <a:lnRef idx="1">
-            <a:schemeClr val="accent1"/>
-          </a:lnRef>
-          <a:fillRef idx="3">
-            <a:schemeClr val="accent1"/>
-          </a:fillRef>
-          <a:effectRef idx="2">
-            <a:schemeClr val="accent1"/>
-          </a:effectRef>
-          <a:fontRef idx="minor">
-            <a:schemeClr val="lt1"/>
-          </a:fontRef>
-        </p:style>
-        <p:txBody>
-          <a:bodyPr wrap="square" lIns="128016" tIns="91440" rIns="128016" bIns="73152" rtlCol="0" anchor="t"/>
-          <a:lstStyle/>
-          <a:p>
-            <a:pPr algn="ctr">
-              <a:spcAft>
-                <a:spcPts val="300"/>
-              </a:spcAft>
-            </a:pPr>
-            <a:r>
-              <a:rPr sz="1400" b="1">
-                <a:solidFill>
-                  <a:srgbClr val="1C5CAB"/>
-                </a:solidFill>
-                <a:latin typeface="Calibri" panose="020F0502020204030204"/>
-              </a:rPr>
-              <a:t>The feature lesson that carried Phase B</a:t>
-            </a:r>
-            <a:endParaRPr sz="1400" b="1">
-              <a:solidFill>
-                <a:srgbClr val="1C5CAB"/>
-              </a:solidFill>
-              <a:latin typeface="Calibri" panose="020F0502020204030204"/>
-            </a:endParaRPr>
-          </a:p>
-          <a:p>
-            <a:pPr>
-              <a:lnSpc>
-                <a:spcPct val="108000"/>
-              </a:lnSpc>
-            </a:pPr>
-            <a:r>
-              <a:rPr sz="1400" b="0">
-                <a:solidFill>
-                  <a:srgbClr val="1A1A1A"/>
-                </a:solidFill>
-                <a:latin typeface="Calibri" panose="020F0502020204030204"/>
-              </a:rPr>
-              <a:t>Cross-channel physical features (inter-wheel std, stall ratio) beat model and split tuning: +0.27 F1 on the RF baseline — before any neural model was trained.</a:t>
-            </a:r>
-            <a:endParaRPr sz="1400" b="0">
-              <a:solidFill>
-                <a:srgbClr val="1A1A1A"/>
-              </a:solidFill>
-              <a:latin typeface="Calibri" panose="020F0502020204030204"/>
-            </a:endParaRPr>
-          </a:p>
-        </p:txBody>
-      </p:sp>
-      <p:sp>
-        <p:nvSpPr>
-          <p:cNvPr id="11" name="TextBox 10"/>
+          <p:cNvPr id="5" name="TextBox 4"/>
           <p:cNvSpPr txBox="1"/>
           <p:nvPr/>
         </p:nvSpPr>
@@ -5742,7 +4537,7 @@
           <a:noFill/>
         </p:spPr>
         <p:txBody>
-          <a:bodyPr wrap="square" lIns="0" tIns="0" rIns="0" bIns="0" anchor="t">
+          <a:bodyPr wrap="square" lIns="0" tIns="0" rIns="0" bIns="0">
             <a:spAutoFit/>
           </a:bodyPr>
           <a:lstStyle/>
@@ -5770,16 +4565,1074 @@
           </a:p>
         </p:txBody>
       </p:sp>
-      <p:sp>
-        <p:nvSpPr>
-          <p:cNvPr id="12" name="TextBox 11"/>
+      <p:graphicFrame>
+        <p:nvGraphicFramePr>
+          <p:cNvPr id="7" name="Table 6"/>
+          <p:cNvGraphicFramePr>
+            <a:graphicFrameLocks noGrp="1"/>
+          </p:cNvGraphicFramePr>
+          <p:nvPr/>
+        </p:nvGraphicFramePr>
+        <p:xfrm>
+          <a:off x="548640" y="1417320"/>
+          <a:ext cx="5897880" cy="2139696"/>
+        </p:xfrm>
+        <a:graphic>
+          <a:graphicData uri="http://schemas.openxmlformats.org/drawingml/2006/table">
+            <a:tbl>
+              <a:tblPr>
+                <a:tableStyleId>{5C22544A-7EE6-4342-B048-85BDC9FD1C3A}</a:tableStyleId>
+              </a:tblPr>
+              <a:tblGrid>
+                <a:gridCol w="1417320"/>
+                <a:gridCol w="1417320"/>
+                <a:gridCol w="1417320"/>
+                <a:gridCol w="868680"/>
+                <a:gridCol w="777240"/>
+              </a:tblGrid>
+              <a:tr h="329184">
+                <a:tc>
+                  <a:txBody>
+                    <a:bodyPr wrap="square"/>
+                    <a:lstStyle/>
+                    <a:p>
+                      <a:pPr algn="l"/>
+                      <a:r>
+                        <a:rPr sz="1150" b="1">
+                          <a:solidFill>
+                            <a:srgbClr val="FFFFFF"/>
+                          </a:solidFill>
+                          <a:latin typeface="Calibri" panose="020F0502020204030204"/>
+                        </a:rPr>
+                        <a:t>Model</a:t>
+                      </a:r>
+                      <a:endParaRPr sz="1150" b="1">
+                        <a:solidFill>
+                          <a:srgbClr val="FFFFFF"/>
+                        </a:solidFill>
+                        <a:latin typeface="Calibri" panose="020F0502020204030204"/>
+                      </a:endParaRPr>
+                    </a:p>
+                  </a:txBody>
+                  <a:tcPr marL="73152" marR="73152" marT="0" marB="0" anchor="ctr">
+                    <a:solidFill>
+                      <a:srgbClr val="1C5CAB"/>
+                    </a:solidFill>
+                  </a:tcPr>
+                </a:tc>
+                <a:tc>
+                  <a:txBody>
+                    <a:bodyPr wrap="square"/>
+                    <a:lstStyle/>
+                    <a:p>
+                      <a:pPr algn="ctr"/>
+                      <a:r>
+                        <a:rPr sz="1150" b="1">
+                          <a:solidFill>
+                            <a:srgbClr val="FFFFFF"/>
+                          </a:solidFill>
+                          <a:latin typeface="Calibri" panose="020F0502020204030204"/>
+                        </a:rPr>
+                        <a:t>F1 (7-fold)</a:t>
+                      </a:r>
+                      <a:endParaRPr sz="1150" b="1">
+                        <a:solidFill>
+                          <a:srgbClr val="FFFFFF"/>
+                        </a:solidFill>
+                        <a:latin typeface="Calibri" panose="020F0502020204030204"/>
+                      </a:endParaRPr>
+                    </a:p>
+                  </a:txBody>
+                  <a:tcPr marL="73152" marR="73152" marT="0" marB="0" anchor="ctr">
+                    <a:solidFill>
+                      <a:srgbClr val="1C5CAB"/>
+                    </a:solidFill>
+                  </a:tcPr>
+                </a:tc>
+                <a:tc>
+                  <a:txBody>
+                    <a:bodyPr wrap="square"/>
+                    <a:lstStyle/>
+                    <a:p>
+                      <a:pPr algn="ctr"/>
+                      <a:r>
+                        <a:rPr sz="1150" b="1">
+                          <a:solidFill>
+                            <a:srgbClr val="FFFFFF"/>
+                          </a:solidFill>
+                          <a:latin typeface="Calibri" panose="020F0502020204030204"/>
+                        </a:rPr>
+                        <a:t>AUC (7-fold)</a:t>
+                      </a:r>
+                      <a:endParaRPr sz="1150" b="1">
+                        <a:solidFill>
+                          <a:srgbClr val="FFFFFF"/>
+                        </a:solidFill>
+                        <a:latin typeface="Calibri" panose="020F0502020204030204"/>
+                      </a:endParaRPr>
+                    </a:p>
+                  </a:txBody>
+                  <a:tcPr marL="73152" marR="73152" marT="0" marB="0" anchor="ctr">
+                    <a:solidFill>
+                      <a:srgbClr val="1C5CAB"/>
+                    </a:solidFill>
+                  </a:tcPr>
+                </a:tc>
+                <a:tc>
+                  <a:txBody>
+                    <a:bodyPr wrap="square"/>
+                    <a:lstStyle/>
+                    <a:p>
+                      <a:pPr algn="ctr"/>
+                      <a:r>
+                        <a:rPr sz="1150" b="1">
+                          <a:solidFill>
+                            <a:srgbClr val="FFFFFF"/>
+                          </a:solidFill>
+                          <a:latin typeface="Calibri" panose="020F0502020204030204"/>
+                        </a:rPr>
+                        <a:t>ms</a:t>
+                      </a:r>
+                      <a:endParaRPr sz="1150" b="1">
+                        <a:solidFill>
+                          <a:srgbClr val="FFFFFF"/>
+                        </a:solidFill>
+                        <a:latin typeface="Calibri" panose="020F0502020204030204"/>
+                      </a:endParaRPr>
+                    </a:p>
+                  </a:txBody>
+                  <a:tcPr marL="73152" marR="73152" marT="0" marB="0" anchor="ctr">
+                    <a:solidFill>
+                      <a:srgbClr val="1C5CAB"/>
+                    </a:solidFill>
+                  </a:tcPr>
+                </a:tc>
+                <a:tc>
+                  <a:txBody>
+                    <a:bodyPr wrap="square"/>
+                    <a:lstStyle/>
+                    <a:p>
+                      <a:pPr algn="ctr"/>
+                      <a:r>
+                        <a:rPr sz="1150" b="1">
+                          <a:solidFill>
+                            <a:srgbClr val="FFFFFF"/>
+                          </a:solidFill>
+                          <a:latin typeface="Calibri" panose="020F0502020204030204"/>
+                        </a:rPr>
+                        <a:t>≤100 ms</a:t>
+                      </a:r>
+                      <a:endParaRPr sz="1150" b="1">
+                        <a:solidFill>
+                          <a:srgbClr val="FFFFFF"/>
+                        </a:solidFill>
+                        <a:latin typeface="Calibri" panose="020F0502020204030204"/>
+                      </a:endParaRPr>
+                    </a:p>
+                  </a:txBody>
+                  <a:tcPr marL="73152" marR="73152" marT="0" marB="0" anchor="ctr">
+                    <a:solidFill>
+                      <a:srgbClr val="1C5CAB"/>
+                    </a:solidFill>
+                  </a:tcPr>
+                </a:tc>
+              </a:tr>
+              <a:tr h="301752">
+                <a:tc>
+                  <a:txBody>
+                    <a:bodyPr wrap="square"/>
+                    <a:lstStyle/>
+                    <a:p>
+                      <a:pPr algn="l"/>
+                      <a:r>
+                        <a:rPr sz="1150" b="0">
+                          <a:solidFill>
+                            <a:srgbClr val="1A1A1A"/>
+                          </a:solidFill>
+                          <a:latin typeface="Calibri" panose="020F0502020204030204"/>
+                        </a:rPr>
+                        <a:t>RandomForest</a:t>
+                      </a:r>
+                      <a:endParaRPr sz="1150" b="0">
+                        <a:solidFill>
+                          <a:srgbClr val="1A1A1A"/>
+                        </a:solidFill>
+                        <a:latin typeface="Calibri" panose="020F0502020204030204"/>
+                      </a:endParaRPr>
+                    </a:p>
+                  </a:txBody>
+                  <a:tcPr marL="73152" marR="73152" marT="0" marB="0" anchor="ctr">
+                    <a:solidFill>
+                      <a:srgbClr val="FFFFFF"/>
+                    </a:solidFill>
+                  </a:tcPr>
+                </a:tc>
+                <a:tc>
+                  <a:txBody>
+                    <a:bodyPr wrap="square"/>
+                    <a:lstStyle/>
+                    <a:p>
+                      <a:pPr algn="ctr"/>
+                      <a:r>
+                        <a:rPr sz="1150" b="0">
+                          <a:solidFill>
+                            <a:srgbClr val="1A1A1A"/>
+                          </a:solidFill>
+                          <a:latin typeface="Calibri" panose="020F0502020204030204"/>
+                        </a:rPr>
+                        <a:t>0.749 ± 0.048</a:t>
+                      </a:r>
+                      <a:endParaRPr sz="1150" b="0">
+                        <a:solidFill>
+                          <a:srgbClr val="1A1A1A"/>
+                        </a:solidFill>
+                        <a:latin typeface="Calibri" panose="020F0502020204030204"/>
+                      </a:endParaRPr>
+                    </a:p>
+                  </a:txBody>
+                  <a:tcPr marL="73152" marR="73152" marT="0" marB="0" anchor="ctr">
+                    <a:solidFill>
+                      <a:srgbClr val="FFFFFF"/>
+                    </a:solidFill>
+                  </a:tcPr>
+                </a:tc>
+                <a:tc>
+                  <a:txBody>
+                    <a:bodyPr wrap="square"/>
+                    <a:lstStyle/>
+                    <a:p>
+                      <a:pPr algn="ctr"/>
+                      <a:r>
+                        <a:rPr sz="1150" b="0">
+                          <a:solidFill>
+                            <a:srgbClr val="1A1A1A"/>
+                          </a:solidFill>
+                          <a:latin typeface="Calibri" panose="020F0502020204030204"/>
+                        </a:rPr>
+                        <a:t>0.960 ± 0.009</a:t>
+                      </a:r>
+                      <a:endParaRPr sz="1150" b="0">
+                        <a:solidFill>
+                          <a:srgbClr val="1A1A1A"/>
+                        </a:solidFill>
+                        <a:latin typeface="Calibri" panose="020F0502020204030204"/>
+                      </a:endParaRPr>
+                    </a:p>
+                  </a:txBody>
+                  <a:tcPr marL="73152" marR="73152" marT="0" marB="0" anchor="ctr">
+                    <a:solidFill>
+                      <a:srgbClr val="FFFFFF"/>
+                    </a:solidFill>
+                  </a:tcPr>
+                </a:tc>
+                <a:tc>
+                  <a:txBody>
+                    <a:bodyPr wrap="square"/>
+                    <a:lstStyle/>
+                    <a:p>
+                      <a:pPr algn="ctr"/>
+                      <a:r>
+                        <a:rPr sz="1150" b="0">
+                          <a:solidFill>
+                            <a:srgbClr val="1A1A1A"/>
+                          </a:solidFill>
+                          <a:latin typeface="Calibri" panose="020F0502020204030204"/>
+                        </a:rPr>
+                        <a:t>7.86</a:t>
+                      </a:r>
+                      <a:endParaRPr sz="1150" b="0">
+                        <a:solidFill>
+                          <a:srgbClr val="1A1A1A"/>
+                        </a:solidFill>
+                        <a:latin typeface="Calibri" panose="020F0502020204030204"/>
+                      </a:endParaRPr>
+                    </a:p>
+                  </a:txBody>
+                  <a:tcPr marL="73152" marR="73152" marT="0" marB="0" anchor="ctr">
+                    <a:solidFill>
+                      <a:srgbClr val="FFFFFF"/>
+                    </a:solidFill>
+                  </a:tcPr>
+                </a:tc>
+                <a:tc>
+                  <a:txBody>
+                    <a:bodyPr wrap="square"/>
+                    <a:lstStyle/>
+                    <a:p>
+                      <a:pPr algn="ctr"/>
+                      <a:r>
+                        <a:rPr sz="1150" b="1">
+                          <a:solidFill>
+                            <a:srgbClr val="006300"/>
+                          </a:solidFill>
+                          <a:latin typeface="Calibri" panose="020F0502020204030204"/>
+                        </a:rPr>
+                        <a:t>PASS</a:t>
+                      </a:r>
+                      <a:endParaRPr sz="1150" b="1">
+                        <a:solidFill>
+                          <a:srgbClr val="006300"/>
+                        </a:solidFill>
+                        <a:latin typeface="Calibri" panose="020F0502020204030204"/>
+                      </a:endParaRPr>
+                    </a:p>
+                  </a:txBody>
+                  <a:tcPr marL="73152" marR="73152" marT="0" marB="0" anchor="ctr">
+                    <a:solidFill>
+                      <a:srgbClr val="FFFFFF"/>
+                    </a:solidFill>
+                  </a:tcPr>
+                </a:tc>
+              </a:tr>
+              <a:tr h="301752">
+                <a:tc>
+                  <a:txBody>
+                    <a:bodyPr wrap="square"/>
+                    <a:lstStyle/>
+                    <a:p>
+                      <a:pPr algn="l"/>
+                      <a:r>
+                        <a:rPr sz="1150" b="1">
+                          <a:solidFill>
+                            <a:srgbClr val="1A1A1A"/>
+                          </a:solidFill>
+                          <a:latin typeface="Calibri" panose="020F0502020204030204"/>
+                        </a:rPr>
+                        <a:t>MLP</a:t>
+                      </a:r>
+                      <a:endParaRPr sz="1150" b="1">
+                        <a:solidFill>
+                          <a:srgbClr val="1A1A1A"/>
+                        </a:solidFill>
+                        <a:latin typeface="Calibri" panose="020F0502020204030204"/>
+                      </a:endParaRPr>
+                    </a:p>
+                  </a:txBody>
+                  <a:tcPr marL="73152" marR="73152" marT="0" marB="0" anchor="ctr">
+                    <a:solidFill>
+                      <a:srgbClr val="FCE9DF"/>
+                    </a:solidFill>
+                  </a:tcPr>
+                </a:tc>
+                <a:tc>
+                  <a:txBody>
+                    <a:bodyPr wrap="square"/>
+                    <a:lstStyle/>
+                    <a:p>
+                      <a:pPr algn="ctr"/>
+                      <a:r>
+                        <a:rPr sz="1150" b="0">
+                          <a:solidFill>
+                            <a:srgbClr val="1A1A1A"/>
+                          </a:solidFill>
+                          <a:latin typeface="Calibri" panose="020F0502020204030204"/>
+                        </a:rPr>
+                        <a:t>0.794 ± 0.047</a:t>
+                      </a:r>
+                      <a:endParaRPr sz="1150" b="0">
+                        <a:solidFill>
+                          <a:srgbClr val="1A1A1A"/>
+                        </a:solidFill>
+                        <a:latin typeface="Calibri" panose="020F0502020204030204"/>
+                      </a:endParaRPr>
+                    </a:p>
+                  </a:txBody>
+                  <a:tcPr marL="73152" marR="73152" marT="0" marB="0" anchor="ctr">
+                    <a:solidFill>
+                      <a:srgbClr val="FCE9DF"/>
+                    </a:solidFill>
+                  </a:tcPr>
+                </a:tc>
+                <a:tc>
+                  <a:txBody>
+                    <a:bodyPr wrap="square"/>
+                    <a:lstStyle/>
+                    <a:p>
+                      <a:pPr algn="ctr"/>
+                      <a:r>
+                        <a:rPr sz="1150" b="0">
+                          <a:solidFill>
+                            <a:srgbClr val="1A1A1A"/>
+                          </a:solidFill>
+                          <a:latin typeface="Calibri" panose="020F0502020204030204"/>
+                        </a:rPr>
+                        <a:t>0.979 ± 0.011</a:t>
+                      </a:r>
+                      <a:endParaRPr sz="1150" b="0">
+                        <a:solidFill>
+                          <a:srgbClr val="1A1A1A"/>
+                        </a:solidFill>
+                        <a:latin typeface="Calibri" panose="020F0502020204030204"/>
+                      </a:endParaRPr>
+                    </a:p>
+                  </a:txBody>
+                  <a:tcPr marL="73152" marR="73152" marT="0" marB="0" anchor="ctr">
+                    <a:solidFill>
+                      <a:srgbClr val="FCE9DF"/>
+                    </a:solidFill>
+                  </a:tcPr>
+                </a:tc>
+                <a:tc>
+                  <a:txBody>
+                    <a:bodyPr wrap="square"/>
+                    <a:lstStyle/>
+                    <a:p>
+                      <a:pPr algn="ctr"/>
+                      <a:r>
+                        <a:rPr sz="1150" b="0">
+                          <a:solidFill>
+                            <a:srgbClr val="1A1A1A"/>
+                          </a:solidFill>
+                          <a:latin typeface="Calibri" panose="020F0502020204030204"/>
+                        </a:rPr>
+                        <a:t>0.14</a:t>
+                      </a:r>
+                      <a:endParaRPr sz="1150" b="0">
+                        <a:solidFill>
+                          <a:srgbClr val="1A1A1A"/>
+                        </a:solidFill>
+                        <a:latin typeface="Calibri" panose="020F0502020204030204"/>
+                      </a:endParaRPr>
+                    </a:p>
+                  </a:txBody>
+                  <a:tcPr marL="73152" marR="73152" marT="0" marB="0" anchor="ctr">
+                    <a:solidFill>
+                      <a:srgbClr val="FCE9DF"/>
+                    </a:solidFill>
+                  </a:tcPr>
+                </a:tc>
+                <a:tc>
+                  <a:txBody>
+                    <a:bodyPr wrap="square"/>
+                    <a:lstStyle/>
+                    <a:p>
+                      <a:pPr algn="ctr"/>
+                      <a:r>
+                        <a:rPr sz="1150" b="1">
+                          <a:solidFill>
+                            <a:srgbClr val="006300"/>
+                          </a:solidFill>
+                          <a:latin typeface="Calibri" panose="020F0502020204030204"/>
+                        </a:rPr>
+                        <a:t>PASS</a:t>
+                      </a:r>
+                      <a:endParaRPr sz="1150" b="1">
+                        <a:solidFill>
+                          <a:srgbClr val="006300"/>
+                        </a:solidFill>
+                        <a:latin typeface="Calibri" panose="020F0502020204030204"/>
+                      </a:endParaRPr>
+                    </a:p>
+                  </a:txBody>
+                  <a:tcPr marL="73152" marR="73152" marT="0" marB="0" anchor="ctr">
+                    <a:solidFill>
+                      <a:srgbClr val="FCE9DF"/>
+                    </a:solidFill>
+                  </a:tcPr>
+                </a:tc>
+              </a:tr>
+              <a:tr h="301752">
+                <a:tc>
+                  <a:txBody>
+                    <a:bodyPr wrap="square"/>
+                    <a:lstStyle/>
+                    <a:p>
+                      <a:pPr algn="l"/>
+                      <a:r>
+                        <a:rPr sz="1150" b="0">
+                          <a:solidFill>
+                            <a:srgbClr val="1A1A1A"/>
+                          </a:solidFill>
+                          <a:latin typeface="Calibri" panose="020F0502020204030204"/>
+                        </a:rPr>
+                        <a:t>1D-CNN</a:t>
+                      </a:r>
+                      <a:endParaRPr sz="1150" b="0">
+                        <a:solidFill>
+                          <a:srgbClr val="1A1A1A"/>
+                        </a:solidFill>
+                        <a:latin typeface="Calibri" panose="020F0502020204030204"/>
+                      </a:endParaRPr>
+                    </a:p>
+                  </a:txBody>
+                  <a:tcPr marL="73152" marR="73152" marT="0" marB="0" anchor="ctr">
+                    <a:solidFill>
+                      <a:srgbClr val="FFFFFF"/>
+                    </a:solidFill>
+                  </a:tcPr>
+                </a:tc>
+                <a:tc>
+                  <a:txBody>
+                    <a:bodyPr wrap="square"/>
+                    <a:lstStyle/>
+                    <a:p>
+                      <a:pPr algn="ctr"/>
+                      <a:r>
+                        <a:rPr sz="1150" b="0">
+                          <a:solidFill>
+                            <a:srgbClr val="1A1A1A"/>
+                          </a:solidFill>
+                          <a:latin typeface="Calibri" panose="020F0502020204030204"/>
+                        </a:rPr>
+                        <a:t>0.731 ± 0.115</a:t>
+                      </a:r>
+                      <a:endParaRPr sz="1150" b="0">
+                        <a:solidFill>
+                          <a:srgbClr val="1A1A1A"/>
+                        </a:solidFill>
+                        <a:latin typeface="Calibri" panose="020F0502020204030204"/>
+                      </a:endParaRPr>
+                    </a:p>
+                  </a:txBody>
+                  <a:tcPr marL="73152" marR="73152" marT="0" marB="0" anchor="ctr">
+                    <a:solidFill>
+                      <a:srgbClr val="FFFFFF"/>
+                    </a:solidFill>
+                  </a:tcPr>
+                </a:tc>
+                <a:tc>
+                  <a:txBody>
+                    <a:bodyPr wrap="square"/>
+                    <a:lstStyle/>
+                    <a:p>
+                      <a:pPr algn="ctr"/>
+                      <a:r>
+                        <a:rPr sz="1150" b="0">
+                          <a:solidFill>
+                            <a:srgbClr val="1A1A1A"/>
+                          </a:solidFill>
+                          <a:latin typeface="Calibri" panose="020F0502020204030204"/>
+                        </a:rPr>
+                        <a:t>0.965 ± 0.022</a:t>
+                      </a:r>
+                      <a:endParaRPr sz="1150" b="0">
+                        <a:solidFill>
+                          <a:srgbClr val="1A1A1A"/>
+                        </a:solidFill>
+                        <a:latin typeface="Calibri" panose="020F0502020204030204"/>
+                      </a:endParaRPr>
+                    </a:p>
+                  </a:txBody>
+                  <a:tcPr marL="73152" marR="73152" marT="0" marB="0" anchor="ctr">
+                    <a:solidFill>
+                      <a:srgbClr val="FFFFFF"/>
+                    </a:solidFill>
+                  </a:tcPr>
+                </a:tc>
+                <a:tc>
+                  <a:txBody>
+                    <a:bodyPr wrap="square"/>
+                    <a:lstStyle/>
+                    <a:p>
+                      <a:pPr algn="ctr"/>
+                      <a:r>
+                        <a:rPr sz="1150" b="0">
+                          <a:solidFill>
+                            <a:srgbClr val="1A1A1A"/>
+                          </a:solidFill>
+                          <a:latin typeface="Calibri" panose="020F0502020204030204"/>
+                        </a:rPr>
+                        <a:t>0.15</a:t>
+                      </a:r>
+                      <a:endParaRPr sz="1150" b="0">
+                        <a:solidFill>
+                          <a:srgbClr val="1A1A1A"/>
+                        </a:solidFill>
+                        <a:latin typeface="Calibri" panose="020F0502020204030204"/>
+                      </a:endParaRPr>
+                    </a:p>
+                  </a:txBody>
+                  <a:tcPr marL="73152" marR="73152" marT="0" marB="0" anchor="ctr">
+                    <a:solidFill>
+                      <a:srgbClr val="FFFFFF"/>
+                    </a:solidFill>
+                  </a:tcPr>
+                </a:tc>
+                <a:tc>
+                  <a:txBody>
+                    <a:bodyPr wrap="square"/>
+                    <a:lstStyle/>
+                    <a:p>
+                      <a:pPr algn="ctr"/>
+                      <a:r>
+                        <a:rPr sz="1150" b="1">
+                          <a:solidFill>
+                            <a:srgbClr val="006300"/>
+                          </a:solidFill>
+                          <a:latin typeface="Calibri" panose="020F0502020204030204"/>
+                        </a:rPr>
+                        <a:t>PASS</a:t>
+                      </a:r>
+                      <a:endParaRPr sz="1150" b="1">
+                        <a:solidFill>
+                          <a:srgbClr val="006300"/>
+                        </a:solidFill>
+                        <a:latin typeface="Calibri" panose="020F0502020204030204"/>
+                      </a:endParaRPr>
+                    </a:p>
+                  </a:txBody>
+                  <a:tcPr marL="73152" marR="73152" marT="0" marB="0" anchor="ctr">
+                    <a:solidFill>
+                      <a:srgbClr val="FFFFFF"/>
+                    </a:solidFill>
+                  </a:tcPr>
+                </a:tc>
+              </a:tr>
+              <a:tr h="301752">
+                <a:tc>
+                  <a:txBody>
+                    <a:bodyPr wrap="square"/>
+                    <a:lstStyle/>
+                    <a:p>
+                      <a:pPr algn="l"/>
+                      <a:r>
+                        <a:rPr sz="1150" b="0">
+                          <a:solidFill>
+                            <a:srgbClr val="1A1A1A"/>
+                          </a:solidFill>
+                          <a:latin typeface="Calibri" panose="020F0502020204030204"/>
+                        </a:rPr>
+                        <a:t>LSTM</a:t>
+                      </a:r>
+                      <a:endParaRPr sz="1150" b="0">
+                        <a:solidFill>
+                          <a:srgbClr val="1A1A1A"/>
+                        </a:solidFill>
+                        <a:latin typeface="Calibri" panose="020F0502020204030204"/>
+                      </a:endParaRPr>
+                    </a:p>
+                  </a:txBody>
+                  <a:tcPr marL="73152" marR="73152" marT="0" marB="0" anchor="ctr">
+                    <a:solidFill>
+                      <a:srgbClr val="F7F8FA"/>
+                    </a:solidFill>
+                  </a:tcPr>
+                </a:tc>
+                <a:tc>
+                  <a:txBody>
+                    <a:bodyPr wrap="square"/>
+                    <a:lstStyle/>
+                    <a:p>
+                      <a:pPr algn="ctr"/>
+                      <a:r>
+                        <a:rPr sz="1150" b="0">
+                          <a:solidFill>
+                            <a:srgbClr val="1A1A1A"/>
+                          </a:solidFill>
+                          <a:latin typeface="Calibri" panose="020F0502020204030204"/>
+                        </a:rPr>
+                        <a:t>0.704 ± 0.159</a:t>
+                      </a:r>
+                      <a:endParaRPr sz="1150" b="0">
+                        <a:solidFill>
+                          <a:srgbClr val="1A1A1A"/>
+                        </a:solidFill>
+                        <a:latin typeface="Calibri" panose="020F0502020204030204"/>
+                      </a:endParaRPr>
+                    </a:p>
+                  </a:txBody>
+                  <a:tcPr marL="73152" marR="73152" marT="0" marB="0" anchor="ctr">
+                    <a:solidFill>
+                      <a:srgbClr val="F7F8FA"/>
+                    </a:solidFill>
+                  </a:tcPr>
+                </a:tc>
+                <a:tc>
+                  <a:txBody>
+                    <a:bodyPr wrap="square"/>
+                    <a:lstStyle/>
+                    <a:p>
+                      <a:pPr algn="ctr"/>
+                      <a:r>
+                        <a:rPr sz="1150" b="0">
+                          <a:solidFill>
+                            <a:srgbClr val="1A1A1A"/>
+                          </a:solidFill>
+                          <a:latin typeface="Calibri" panose="020F0502020204030204"/>
+                        </a:rPr>
+                        <a:t>0.969 ± 0.014</a:t>
+                      </a:r>
+                      <a:endParaRPr sz="1150" b="0">
+                        <a:solidFill>
+                          <a:srgbClr val="1A1A1A"/>
+                        </a:solidFill>
+                        <a:latin typeface="Calibri" panose="020F0502020204030204"/>
+                      </a:endParaRPr>
+                    </a:p>
+                  </a:txBody>
+                  <a:tcPr marL="73152" marR="73152" marT="0" marB="0" anchor="ctr">
+                    <a:solidFill>
+                      <a:srgbClr val="F7F8FA"/>
+                    </a:solidFill>
+                  </a:tcPr>
+                </a:tc>
+                <a:tc>
+                  <a:txBody>
+                    <a:bodyPr wrap="square"/>
+                    <a:lstStyle/>
+                    <a:p>
+                      <a:pPr algn="ctr"/>
+                      <a:r>
+                        <a:rPr sz="1150" b="0">
+                          <a:solidFill>
+                            <a:srgbClr val="1A1A1A"/>
+                          </a:solidFill>
+                          <a:latin typeface="Calibri" panose="020F0502020204030204"/>
+                        </a:rPr>
+                        <a:t>0.19</a:t>
+                      </a:r>
+                      <a:endParaRPr sz="1150" b="0">
+                        <a:solidFill>
+                          <a:srgbClr val="1A1A1A"/>
+                        </a:solidFill>
+                        <a:latin typeface="Calibri" panose="020F0502020204030204"/>
+                      </a:endParaRPr>
+                    </a:p>
+                  </a:txBody>
+                  <a:tcPr marL="73152" marR="73152" marT="0" marB="0" anchor="ctr">
+                    <a:solidFill>
+                      <a:srgbClr val="F7F8FA"/>
+                    </a:solidFill>
+                  </a:tcPr>
+                </a:tc>
+                <a:tc>
+                  <a:txBody>
+                    <a:bodyPr wrap="square"/>
+                    <a:lstStyle/>
+                    <a:p>
+                      <a:pPr algn="ctr"/>
+                      <a:r>
+                        <a:rPr sz="1150" b="1">
+                          <a:solidFill>
+                            <a:srgbClr val="006300"/>
+                          </a:solidFill>
+                          <a:latin typeface="Calibri" panose="020F0502020204030204"/>
+                        </a:rPr>
+                        <a:t>PASS</a:t>
+                      </a:r>
+                      <a:endParaRPr sz="1150" b="1">
+                        <a:solidFill>
+                          <a:srgbClr val="006300"/>
+                        </a:solidFill>
+                        <a:latin typeface="Calibri" panose="020F0502020204030204"/>
+                      </a:endParaRPr>
+                    </a:p>
+                  </a:txBody>
+                  <a:tcPr marL="73152" marR="73152" marT="0" marB="0" anchor="ctr">
+                    <a:solidFill>
+                      <a:srgbClr val="F7F8FA"/>
+                    </a:solidFill>
+                  </a:tcPr>
+                </a:tc>
+              </a:tr>
+              <a:tr h="301752">
+                <a:tc>
+                  <a:txBody>
+                    <a:bodyPr wrap="square"/>
+                    <a:lstStyle/>
+                    <a:p>
+                      <a:pPr algn="l"/>
+                      <a:r>
+                        <a:rPr sz="1150" b="0">
+                          <a:solidFill>
+                            <a:srgbClr val="1A1A1A"/>
+                          </a:solidFill>
+                          <a:latin typeface="Calibri" panose="020F0502020204030204"/>
+                        </a:rPr>
+                        <a:t>GRU</a:t>
+                      </a:r>
+                      <a:endParaRPr sz="1150" b="0">
+                        <a:solidFill>
+                          <a:srgbClr val="1A1A1A"/>
+                        </a:solidFill>
+                        <a:latin typeface="Calibri" panose="020F0502020204030204"/>
+                      </a:endParaRPr>
+                    </a:p>
+                  </a:txBody>
+                  <a:tcPr marL="73152" marR="73152" marT="0" marB="0" anchor="ctr">
+                    <a:solidFill>
+                      <a:srgbClr val="FFFFFF"/>
+                    </a:solidFill>
+                  </a:tcPr>
+                </a:tc>
+                <a:tc>
+                  <a:txBody>
+                    <a:bodyPr wrap="square"/>
+                    <a:lstStyle/>
+                    <a:p>
+                      <a:pPr algn="ctr"/>
+                      <a:r>
+                        <a:rPr sz="1150" b="0">
+                          <a:solidFill>
+                            <a:srgbClr val="1A1A1A"/>
+                          </a:solidFill>
+                          <a:latin typeface="Calibri" panose="020F0502020204030204"/>
+                        </a:rPr>
+                        <a:t>0.747 ± 0.082</a:t>
+                      </a:r>
+                      <a:endParaRPr sz="1150" b="0">
+                        <a:solidFill>
+                          <a:srgbClr val="1A1A1A"/>
+                        </a:solidFill>
+                        <a:latin typeface="Calibri" panose="020F0502020204030204"/>
+                      </a:endParaRPr>
+                    </a:p>
+                  </a:txBody>
+                  <a:tcPr marL="73152" marR="73152" marT="0" marB="0" anchor="ctr">
+                    <a:solidFill>
+                      <a:srgbClr val="FFFFFF"/>
+                    </a:solidFill>
+                  </a:tcPr>
+                </a:tc>
+                <a:tc>
+                  <a:txBody>
+                    <a:bodyPr wrap="square"/>
+                    <a:lstStyle/>
+                    <a:p>
+                      <a:pPr algn="ctr"/>
+                      <a:r>
+                        <a:rPr sz="1150" b="0">
+                          <a:solidFill>
+                            <a:srgbClr val="1A1A1A"/>
+                          </a:solidFill>
+                          <a:latin typeface="Calibri" panose="020F0502020204030204"/>
+                        </a:rPr>
+                        <a:t>0.975 ± 0.006</a:t>
+                      </a:r>
+                      <a:endParaRPr sz="1150" b="0">
+                        <a:solidFill>
+                          <a:srgbClr val="1A1A1A"/>
+                        </a:solidFill>
+                        <a:latin typeface="Calibri" panose="020F0502020204030204"/>
+                      </a:endParaRPr>
+                    </a:p>
+                  </a:txBody>
+                  <a:tcPr marL="73152" marR="73152" marT="0" marB="0" anchor="ctr">
+                    <a:solidFill>
+                      <a:srgbClr val="FFFFFF"/>
+                    </a:solidFill>
+                  </a:tcPr>
+                </a:tc>
+                <a:tc>
+                  <a:txBody>
+                    <a:bodyPr wrap="square"/>
+                    <a:lstStyle/>
+                    <a:p>
+                      <a:pPr algn="ctr"/>
+                      <a:r>
+                        <a:rPr sz="1150" b="0">
+                          <a:solidFill>
+                            <a:srgbClr val="1A1A1A"/>
+                          </a:solidFill>
+                          <a:latin typeface="Calibri" panose="020F0502020204030204"/>
+                        </a:rPr>
+                        <a:t>0.67</a:t>
+                      </a:r>
+                      <a:endParaRPr sz="1150" b="0">
+                        <a:solidFill>
+                          <a:srgbClr val="1A1A1A"/>
+                        </a:solidFill>
+                        <a:latin typeface="Calibri" panose="020F0502020204030204"/>
+                      </a:endParaRPr>
+                    </a:p>
+                  </a:txBody>
+                  <a:tcPr marL="73152" marR="73152" marT="0" marB="0" anchor="ctr">
+                    <a:solidFill>
+                      <a:srgbClr val="FFFFFF"/>
+                    </a:solidFill>
+                  </a:tcPr>
+                </a:tc>
+                <a:tc>
+                  <a:txBody>
+                    <a:bodyPr wrap="square"/>
+                    <a:lstStyle/>
+                    <a:p>
+                      <a:pPr algn="ctr"/>
+                      <a:r>
+                        <a:rPr sz="1150" b="1">
+                          <a:solidFill>
+                            <a:srgbClr val="006300"/>
+                          </a:solidFill>
+                          <a:latin typeface="Calibri" panose="020F0502020204030204"/>
+                        </a:rPr>
+                        <a:t>PASS</a:t>
+                      </a:r>
+                      <a:endParaRPr sz="1150" b="1">
+                        <a:solidFill>
+                          <a:srgbClr val="006300"/>
+                        </a:solidFill>
+                        <a:latin typeface="Calibri" panose="020F0502020204030204"/>
+                      </a:endParaRPr>
+                    </a:p>
+                  </a:txBody>
+                  <a:tcPr marL="73152" marR="73152" marT="0" marB="0" anchor="ctr">
+                    <a:solidFill>
+                      <a:srgbClr val="FFFFFF"/>
+                    </a:solidFill>
+                  </a:tcPr>
+                </a:tc>
+              </a:tr>
+              <a:tr h="301752">
+                <a:tc>
+                  <a:txBody>
+                    <a:bodyPr wrap="square"/>
+                    <a:lstStyle/>
+                    <a:p>
+                      <a:pPr algn="l"/>
+                      <a:r>
+                        <a:rPr sz="1150" b="0">
+                          <a:solidFill>
+                            <a:srgbClr val="1A1A1A"/>
+                          </a:solidFill>
+                          <a:latin typeface="Calibri" panose="020F0502020204030204"/>
+                        </a:rPr>
+                        <a:t>Transformer</a:t>
+                      </a:r>
+                      <a:endParaRPr sz="1150" b="0">
+                        <a:solidFill>
+                          <a:srgbClr val="1A1A1A"/>
+                        </a:solidFill>
+                        <a:latin typeface="Calibri" panose="020F0502020204030204"/>
+                      </a:endParaRPr>
+                    </a:p>
+                  </a:txBody>
+                  <a:tcPr marL="73152" marR="73152" marT="0" marB="0" anchor="ctr">
+                    <a:solidFill>
+                      <a:srgbClr val="F7F8FA"/>
+                    </a:solidFill>
+                  </a:tcPr>
+                </a:tc>
+                <a:tc>
+                  <a:txBody>
+                    <a:bodyPr wrap="square"/>
+                    <a:lstStyle/>
+                    <a:p>
+                      <a:pPr algn="ctr"/>
+                      <a:r>
+                        <a:rPr sz="1150" b="0">
+                          <a:solidFill>
+                            <a:srgbClr val="1A1A1A"/>
+                          </a:solidFill>
+                          <a:latin typeface="Calibri" panose="020F0502020204030204"/>
+                        </a:rPr>
+                        <a:t>0.829 ± 0.069</a:t>
+                      </a:r>
+                      <a:endParaRPr sz="1150" b="0">
+                        <a:solidFill>
+                          <a:srgbClr val="1A1A1A"/>
+                        </a:solidFill>
+                        <a:latin typeface="Calibri" panose="020F0502020204030204"/>
+                      </a:endParaRPr>
+                    </a:p>
+                  </a:txBody>
+                  <a:tcPr marL="73152" marR="73152" marT="0" marB="0" anchor="ctr">
+                    <a:solidFill>
+                      <a:srgbClr val="F7F8FA"/>
+                    </a:solidFill>
+                  </a:tcPr>
+                </a:tc>
+                <a:tc>
+                  <a:txBody>
+                    <a:bodyPr wrap="square"/>
+                    <a:lstStyle/>
+                    <a:p>
+                      <a:pPr algn="ctr"/>
+                      <a:r>
+                        <a:rPr sz="1150" b="0">
+                          <a:solidFill>
+                            <a:srgbClr val="1A1A1A"/>
+                          </a:solidFill>
+                          <a:latin typeface="Calibri" panose="020F0502020204030204"/>
+                        </a:rPr>
+                        <a:t>0.982 ± 0.005</a:t>
+                      </a:r>
+                      <a:endParaRPr sz="1150" b="0">
+                        <a:solidFill>
+                          <a:srgbClr val="1A1A1A"/>
+                        </a:solidFill>
+                        <a:latin typeface="Calibri" panose="020F0502020204030204"/>
+                      </a:endParaRPr>
+                    </a:p>
+                  </a:txBody>
+                  <a:tcPr marL="73152" marR="73152" marT="0" marB="0" anchor="ctr">
+                    <a:solidFill>
+                      <a:srgbClr val="F7F8FA"/>
+                    </a:solidFill>
+                  </a:tcPr>
+                </a:tc>
+                <a:tc>
+                  <a:txBody>
+                    <a:bodyPr wrap="square"/>
+                    <a:lstStyle/>
+                    <a:p>
+                      <a:pPr algn="ctr"/>
+                      <a:r>
+                        <a:rPr sz="1150" b="0">
+                          <a:solidFill>
+                            <a:srgbClr val="1A1A1A"/>
+                          </a:solidFill>
+                          <a:latin typeface="Calibri" panose="020F0502020204030204"/>
+                        </a:rPr>
+                        <a:t>0.52</a:t>
+                      </a:r>
+                      <a:endParaRPr sz="1150" b="0">
+                        <a:solidFill>
+                          <a:srgbClr val="1A1A1A"/>
+                        </a:solidFill>
+                        <a:latin typeface="Calibri" panose="020F0502020204030204"/>
+                      </a:endParaRPr>
+                    </a:p>
+                  </a:txBody>
+                  <a:tcPr marL="73152" marR="73152" marT="0" marB="0" anchor="ctr">
+                    <a:solidFill>
+                      <a:srgbClr val="F7F8FA"/>
+                    </a:solidFill>
+                  </a:tcPr>
+                </a:tc>
+                <a:tc>
+                  <a:txBody>
+                    <a:bodyPr wrap="square"/>
+                    <a:lstStyle/>
+                    <a:p>
+                      <a:pPr algn="ctr"/>
+                      <a:r>
+                        <a:rPr sz="1150" b="1">
+                          <a:solidFill>
+                            <a:srgbClr val="006300"/>
+                          </a:solidFill>
+                          <a:latin typeface="Calibri" panose="020F0502020204030204"/>
+                        </a:rPr>
+                        <a:t>PASS</a:t>
+                      </a:r>
+                      <a:endParaRPr sz="1150" b="1">
+                        <a:solidFill>
+                          <a:srgbClr val="006300"/>
+                        </a:solidFill>
+                        <a:latin typeface="Calibri" panose="020F0502020204030204"/>
+                      </a:endParaRPr>
+                    </a:p>
+                  </a:txBody>
+                  <a:tcPr marL="73152" marR="73152" marT="0" marB="0" anchor="ctr">
+                    <a:solidFill>
+                      <a:srgbClr val="F7F8FA"/>
+                    </a:solidFill>
+                  </a:tcPr>
+                </a:tc>
+              </a:tr>
+            </a:tbl>
+          </a:graphicData>
+        </a:graphic>
+      </p:graphicFrame>
+      <p:sp>
+        <p:nvSpPr>
+          <p:cNvPr id="8" name="TextBox 7"/>
           <p:cNvSpPr txBox="1"/>
           <p:nvPr/>
         </p:nvSpPr>
         <p:spPr>
           <a:xfrm>
-            <a:off x="10972800" y="6510528"/>
-            <a:ext cx="667512" cy="274320"/>
+            <a:off x="548640" y="3639312"/>
+            <a:ext cx="5623560" cy="228600"/>
           </a:xfrm>
           <a:prstGeom prst="rect">
             <a:avLst/>
@@ -5787,28 +5640,179 @@
           <a:noFill/>
         </p:spPr>
         <p:txBody>
-          <a:bodyPr wrap="square" lIns="0" tIns="0" rIns="0" bIns="0" anchor="t">
+          <a:bodyPr wrap="square" lIns="0" tIns="0" rIns="0" bIns="0">
             <a:spAutoFit/>
           </a:bodyPr>
           <a:lstStyle/>
           <a:p>
-            <a:pPr algn="r">
+            <a:pPr algn="l">
               <a:lnSpc>
                 <a:spcPct val="106000"/>
               </a:lnSpc>
             </a:pPr>
             <a:r>
-              <a:rPr sz="900" b="0">
+              <a:rPr sz="1100" b="0">
                 <a:solidFill>
                   <a:srgbClr val="898781"/>
                 </a:solidFill>
                 <a:latin typeface="Calibri" panose="020F0502020204030204"/>
               </a:rPr>
-              <a:t>3 / 7</a:t>
-            </a:r>
-            <a:endParaRPr sz="900" b="0">
+              <a:t>All six deployment-feasible; </a:t>
+            </a:r>
+            <a:r>
+              <a:rPr sz="1100" b="0">
+                <a:solidFill>
+                  <a:srgbClr val="52514E"/>
+                </a:solidFill>
+                <a:latin typeface="Calibri" panose="020F0502020204030204"/>
+              </a:rPr>
+              <a:t>highlighted row</a:t>
+            </a:r>
+            <a:r>
+              <a:rPr sz="1100" b="0">
+                <a:solidFill>
+                  <a:srgbClr val="898781"/>
+                </a:solidFill>
+                <a:latin typeface="Calibri" panose="020F0502020204030204"/>
+              </a:rPr>
+              <a:t> = recommended default. Sub-ms readings are single-session means — order of magnitude only.</a:t>
+            </a:r>
+            <a:endParaRPr sz="1100" b="0">
               <a:solidFill>
                 <a:srgbClr val="898781"/>
+              </a:solidFill>
+              <a:latin typeface="Calibri" panose="020F0502020204030204"/>
+            </a:endParaRPr>
+          </a:p>
+        </p:txBody>
+      </p:sp>
+      <p:pic>
+        <p:nvPicPr>
+          <p:cNvPr id="9" name="Picture 8" descr="image1.png"/>
+          <p:cNvPicPr>
+            <a:picLocks noChangeAspect="1"/>
+          </p:cNvPicPr>
+          <p:nvPr/>
+        </p:nvPicPr>
+        <p:blipFill>
+          <a:blip r:embed="rId1"/>
+          <a:stretch>
+            <a:fillRect/>
+          </a:stretch>
+        </p:blipFill>
+        <p:spPr>
+          <a:xfrm>
+            <a:off x="6355080" y="1325880"/>
+            <a:ext cx="5486400" cy="4160520"/>
+          </a:xfrm>
+          <a:prstGeom prst="rect">
+            <a:avLst/>
+          </a:prstGeom>
+        </p:spPr>
+      </p:pic>
+      <p:sp>
+        <p:nvSpPr>
+          <p:cNvPr id="10" name="TextBox 9"/>
+          <p:cNvSpPr txBox="1"/>
+          <p:nvPr/>
+        </p:nvSpPr>
+        <p:spPr>
+          <a:xfrm>
+            <a:off x="548640" y="4041648"/>
+            <a:ext cx="5623560" cy="1328420"/>
+          </a:xfrm>
+          <a:prstGeom prst="rect">
+            <a:avLst/>
+          </a:prstGeom>
+          <a:noFill/>
+        </p:spPr>
+        <p:txBody>
+          <a:bodyPr wrap="square" lIns="0" tIns="0" rIns="0" bIns="0">
+            <a:spAutoFit/>
+          </a:bodyPr>
+          <a:lstStyle/>
+          <a:p>
+            <a:pPr algn="just">
+              <a:lnSpc>
+                <a:spcPct val="112000"/>
+              </a:lnSpc>
+              <a:spcAft>
+                <a:spcPts val="700"/>
+              </a:spcAft>
+            </a:pPr>
+            <a:r>
+              <a:rPr sz="1200" b="1">
+                <a:solidFill>
+                  <a:srgbClr val="1C5CAB"/>
+                </a:solidFill>
+                <a:latin typeface="Calibri" panose="020F0502020204030204"/>
+              </a:rPr>
+              <a:t>·  </a:t>
+            </a:r>
+            <a:r>
+              <a:rPr sz="1200" b="1">
+                <a:solidFill>
+                  <a:srgbClr val="1A1A1A"/>
+                </a:solidFill>
+                <a:latin typeface="Calibri" panose="020F0502020204030204"/>
+              </a:rPr>
+              <a:t>MLP is the recommended default</a:t>
+            </a:r>
+            <a:r>
+              <a:rPr sz="1200" b="0">
+                <a:solidFill>
+                  <a:srgbClr val="1A1A1A"/>
+                </a:solidFill>
+                <a:latin typeface="Calibri" panose="020F0502020204030204"/>
+              </a:rPr>
+              <a:t>: the Transformer's F1 edge is within noise by a paired t-test (p = 0.34) and vanishes at matched parameters (Transformer-S 0.760, itself inside the same near-tie). On the axes that decide selection the MLP is not beaten — equal F1, the better worst fold (0.736 vs 0.690), 4.5× fewer parameters.</a:t>
+            </a:r>
+            <a:endParaRPr sz="1200" b="0">
+              <a:solidFill>
+                <a:srgbClr val="1A1A1A"/>
+              </a:solidFill>
+              <a:latin typeface="Calibri" panose="020F0502020204030204"/>
+            </a:endParaRPr>
+          </a:p>
+          <a:p>
+            <a:pPr algn="just">
+              <a:lnSpc>
+                <a:spcPct val="112000"/>
+              </a:lnSpc>
+              <a:spcAft>
+                <a:spcPts val="700"/>
+              </a:spcAft>
+            </a:pPr>
+            <a:r>
+              <a:rPr sz="1200" b="1">
+                <a:solidFill>
+                  <a:srgbClr val="1C5CAB"/>
+                </a:solidFill>
+                <a:latin typeface="Calibri" panose="020F0502020204030204"/>
+              </a:rPr>
+              <a:t>·  </a:t>
+            </a:r>
+            <a:r>
+              <a:rPr sz="1200" b="1">
+                <a:solidFill>
+                  <a:srgbClr val="1A1A1A"/>
+                </a:solidFill>
+                <a:latin typeface="Calibri" panose="020F0502020204030204"/>
+              </a:rPr>
+              <a:t>Latency never binds at 10 Hz</a:t>
+            </a:r>
+            <a:r>
+              <a:rPr sz="1200" b="0">
+                <a:solidFill>
+                  <a:srgbClr val="1A1A1A"/>
+                </a:solidFill>
+                <a:latin typeface="Calibri" panose="020F0502020204030204"/>
+              </a:rPr>
+              <a:t> — the slowest model sits &gt;12× under the gate; model choice is a quality/stability decision, not a speed one.</a:t>
+            </a:r>
+            <a:endParaRPr sz="1200" b="0">
+              <a:solidFill>
+                <a:srgbClr val="1A1A1A"/>
               </a:solidFill>
               <a:latin typeface="Calibri" panose="020F0502020204030204"/>
             </a:endParaRPr>
@@ -5842,7 +5846,7 @@
         <p:spPr>
           <a:xfrm>
             <a:off x="548640" y="292608"/>
-            <a:ext cx="11091672" cy="566928"/>
+            <a:ext cx="11091672" cy="374650"/>
           </a:xfrm>
           <a:prstGeom prst="rect">
             <a:avLst/>
@@ -5850,7 +5854,7 @@
           <a:noFill/>
         </p:spPr>
         <p:txBody>
-          <a:bodyPr wrap="square" lIns="0" tIns="0" rIns="0" bIns="0" anchor="t">
+          <a:bodyPr wrap="square" lIns="0" tIns="0" rIns="0" bIns="0">
             <a:spAutoFit/>
           </a:bodyPr>
           <a:lstStyle/>
@@ -5867,7 +5871,43 @@
                 </a:solidFill>
                 <a:latin typeface="Calibri" panose="020F0502020204030204"/>
               </a:rPr>
-              <a:t>Preprocessing &amp; features — 9 raw sensors into a physics-driven 40-feature matrix</a:t>
+              <a:t>Attention localises the fault,</a:t>
+            </a:r>
+            <a:r>
+              <a:rPr lang="en-US" sz="2300" b="1">
+                <a:solidFill>
+                  <a:srgbClr val="1A1A1A"/>
+                </a:solidFill>
+                <a:latin typeface="Calibri" panose="020F0502020204030204"/>
+              </a:rPr>
+              <a:t> </a:t>
+            </a:r>
+            <a:r>
+              <a:rPr sz="2300" b="1">
+                <a:solidFill>
+                  <a:srgbClr val="1A1A1A"/>
+                </a:solidFill>
+                <a:latin typeface="Calibri" panose="020F0502020204030204"/>
+              </a:rPr>
+              <a:t>LSTM smears </a:t>
+            </a:r>
+            <a:r>
+              <a:rPr lang="en-US" sz="2300" b="1">
+                <a:solidFill>
+                  <a:srgbClr val="1A1A1A"/>
+                </a:solidFill>
+                <a:latin typeface="Calibri" panose="020F0502020204030204"/>
+              </a:rPr>
+              <a:t>froward</a:t>
+            </a:r>
+            <a:r>
+              <a:rPr sz="2300" b="1">
+                <a:solidFill>
+                  <a:srgbClr val="1A1A1A"/>
+                </a:solidFill>
+                <a:latin typeface="Calibri" panose="020F0502020204030204"/>
+              </a:rPr>
+              <a:t>, the feature steps at onset</a:t>
             </a:r>
             <a:endParaRPr sz="2300" b="1">
               <a:solidFill>
@@ -5895,7 +5935,7 @@
           <a:noFill/>
         </p:spPr>
         <p:txBody>
-          <a:bodyPr wrap="square" lIns="0" tIns="0" rIns="0" bIns="0" anchor="t">
+          <a:bodyPr wrap="square" lIns="0" tIns="0" rIns="0" bIns="0">
             <a:spAutoFit/>
           </a:bodyPr>
           <a:lstStyle/>
@@ -5912,7 +5952,7 @@
                 </a:solidFill>
                 <a:latin typeface="Calibri" panose="020F0502020204030204"/>
               </a:rPr>
-              <a:t>Week 2 · why the features are built for the fault mechanism, and why a plain outlier rule is not enough</a:t>
+              <a:t>Week 3 · one anomalous test window (slip fault, last 8 of 50 steps, shaded) · three views on one shared time axis</a:t>
             </a:r>
             <a:endParaRPr sz="1300" b="0">
               <a:solidFill>
@@ -5969,14 +6009,83 @@
       </p:sp>
       <p:sp>
         <p:nvSpPr>
-          <p:cNvPr id="5" name="Rounded Rectangle 4"/>
+          <p:cNvPr id="5" name="TextBox 4"/>
+          <p:cNvSpPr txBox="1"/>
+          <p:nvPr/>
+        </p:nvSpPr>
+        <p:spPr>
+          <a:xfrm>
+            <a:off x="548640" y="6510528"/>
+            <a:ext cx="8229600" cy="274320"/>
+          </a:xfrm>
+          <a:prstGeom prst="rect">
+            <a:avLst/>
+          </a:prstGeom>
+          <a:noFill/>
+        </p:spPr>
+        <p:txBody>
+          <a:bodyPr wrap="square" lIns="0" tIns="0" rIns="0" bIns="0">
+            <a:spAutoFit/>
+          </a:bodyPr>
+          <a:lstStyle/>
+          <a:p>
+            <a:pPr algn="l">
+              <a:lnSpc>
+                <a:spcPct val="106000"/>
+              </a:lnSpc>
+            </a:pPr>
+            <a:r>
+              <a:rPr sz="900" b="0">
+                <a:solidFill>
+                  <a:srgbClr val="898781"/>
+                </a:solidFill>
+                <a:latin typeface="Calibri" panose="020F0502020204030204"/>
+              </a:rPr>
+              <a:t>InGen Dynamics · ML &amp; NN Analyst Internship — Mid-Point Review (W1–W4)</a:t>
+            </a:r>
+            <a:endParaRPr sz="900" b="0">
+              <a:solidFill>
+                <a:srgbClr val="898781"/>
+              </a:solidFill>
+              <a:latin typeface="Calibri" panose="020F0502020204030204"/>
+            </a:endParaRPr>
+          </a:p>
+        </p:txBody>
+      </p:sp>
+      <p:pic>
+        <p:nvPicPr>
+          <p:cNvPr id="7" name="Picture 6" descr="attention_vs_hidden_vs_crosschannel.png"/>
+          <p:cNvPicPr>
+            <a:picLocks noChangeAspect="1"/>
+          </p:cNvPicPr>
+          <p:nvPr/>
+        </p:nvPicPr>
+        <p:blipFill>
+          <a:blip r:embed="rId1"/>
+          <a:stretch>
+            <a:fillRect/>
+          </a:stretch>
+        </p:blipFill>
+        <p:spPr>
+          <a:xfrm>
+            <a:off x="548640" y="1353312"/>
+            <a:ext cx="11091672" cy="2957779"/>
+          </a:xfrm>
+          <a:prstGeom prst="rect">
+            <a:avLst/>
+          </a:prstGeom>
+        </p:spPr>
+      </p:pic>
+      <p:sp>
+        <p:nvSpPr>
+          <p:cNvPr id="8" name="Rounded Rectangle 7"/>
           <p:cNvSpPr/>
           <p:nvPr/>
         </p:nvSpPr>
         <p:spPr>
           <a:xfrm>
-            <a:off x="548640" y="1536192"/>
-            <a:ext cx="5504688" cy="1810512"/>
+            <a:off x="548640" y="4517136"/>
+            <a:ext cx="3630168" cy="1755648"/>
           </a:xfrm>
           <a:prstGeom prst="roundRect">
             <a:avLst>
@@ -6006,10 +6115,13 @@
           </a:fontRef>
         </p:style>
         <p:txBody>
-          <a:bodyPr wrap="square" lIns="128016" tIns="91440" rIns="128016" bIns="73152" rtlCol="0" anchor="t"/>
+          <a:bodyPr wrap="square" lIns="128016" tIns="91440" rIns="128016" bIns="91440" rtlCol="0" anchor="t"/>
           <a:lstStyle/>
           <a:p>
-            <a:pPr algn="ctr">
+            <a:pPr algn="just">
+              <a:lnSpc>
+                <a:spcPct val="100000"/>
+              </a:lnSpc>
               <a:spcAft>
                 <a:spcPts val="300"/>
               </a:spcAft>
@@ -6021,7 +6133,25 @@
                 </a:solidFill>
                 <a:latin typeface="Calibri" panose="020F0502020204030204"/>
               </a:rPr>
-              <a:t>Data &amp; cleaning</a:t>
+              <a:t>Attention — time</a:t>
+            </a:r>
+            <a:r>
+              <a:rPr lang="en-US" sz="1250" b="1">
+                <a:solidFill>
+                  <a:srgbClr val="1C5CAB"/>
+                </a:solidFill>
+                <a:latin typeface="Calibri" panose="020F0502020204030204"/>
+              </a:rPr>
+              <a:t> </a:t>
+            </a:r>
+            <a:r>
+              <a:rPr sz="1250" b="1">
+                <a:solidFill>
+                  <a:srgbClr val="1C5CAB"/>
+                </a:solidFill>
+                <a:latin typeface="Calibri" panose="020F0502020204030204"/>
+              </a:rPr>
+              <a:t>domain localisation</a:t>
             </a:r>
             <a:endParaRPr sz="1250" b="1">
               <a:solidFill>
@@ -6031,41 +6161,26 @@
             </a:endParaRPr>
           </a:p>
           <a:p>
-            <a:pPr>
+            <a:pPr algn="just">
               <a:lnSpc>
-                <a:spcPct val="108000"/>
+                <a:spcPct val="106000"/>
               </a:lnSpc>
+              <a:spcAft>
+                <a:spcPts val="0"/>
+              </a:spcAft>
             </a:pPr>
             <a:r>
               <a:rPr sz="1200" b="0">
                 <a:solidFill>
-                  <a:srgbClr val="1A1A1A"/>
-                </a:solidFill>
-                <a:latin typeface="Calibri" panose="020F0502020204030204"/>
-              </a:rPr>
-              <a:t>15,000 steps (25 min at 10 Hz), 9 sensor channels, 15% anomaly — a causal mechanical fault (slip + stuck), not an injected burst. 0.5% sensor missingness repaired by forward/backward-fill. Torque shows zero 3σ outliers — terrain already spreads it over a wide range</a:t>
-            </a:r>
-            <a:r>
-              <a:rPr lang="en-US" sz="1200" b="0">
-                <a:solidFill>
-                  <a:srgbClr val="1A1A1A"/>
-                </a:solidFill>
-                <a:latin typeface="Calibri" panose="020F0502020204030204"/>
-              </a:rPr>
-              <a:t>, </a:t>
-            </a:r>
-            <a:r>
-              <a:rPr sz="1200" b="0">
-                <a:solidFill>
-                  <a:srgbClr val="1A1A1A"/>
-                </a:solidFill>
-                <a:latin typeface="Calibri" panose="020F0502020204030204"/>
-              </a:rPr>
-              <a:t> so a plain outlier rule cannot separate faults from rough driving.</a:t>
+                  <a:srgbClr val="52514E"/>
+                </a:solidFill>
+                <a:latin typeface="Calibri" panose="020F0502020204030204"/>
+              </a:rPr>
+              <a:t>Near-zero for 4.2 s, then rising an order of magnitude inside the true fault span. Across all 267 eligible anomalous test windows: median fault/normal selectivity 5.3×, above 1 in 98%. All four final-layer heads key on the same span.</a:t>
             </a:r>
             <a:endParaRPr sz="1200" b="0">
               <a:solidFill>
-                <a:srgbClr val="1A1A1A"/>
+                <a:srgbClr val="52514E"/>
               </a:solidFill>
               <a:latin typeface="Calibri" panose="020F0502020204030204"/>
             </a:endParaRPr>
@@ -6074,14 +6189,14 @@
       </p:sp>
       <p:sp>
         <p:nvSpPr>
-          <p:cNvPr id="6" name="Rounded Rectangle 5"/>
+          <p:cNvPr id="9" name="Rounded Rectangle 8"/>
           <p:cNvSpPr/>
           <p:nvPr/>
         </p:nvSpPr>
         <p:spPr>
           <a:xfrm>
-            <a:off x="6135624" y="1536192"/>
-            <a:ext cx="5504688" cy="1810512"/>
+            <a:off x="4279392" y="4517136"/>
+            <a:ext cx="3630168" cy="1755648"/>
           </a:xfrm>
           <a:prstGeom prst="roundRect">
             <a:avLst>
@@ -6111,10 +6226,13 @@
           </a:fontRef>
         </p:style>
         <p:txBody>
-          <a:bodyPr wrap="square" lIns="128016" tIns="91440" rIns="128016" bIns="73152" rtlCol="0" anchor="t"/>
+          <a:bodyPr wrap="square" lIns="128016" tIns="91440" rIns="128016" bIns="91440" rtlCol="0" anchor="t"/>
           <a:lstStyle/>
           <a:p>
-            <a:pPr algn="ctr">
+            <a:pPr algn="just">
+              <a:lnSpc>
+                <a:spcPct val="100000"/>
+              </a:lnSpc>
               <a:spcAft>
                 <a:spcPts val="300"/>
               </a:spcAft>
@@ -6126,7 +6244,7 @@
                 </a:solidFill>
                 <a:latin typeface="Calibri" panose="020F0502020204030204"/>
               </a:rPr>
-              <a:t>Feature engineering</a:t>
+              <a:t>LSTM hidden state — a regime shift</a:t>
             </a:r>
             <a:endParaRPr sz="1250" b="1">
               <a:solidFill>
@@ -6136,23 +6254,26 @@
             </a:endParaRPr>
           </a:p>
           <a:p>
-            <a:pPr>
+            <a:pPr algn="just">
               <a:lnSpc>
-                <a:spcPct val="108000"/>
+                <a:spcPct val="106000"/>
               </a:lnSpc>
+              <a:spcAft>
+                <a:spcPts val="0"/>
+              </a:spcAft>
             </a:pPr>
             <a:r>
               <a:rPr sz="1200" b="0">
                 <a:solidFill>
-                  <a:srgbClr val="1A1A1A"/>
-                </a:solidFill>
-                <a:latin typeface="Calibri" panose="020F0502020204030204"/>
-              </a:rPr>
-              <a:t>FFT over a 50-step (5 s) window on the 4 torque channels + LiDAR captures the spectral fault signature (25 features). GPS enters as per-step deltas — absolute position is a memorised map shortcut, the delta is the transferable displacement signal. Two cross-channel physical features close the gap a per-channel view cannot: inter-wheel torque std (slip) and stall ratio (stuck). Matrix = 9 raw + 25 FFT + 6 physical = 40 features.</a:t>
+                  <a:srgbClr val="52514E"/>
+                </a:solidFill>
+                <a:latin typeface="Calibri" panose="020F0502020204030204"/>
+              </a:rPr>
+              <a:t>The norm saturates in normal operation and shifts regime once fault steps arrive, but the per-step change is barely more concentrated on fault steps (median ratio 1.15, &gt;1 in 57%). A causal state smears evidence forward — why the final-state readout is fragile mid-window.</a:t>
             </a:r>
             <a:endParaRPr sz="1200" b="0">
               <a:solidFill>
-                <a:srgbClr val="1A1A1A"/>
+                <a:srgbClr val="52514E"/>
               </a:solidFill>
               <a:latin typeface="Calibri" panose="020F0502020204030204"/>
             </a:endParaRPr>
@@ -6161,14 +6282,14 @@
       </p:sp>
       <p:sp>
         <p:nvSpPr>
-          <p:cNvPr id="7" name="Rounded Rectangle 6"/>
+          <p:cNvPr id="10" name="Rounded Rectangle 9"/>
           <p:cNvSpPr/>
           <p:nvPr/>
         </p:nvSpPr>
         <p:spPr>
           <a:xfrm>
-            <a:off x="548640" y="3712463"/>
-            <a:ext cx="5504688" cy="1810512"/>
+            <a:off x="8010144" y="4517136"/>
+            <a:ext cx="3630168" cy="1755648"/>
           </a:xfrm>
           <a:prstGeom prst="roundRect">
             <a:avLst>
@@ -6198,22 +6319,34 @@
           </a:fontRef>
         </p:style>
         <p:txBody>
-          <a:bodyPr wrap="square" lIns="128016" tIns="91440" rIns="128016" bIns="73152" rtlCol="0" anchor="t"/>
+          <a:bodyPr wrap="square" lIns="128016" tIns="91440" rIns="128016" bIns="91440" rtlCol="0" anchor="t"/>
           <a:lstStyle/>
           <a:p>
-            <a:pPr algn="ctr">
+            <a:pPr algn="just">
+              <a:lnSpc>
+                <a:spcPct val="100000"/>
+              </a:lnSpc>
               <a:spcAft>
                 <a:spcPts val="300"/>
               </a:spcAft>
             </a:pPr>
             <a:r>
+              <a:rPr lang="en-US" sz="1250" b="1">
+                <a:solidFill>
+                  <a:srgbClr val="1C5CAB"/>
+                </a:solidFill>
+                <a:latin typeface="Calibri" panose="020F0502020204030204"/>
+              </a:rPr>
+              <a:t>F</a:t>
+            </a:r>
+            <a:r>
               <a:rPr sz="1250" b="1">
                 <a:solidFill>
                   <a:srgbClr val="1C5CAB"/>
                 </a:solidFill>
                 <a:latin typeface="Calibri" panose="020F0502020204030204"/>
               </a:rPr>
-              <a:t>Dimensionality reduction (PCA)</a:t>
+              <a:t>eature — the reference for where</a:t>
             </a:r>
             <a:endParaRPr sz="1250" b="1">
               <a:solidFill>
@@ -6223,200 +6356,26 @@
             </a:endParaRPr>
           </a:p>
           <a:p>
-            <a:pPr>
-              <a:lnSpc>
-                <a:spcPct val="108000"/>
-              </a:lnSpc>
-            </a:pPr>
-            <a:r>
-              <a:rPr sz="1200" b="0">
-                <a:solidFill>
-                  <a:srgbClr val="1A1A1A"/>
-                </a:solidFill>
-                <a:latin typeface="Calibri" panose="020F0502020204030204"/>
-              </a:rPr>
-              <a:t>The 40 scaled features reduce to 19 components at 95.1% variance, fit on train only. PC1 is the torque spectral centroid — the shared terrain-torque driver behind both fault types; PC2 is the stall ratio, a directly interpretable axis for the stuck mechanism.</a:t>
-            </a:r>
-            <a:endParaRPr sz="1200" b="0">
-              <a:solidFill>
-                <a:srgbClr val="1A1A1A"/>
-              </a:solidFill>
-              <a:latin typeface="Calibri" panose="020F0502020204030204"/>
-            </a:endParaRPr>
-          </a:p>
-        </p:txBody>
-      </p:sp>
-      <p:sp>
-        <p:nvSpPr>
-          <p:cNvPr id="8" name="Rounded Rectangle 7"/>
-          <p:cNvSpPr/>
-          <p:nvPr/>
-        </p:nvSpPr>
-        <p:spPr>
-          <a:xfrm>
-            <a:off x="6135624" y="3712463"/>
-            <a:ext cx="5504688" cy="1810512"/>
-          </a:xfrm>
-          <a:prstGeom prst="roundRect">
-            <a:avLst>
-              <a:gd name="adj" fmla="val 4500"/>
-            </a:avLst>
-          </a:prstGeom>
-          <a:solidFill>
-            <a:srgbClr val="F2F5FA"/>
-          </a:solidFill>
-          <a:ln>
-            <a:noFill/>
-          </a:ln>
-          <a:effectLst/>
-        </p:spPr>
-        <p:style>
-          <a:lnRef idx="1">
-            <a:schemeClr val="accent1"/>
-          </a:lnRef>
-          <a:fillRef idx="3">
-            <a:schemeClr val="accent1"/>
-          </a:fillRef>
-          <a:effectRef idx="2">
-            <a:schemeClr val="accent1"/>
-          </a:effectRef>
-          <a:fontRef idx="minor">
-            <a:schemeClr val="lt1"/>
-          </a:fontRef>
-        </p:style>
-        <p:txBody>
-          <a:bodyPr wrap="square" lIns="128016" tIns="91440" rIns="128016" bIns="73152" rtlCol="0" anchor="t"/>
-          <a:lstStyle/>
-          <a:p>
-            <a:pPr algn="ctr">
-              <a:spcAft>
-                <a:spcPts val="300"/>
-              </a:spcAft>
-            </a:pPr>
-            <a:r>
-              <a:rPr sz="1250" b="1">
-                <a:solidFill>
-                  <a:srgbClr val="1C5CAB"/>
-                </a:solidFill>
-                <a:latin typeface="Calibri" panose="020F0502020204030204"/>
-              </a:rPr>
-              <a:t>Feature selection (RF)</a:t>
-            </a:r>
-            <a:endParaRPr sz="1250" b="1">
-              <a:solidFill>
-                <a:srgbClr val="1C5CAB"/>
-              </a:solidFill>
-              <a:latin typeface="Calibri" panose="020F0502020204030204"/>
-            </a:endParaRPr>
-          </a:p>
-          <a:p>
-            <a:pPr>
-              <a:lnSpc>
-                <a:spcPct val="108000"/>
-              </a:lnSpc>
-            </a:pPr>
-            <a:r>
-              <a:rPr sz="1200" b="0">
-                <a:solidFill>
-                  <a:srgbClr val="1A1A1A"/>
-                </a:solidFill>
-                <a:latin typeface="Calibri" panose="020F0502020204030204"/>
-              </a:rPr>
-              <a:t>Selection ranks on F1, not accuracy — with an 85% majority class, accuracy is blind to the minority. The F1 criterion keeps 5 components (val F1 0.828), slightly beating the full 19-set (0.812). Analysis only: the deployed RF keeps all 19 components.</a:t>
-            </a:r>
-            <a:endParaRPr sz="1200" b="0">
-              <a:solidFill>
-                <a:srgbClr val="1A1A1A"/>
-              </a:solidFill>
-              <a:latin typeface="Calibri" panose="020F0502020204030204"/>
-            </a:endParaRPr>
-          </a:p>
-        </p:txBody>
-      </p:sp>
-      <p:sp>
-        <p:nvSpPr>
-          <p:cNvPr id="9" name="TextBox 8"/>
-          <p:cNvSpPr txBox="1"/>
-          <p:nvPr/>
-        </p:nvSpPr>
-        <p:spPr>
-          <a:xfrm>
-            <a:off x="548640" y="6510528"/>
-            <a:ext cx="8229600" cy="274320"/>
-          </a:xfrm>
-          <a:prstGeom prst="rect">
-            <a:avLst/>
-          </a:prstGeom>
-          <a:noFill/>
-        </p:spPr>
-        <p:txBody>
-          <a:bodyPr wrap="square" lIns="0" tIns="0" rIns="0" bIns="0" anchor="t">
-            <a:spAutoFit/>
-          </a:bodyPr>
-          <a:lstStyle/>
-          <a:p>
-            <a:pPr algn="l">
+            <a:pPr algn="just">
               <a:lnSpc>
                 <a:spcPct val="106000"/>
               </a:lnSpc>
+              <a:spcAft>
+                <a:spcPts val="0"/>
+              </a:spcAft>
             </a:pPr>
             <a:r>
-              <a:rPr sz="900" b="0">
-                <a:solidFill>
-                  <a:srgbClr val="898781"/>
-                </a:solidFill>
-                <a:latin typeface="Calibri" panose="020F0502020204030204"/>
-              </a:rPr>
-              <a:t>InGen Dynamics · ML &amp; NN Analyst Internship — Mid-Point Review (W1–W4)</a:t>
-            </a:r>
-            <a:endParaRPr sz="900" b="0">
+              <a:rPr sz="1200" b="0">
+                <a:solidFill>
+                  <a:srgbClr val="52514E"/>
+                </a:solidFill>
+                <a:latin typeface="Calibri" panose="020F0502020204030204"/>
+              </a:rPr>
+              <a:t>inter_wheel_std steps 0.27 → 1.40 Nm (5.1×) at exactly the onset step, and it is one of the 11 input channels. Attention mass concentrates on the same steps — temporal co-location with the discriminative feature, not proof the model reads that channel.</a:t>
+            </a:r>
+            <a:endParaRPr sz="1200" b="0">
               <a:solidFill>
-                <a:srgbClr val="898781"/>
-              </a:solidFill>
-              <a:latin typeface="Calibri" panose="020F0502020204030204"/>
-            </a:endParaRPr>
-          </a:p>
-        </p:txBody>
-      </p:sp>
-      <p:sp>
-        <p:nvSpPr>
-          <p:cNvPr id="10" name="TextBox 9"/>
-          <p:cNvSpPr txBox="1"/>
-          <p:nvPr/>
-        </p:nvSpPr>
-        <p:spPr>
-          <a:xfrm>
-            <a:off x="10972800" y="6510528"/>
-            <a:ext cx="667512" cy="274320"/>
-          </a:xfrm>
-          <a:prstGeom prst="rect">
-            <a:avLst/>
-          </a:prstGeom>
-          <a:noFill/>
-        </p:spPr>
-        <p:txBody>
-          <a:bodyPr wrap="square" lIns="0" tIns="0" rIns="0" bIns="0" anchor="t">
-            <a:spAutoFit/>
-          </a:bodyPr>
-          <a:lstStyle/>
-          <a:p>
-            <a:pPr algn="r">
-              <a:lnSpc>
-                <a:spcPct val="106000"/>
-              </a:lnSpc>
-            </a:pPr>
-            <a:r>
-              <a:rPr sz="900" b="0">
-                <a:solidFill>
-                  <a:srgbClr val="898781"/>
-                </a:solidFill>
-                <a:latin typeface="Calibri" panose="020F0502020204030204"/>
-              </a:rPr>
-              <a:t>4 / 7</a:t>
-            </a:r>
-            <a:endParaRPr sz="900" b="0">
-              <a:solidFill>
-                <a:srgbClr val="898781"/>
+                <a:srgbClr val="52514E"/>
               </a:solidFill>
               <a:latin typeface="Calibri" panose="020F0502020204030204"/>
             </a:endParaRPr>
@@ -6458,7 +6417,7 @@
           <a:noFill/>
         </p:spPr>
         <p:txBody>
-          <a:bodyPr wrap="square" lIns="0" tIns="0" rIns="0" bIns="0" anchor="t">
+          <a:bodyPr wrap="square" lIns="0" tIns="0" rIns="0" bIns="0">
             <a:spAutoFit/>
           </a:bodyPr>
           <a:lstStyle/>
@@ -6475,7 +6434,7 @@
                 </a:solidFill>
                 <a:latin typeface="Calibri" panose="020F0502020204030204"/>
               </a:rPr>
-              <a:t>Attention localises the fault (5.3× selectivity) — it does not out-detect at equal capacity</a:t>
+              <a:t>Latency scales with window, but stays orders of magnitude under the gate</a:t>
             </a:r>
             <a:endParaRPr sz="2300" b="1">
               <a:solidFill>
@@ -6503,7 +6462,7 @@
           <a:noFill/>
         </p:spPr>
         <p:txBody>
-          <a:bodyPr wrap="square" lIns="0" tIns="0" rIns="0" bIns="0" anchor="t">
+          <a:bodyPr wrap="square" lIns="0" tIns="0" rIns="0" bIns="0">
             <a:spAutoFit/>
           </a:bodyPr>
           <a:lstStyle/>
@@ -6520,7 +6479,7 @@
                 </a:solidFill>
                 <a:latin typeface="Calibri" panose="020F0502020204030204"/>
               </a:rPr>
-              <a:t>What six models on identical data, seeds and protocol actually say about the task</a:t>
+              <a:t>Week 3 · single-sample CPU latency at w = 10 / 20 / 50 steps · 100 ms Aido Rover streaming gate</a:t>
             </a:r>
             <a:endParaRPr sz="1300" b="0">
               <a:solidFill>
@@ -6577,14 +6536,628 @@
       </p:sp>
       <p:sp>
         <p:nvSpPr>
-          <p:cNvPr id="5" name="Rounded Rectangle 4"/>
+          <p:cNvPr id="5" name="TextBox 4"/>
+          <p:cNvSpPr txBox="1"/>
+          <p:nvPr/>
+        </p:nvSpPr>
+        <p:spPr>
+          <a:xfrm>
+            <a:off x="548640" y="6510528"/>
+            <a:ext cx="8229600" cy="274320"/>
+          </a:xfrm>
+          <a:prstGeom prst="rect">
+            <a:avLst/>
+          </a:prstGeom>
+          <a:noFill/>
+        </p:spPr>
+        <p:txBody>
+          <a:bodyPr wrap="square" lIns="0" tIns="0" rIns="0" bIns="0">
+            <a:spAutoFit/>
+          </a:bodyPr>
+          <a:lstStyle/>
+          <a:p>
+            <a:pPr algn="l">
+              <a:lnSpc>
+                <a:spcPct val="106000"/>
+              </a:lnSpc>
+            </a:pPr>
+            <a:r>
+              <a:rPr sz="900" b="0">
+                <a:solidFill>
+                  <a:srgbClr val="898781"/>
+                </a:solidFill>
+                <a:latin typeface="Calibri" panose="020F0502020204030204"/>
+              </a:rPr>
+              <a:t>InGen Dynamics · ML &amp; NN Analyst Internship — Mid-Point Review (W1–W4)</a:t>
+            </a:r>
+            <a:endParaRPr sz="900" b="0">
+              <a:solidFill>
+                <a:srgbClr val="898781"/>
+              </a:solidFill>
+              <a:latin typeface="Calibri" panose="020F0502020204030204"/>
+            </a:endParaRPr>
+          </a:p>
+        </p:txBody>
+      </p:sp>
+      <p:pic>
+        <p:nvPicPr>
+          <p:cNvPr id="7" name="Picture 6" descr="latency_vs_window_deck.png"/>
+          <p:cNvPicPr>
+            <a:picLocks noChangeAspect="1"/>
+          </p:cNvPicPr>
+          <p:nvPr/>
+        </p:nvPicPr>
+        <p:blipFill>
+          <a:blip r:embed="rId1"/>
+          <a:stretch>
+            <a:fillRect/>
+          </a:stretch>
+        </p:blipFill>
+        <p:spPr>
+          <a:xfrm>
+            <a:off x="548640" y="1444752"/>
+            <a:ext cx="5212080" cy="4553712"/>
+          </a:xfrm>
+          <a:prstGeom prst="rect">
+            <a:avLst/>
+          </a:prstGeom>
+        </p:spPr>
+      </p:pic>
+      <p:graphicFrame>
+        <p:nvGraphicFramePr>
+          <p:cNvPr id="8" name="Table 7"/>
+          <p:cNvGraphicFramePr>
+            <a:graphicFrameLocks noGrp="1"/>
+          </p:cNvGraphicFramePr>
+          <p:nvPr/>
+        </p:nvGraphicFramePr>
+        <p:xfrm>
+          <a:off x="5897880" y="1481328"/>
+          <a:ext cx="5605272" cy="1234440"/>
+        </p:xfrm>
+        <a:graphic>
+          <a:graphicData uri="http://schemas.openxmlformats.org/drawingml/2006/table">
+            <a:tbl>
+              <a:tblPr>
+                <a:tableStyleId>{5C22544A-7EE6-4342-B048-85BDC9FD1C3A}</a:tableStyleId>
+              </a:tblPr>
+              <a:tblGrid>
+                <a:gridCol w="1572768"/>
+                <a:gridCol w="1344168"/>
+                <a:gridCol w="1344168"/>
+                <a:gridCol w="1344168"/>
+              </a:tblGrid>
+              <a:tr h="329184">
+                <a:tc>
+                  <a:txBody>
+                    <a:bodyPr wrap="square"/>
+                    <a:lstStyle/>
+                    <a:p>
+                      <a:pPr algn="l"/>
+                      <a:r>
+                        <a:rPr sz="1150" b="1">
+                          <a:solidFill>
+                            <a:srgbClr val="FFFFFF"/>
+                          </a:solidFill>
+                          <a:latin typeface="Calibri" panose="020F0502020204030204"/>
+                        </a:rPr>
+                        <a:t>Model</a:t>
+                      </a:r>
+                      <a:endParaRPr sz="1150" b="1">
+                        <a:solidFill>
+                          <a:srgbClr val="FFFFFF"/>
+                        </a:solidFill>
+                        <a:latin typeface="Calibri" panose="020F0502020204030204"/>
+                      </a:endParaRPr>
+                    </a:p>
+                  </a:txBody>
+                  <a:tcPr marL="73152" marR="73152" marT="0" marB="0" anchor="ctr">
+                    <a:solidFill>
+                      <a:srgbClr val="1C5CAB"/>
+                    </a:solidFill>
+                  </a:tcPr>
+                </a:tc>
+                <a:tc>
+                  <a:txBody>
+                    <a:bodyPr wrap="square"/>
+                    <a:lstStyle/>
+                    <a:p>
+                      <a:pPr algn="ctr"/>
+                      <a:r>
+                        <a:rPr sz="1150" b="1">
+                          <a:solidFill>
+                            <a:srgbClr val="FFFFFF"/>
+                          </a:solidFill>
+                          <a:latin typeface="Calibri" panose="020F0502020204030204"/>
+                        </a:rPr>
+                        <a:t>w = 10</a:t>
+                      </a:r>
+                      <a:endParaRPr sz="1150" b="1">
+                        <a:solidFill>
+                          <a:srgbClr val="FFFFFF"/>
+                        </a:solidFill>
+                        <a:latin typeface="Calibri" panose="020F0502020204030204"/>
+                      </a:endParaRPr>
+                    </a:p>
+                  </a:txBody>
+                  <a:tcPr marL="73152" marR="73152" marT="0" marB="0" anchor="ctr">
+                    <a:solidFill>
+                      <a:srgbClr val="1C5CAB"/>
+                    </a:solidFill>
+                  </a:tcPr>
+                </a:tc>
+                <a:tc>
+                  <a:txBody>
+                    <a:bodyPr wrap="square"/>
+                    <a:lstStyle/>
+                    <a:p>
+                      <a:pPr algn="ctr"/>
+                      <a:r>
+                        <a:rPr sz="1150" b="1">
+                          <a:solidFill>
+                            <a:srgbClr val="FFFFFF"/>
+                          </a:solidFill>
+                          <a:latin typeface="Calibri" panose="020F0502020204030204"/>
+                        </a:rPr>
+                        <a:t>w = 20</a:t>
+                      </a:r>
+                      <a:endParaRPr sz="1150" b="1">
+                        <a:solidFill>
+                          <a:srgbClr val="FFFFFF"/>
+                        </a:solidFill>
+                        <a:latin typeface="Calibri" panose="020F0502020204030204"/>
+                      </a:endParaRPr>
+                    </a:p>
+                  </a:txBody>
+                  <a:tcPr marL="73152" marR="73152" marT="0" marB="0" anchor="ctr">
+                    <a:solidFill>
+                      <a:srgbClr val="1C5CAB"/>
+                    </a:solidFill>
+                  </a:tcPr>
+                </a:tc>
+                <a:tc>
+                  <a:txBody>
+                    <a:bodyPr wrap="square"/>
+                    <a:lstStyle/>
+                    <a:p>
+                      <a:pPr algn="ctr"/>
+                      <a:r>
+                        <a:rPr sz="1150" b="1">
+                          <a:solidFill>
+                            <a:srgbClr val="FFFFFF"/>
+                          </a:solidFill>
+                          <a:latin typeface="Calibri" panose="020F0502020204030204"/>
+                        </a:rPr>
+                        <a:t>w = 50</a:t>
+                      </a:r>
+                      <a:endParaRPr sz="1150" b="1">
+                        <a:solidFill>
+                          <a:srgbClr val="FFFFFF"/>
+                        </a:solidFill>
+                        <a:latin typeface="Calibri" panose="020F0502020204030204"/>
+                      </a:endParaRPr>
+                    </a:p>
+                  </a:txBody>
+                  <a:tcPr marL="73152" marR="73152" marT="0" marB="0" anchor="ctr">
+                    <a:solidFill>
+                      <a:srgbClr val="1C5CAB"/>
+                    </a:solidFill>
+                  </a:tcPr>
+                </a:tc>
+              </a:tr>
+              <a:tr h="301752">
+                <a:tc>
+                  <a:txBody>
+                    <a:bodyPr wrap="square"/>
+                    <a:lstStyle/>
+                    <a:p>
+                      <a:pPr algn="l"/>
+                      <a:r>
+                        <a:rPr sz="1150" b="0">
+                          <a:solidFill>
+                            <a:srgbClr val="1A1A1A"/>
+                          </a:solidFill>
+                          <a:latin typeface="Calibri" panose="020F0502020204030204"/>
+                        </a:rPr>
+                        <a:t>LSTM</a:t>
+                      </a:r>
+                      <a:endParaRPr sz="1150" b="0">
+                        <a:solidFill>
+                          <a:srgbClr val="1A1A1A"/>
+                        </a:solidFill>
+                        <a:latin typeface="Calibri" panose="020F0502020204030204"/>
+                      </a:endParaRPr>
+                    </a:p>
+                  </a:txBody>
+                  <a:tcPr marL="73152" marR="73152" marT="0" marB="0" anchor="ctr">
+                    <a:solidFill>
+                      <a:srgbClr val="FFFFFF"/>
+                    </a:solidFill>
+                  </a:tcPr>
+                </a:tc>
+                <a:tc>
+                  <a:txBody>
+                    <a:bodyPr wrap="square"/>
+                    <a:lstStyle/>
+                    <a:p>
+                      <a:pPr algn="ctr"/>
+                      <a:r>
+                        <a:rPr sz="1150" b="0">
+                          <a:solidFill>
+                            <a:srgbClr val="1A1A1A"/>
+                          </a:solidFill>
+                          <a:latin typeface="Calibri" panose="020F0502020204030204"/>
+                        </a:rPr>
+                        <a:t>0.14 ms</a:t>
+                      </a:r>
+                      <a:endParaRPr sz="1150" b="0">
+                        <a:solidFill>
+                          <a:srgbClr val="1A1A1A"/>
+                        </a:solidFill>
+                        <a:latin typeface="Calibri" panose="020F0502020204030204"/>
+                      </a:endParaRPr>
+                    </a:p>
+                  </a:txBody>
+                  <a:tcPr marL="73152" marR="73152" marT="0" marB="0" anchor="ctr">
+                    <a:solidFill>
+                      <a:srgbClr val="FFFFFF"/>
+                    </a:solidFill>
+                  </a:tcPr>
+                </a:tc>
+                <a:tc>
+                  <a:txBody>
+                    <a:bodyPr wrap="square"/>
+                    <a:lstStyle/>
+                    <a:p>
+                      <a:pPr algn="ctr"/>
+                      <a:r>
+                        <a:rPr sz="1150" b="0">
+                          <a:solidFill>
+                            <a:srgbClr val="1A1A1A"/>
+                          </a:solidFill>
+                          <a:latin typeface="Calibri" panose="020F0502020204030204"/>
+                        </a:rPr>
+                        <a:t>0.16 ms</a:t>
+                      </a:r>
+                      <a:endParaRPr sz="1150" b="0">
+                        <a:solidFill>
+                          <a:srgbClr val="1A1A1A"/>
+                        </a:solidFill>
+                        <a:latin typeface="Calibri" panose="020F0502020204030204"/>
+                      </a:endParaRPr>
+                    </a:p>
+                  </a:txBody>
+                  <a:tcPr marL="73152" marR="73152" marT="0" marB="0" anchor="ctr">
+                    <a:solidFill>
+                      <a:srgbClr val="FFFFFF"/>
+                    </a:solidFill>
+                  </a:tcPr>
+                </a:tc>
+                <a:tc>
+                  <a:txBody>
+                    <a:bodyPr wrap="square"/>
+                    <a:lstStyle/>
+                    <a:p>
+                      <a:pPr algn="ctr"/>
+                      <a:r>
+                        <a:rPr sz="1150" b="0">
+                          <a:solidFill>
+                            <a:srgbClr val="1A1A1A"/>
+                          </a:solidFill>
+                          <a:latin typeface="Calibri" panose="020F0502020204030204"/>
+                        </a:rPr>
+                        <a:t>0.21 ms</a:t>
+                      </a:r>
+                      <a:endParaRPr sz="1150" b="0">
+                        <a:solidFill>
+                          <a:srgbClr val="1A1A1A"/>
+                        </a:solidFill>
+                        <a:latin typeface="Calibri" panose="020F0502020204030204"/>
+                      </a:endParaRPr>
+                    </a:p>
+                  </a:txBody>
+                  <a:tcPr marL="73152" marR="73152" marT="0" marB="0" anchor="ctr">
+                    <a:solidFill>
+                      <a:srgbClr val="FFFFFF"/>
+                    </a:solidFill>
+                  </a:tcPr>
+                </a:tc>
+              </a:tr>
+              <a:tr h="301752">
+                <a:tc>
+                  <a:txBody>
+                    <a:bodyPr wrap="square"/>
+                    <a:lstStyle/>
+                    <a:p>
+                      <a:pPr algn="l"/>
+                      <a:r>
+                        <a:rPr sz="1150" b="0">
+                          <a:solidFill>
+                            <a:srgbClr val="1A1A1A"/>
+                          </a:solidFill>
+                          <a:latin typeface="Calibri" panose="020F0502020204030204"/>
+                        </a:rPr>
+                        <a:t>GRU</a:t>
+                      </a:r>
+                      <a:endParaRPr sz="1150" b="0">
+                        <a:solidFill>
+                          <a:srgbClr val="1A1A1A"/>
+                        </a:solidFill>
+                        <a:latin typeface="Calibri" panose="020F0502020204030204"/>
+                      </a:endParaRPr>
+                    </a:p>
+                  </a:txBody>
+                  <a:tcPr marL="73152" marR="73152" marT="0" marB="0" anchor="ctr">
+                    <a:solidFill>
+                      <a:srgbClr val="F7F8FA"/>
+                    </a:solidFill>
+                  </a:tcPr>
+                </a:tc>
+                <a:tc>
+                  <a:txBody>
+                    <a:bodyPr wrap="square"/>
+                    <a:lstStyle/>
+                    <a:p>
+                      <a:pPr algn="ctr"/>
+                      <a:r>
+                        <a:rPr sz="1150" b="0">
+                          <a:solidFill>
+                            <a:srgbClr val="1A1A1A"/>
+                          </a:solidFill>
+                          <a:latin typeface="Calibri" panose="020F0502020204030204"/>
+                        </a:rPr>
+                        <a:t>0.17 ms</a:t>
+                      </a:r>
+                      <a:endParaRPr sz="1150" b="0">
+                        <a:solidFill>
+                          <a:srgbClr val="1A1A1A"/>
+                        </a:solidFill>
+                        <a:latin typeface="Calibri" panose="020F0502020204030204"/>
+                      </a:endParaRPr>
+                    </a:p>
+                  </a:txBody>
+                  <a:tcPr marL="73152" marR="73152" marT="0" marB="0" anchor="ctr">
+                    <a:solidFill>
+                      <a:srgbClr val="F7F8FA"/>
+                    </a:solidFill>
+                  </a:tcPr>
+                </a:tc>
+                <a:tc>
+                  <a:txBody>
+                    <a:bodyPr wrap="square"/>
+                    <a:lstStyle/>
+                    <a:p>
+                      <a:pPr algn="ctr"/>
+                      <a:r>
+                        <a:rPr sz="1150" b="0">
+                          <a:solidFill>
+                            <a:srgbClr val="1A1A1A"/>
+                          </a:solidFill>
+                          <a:latin typeface="Calibri" panose="020F0502020204030204"/>
+                        </a:rPr>
+                        <a:t>0.29 ms</a:t>
+                      </a:r>
+                      <a:endParaRPr sz="1150" b="0">
+                        <a:solidFill>
+                          <a:srgbClr val="1A1A1A"/>
+                        </a:solidFill>
+                        <a:latin typeface="Calibri" panose="020F0502020204030204"/>
+                      </a:endParaRPr>
+                    </a:p>
+                  </a:txBody>
+                  <a:tcPr marL="73152" marR="73152" marT="0" marB="0" anchor="ctr">
+                    <a:solidFill>
+                      <a:srgbClr val="F7F8FA"/>
+                    </a:solidFill>
+                  </a:tcPr>
+                </a:tc>
+                <a:tc>
+                  <a:txBody>
+                    <a:bodyPr wrap="square"/>
+                    <a:lstStyle/>
+                    <a:p>
+                      <a:pPr algn="ctr"/>
+                      <a:r>
+                        <a:rPr sz="1150" b="0">
+                          <a:solidFill>
+                            <a:srgbClr val="1A1A1A"/>
+                          </a:solidFill>
+                          <a:latin typeface="Calibri" panose="020F0502020204030204"/>
+                        </a:rPr>
+                        <a:t>0.64 ms</a:t>
+                      </a:r>
+                      <a:endParaRPr sz="1150" b="0">
+                        <a:solidFill>
+                          <a:srgbClr val="1A1A1A"/>
+                        </a:solidFill>
+                        <a:latin typeface="Calibri" panose="020F0502020204030204"/>
+                      </a:endParaRPr>
+                    </a:p>
+                  </a:txBody>
+                  <a:tcPr marL="73152" marR="73152" marT="0" marB="0" anchor="ctr">
+                    <a:solidFill>
+                      <a:srgbClr val="F7F8FA"/>
+                    </a:solidFill>
+                  </a:tcPr>
+                </a:tc>
+              </a:tr>
+              <a:tr h="301752">
+                <a:tc>
+                  <a:txBody>
+                    <a:bodyPr wrap="square"/>
+                    <a:lstStyle/>
+                    <a:p>
+                      <a:pPr algn="l"/>
+                      <a:r>
+                        <a:rPr sz="1150" b="0">
+                          <a:solidFill>
+                            <a:srgbClr val="1A1A1A"/>
+                          </a:solidFill>
+                          <a:latin typeface="Calibri" panose="020F0502020204030204"/>
+                        </a:rPr>
+                        <a:t>Transformer</a:t>
+                      </a:r>
+                      <a:endParaRPr sz="1150" b="0">
+                        <a:solidFill>
+                          <a:srgbClr val="1A1A1A"/>
+                        </a:solidFill>
+                        <a:latin typeface="Calibri" panose="020F0502020204030204"/>
+                      </a:endParaRPr>
+                    </a:p>
+                  </a:txBody>
+                  <a:tcPr marL="73152" marR="73152" marT="0" marB="0" anchor="ctr">
+                    <a:solidFill>
+                      <a:srgbClr val="FFFFFF"/>
+                    </a:solidFill>
+                  </a:tcPr>
+                </a:tc>
+                <a:tc>
+                  <a:txBody>
+                    <a:bodyPr wrap="square"/>
+                    <a:lstStyle/>
+                    <a:p>
+                      <a:pPr algn="ctr"/>
+                      <a:r>
+                        <a:rPr sz="1150" b="0">
+                          <a:solidFill>
+                            <a:srgbClr val="1A1A1A"/>
+                          </a:solidFill>
+                          <a:latin typeface="Calibri" panose="020F0502020204030204"/>
+                        </a:rPr>
+                        <a:t>0.61 ms</a:t>
+                      </a:r>
+                      <a:endParaRPr sz="1150" b="0">
+                        <a:solidFill>
+                          <a:srgbClr val="1A1A1A"/>
+                        </a:solidFill>
+                        <a:latin typeface="Calibri" panose="020F0502020204030204"/>
+                      </a:endParaRPr>
+                    </a:p>
+                  </a:txBody>
+                  <a:tcPr marL="73152" marR="73152" marT="0" marB="0" anchor="ctr">
+                    <a:solidFill>
+                      <a:srgbClr val="FFFFFF"/>
+                    </a:solidFill>
+                  </a:tcPr>
+                </a:tc>
+                <a:tc>
+                  <a:txBody>
+                    <a:bodyPr wrap="square"/>
+                    <a:lstStyle/>
+                    <a:p>
+                      <a:pPr algn="ctr"/>
+                      <a:r>
+                        <a:rPr sz="1150" b="0">
+                          <a:solidFill>
+                            <a:srgbClr val="1A1A1A"/>
+                          </a:solidFill>
+                          <a:latin typeface="Calibri" panose="020F0502020204030204"/>
+                        </a:rPr>
+                        <a:t>3.04 ms *</a:t>
+                      </a:r>
+                      <a:endParaRPr sz="1150" b="0">
+                        <a:solidFill>
+                          <a:srgbClr val="1A1A1A"/>
+                        </a:solidFill>
+                        <a:latin typeface="Calibri" panose="020F0502020204030204"/>
+                      </a:endParaRPr>
+                    </a:p>
+                  </a:txBody>
+                  <a:tcPr marL="73152" marR="73152" marT="0" marB="0" anchor="ctr">
+                    <a:solidFill>
+                      <a:srgbClr val="FFFFFF"/>
+                    </a:solidFill>
+                  </a:tcPr>
+                </a:tc>
+                <a:tc>
+                  <a:txBody>
+                    <a:bodyPr wrap="square"/>
+                    <a:lstStyle/>
+                    <a:p>
+                      <a:pPr algn="ctr"/>
+                      <a:r>
+                        <a:rPr sz="1150" b="0">
+                          <a:solidFill>
+                            <a:srgbClr val="1A1A1A"/>
+                          </a:solidFill>
+                          <a:latin typeface="Calibri" panose="020F0502020204030204"/>
+                        </a:rPr>
+                        <a:t>0.72 ms</a:t>
+                      </a:r>
+                      <a:endParaRPr sz="1150" b="0">
+                        <a:solidFill>
+                          <a:srgbClr val="1A1A1A"/>
+                        </a:solidFill>
+                        <a:latin typeface="Calibri" panose="020F0502020204030204"/>
+                      </a:endParaRPr>
+                    </a:p>
+                  </a:txBody>
+                  <a:tcPr marL="73152" marR="73152" marT="0" marB="0" anchor="ctr">
+                    <a:solidFill>
+                      <a:srgbClr val="FFFFFF"/>
+                    </a:solidFill>
+                  </a:tcPr>
+                </a:tc>
+              </a:tr>
+            </a:tbl>
+          </a:graphicData>
+        </a:graphic>
+      </p:graphicFrame>
+      <p:sp>
+        <p:nvSpPr>
+          <p:cNvPr id="9" name="TextBox 8"/>
+          <p:cNvSpPr txBox="1"/>
+          <p:nvPr/>
+        </p:nvSpPr>
+        <p:spPr>
+          <a:xfrm>
+            <a:off x="5897880" y="2770632"/>
+            <a:ext cx="5605272" cy="228600"/>
+          </a:xfrm>
+          <a:prstGeom prst="rect">
+            <a:avLst/>
+          </a:prstGeom>
+          <a:noFill/>
+        </p:spPr>
+        <p:txBody>
+          <a:bodyPr wrap="square" lIns="0" tIns="0" rIns="0" bIns="0">
+            <a:spAutoFit/>
+          </a:bodyPr>
+          <a:lstStyle/>
+          <a:p>
+            <a:pPr algn="l">
+              <a:lnSpc>
+                <a:spcPct val="106000"/>
+              </a:lnSpc>
+            </a:pPr>
+            <a:r>
+              <a:rPr sz="1100" b="0">
+                <a:solidFill>
+                  <a:srgbClr val="898781"/>
+                </a:solidFill>
+                <a:latin typeface="Calibri" panose="020F0502020204030204"/>
+              </a:rPr>
+              <a:t>* re-measured at 0.26 ms in a repeat run — single-session means, order of magnitude only.</a:t>
+            </a:r>
+            <a:endParaRPr sz="1100" b="0">
+              <a:solidFill>
+                <a:srgbClr val="898781"/>
+              </a:solidFill>
+              <a:latin typeface="Calibri" panose="020F0502020204030204"/>
+            </a:endParaRPr>
+          </a:p>
+        </p:txBody>
+      </p:sp>
+      <p:sp>
+        <p:nvSpPr>
+          <p:cNvPr id="10" name="Rounded Rectangle 9"/>
           <p:cNvSpPr/>
           <p:nvPr/>
         </p:nvSpPr>
         <p:spPr>
           <a:xfrm>
-            <a:off x="548640" y="1828800"/>
-            <a:ext cx="5504688" cy="1664208"/>
+            <a:off x="5897880" y="3127248"/>
+            <a:ext cx="5605272" cy="1572768"/>
           </a:xfrm>
           <a:prstGeom prst="roundRect">
             <a:avLst>
@@ -6614,10 +7187,13 @@
           </a:fontRef>
         </p:style>
         <p:txBody>
-          <a:bodyPr wrap="square" lIns="128016" tIns="91440" rIns="128016" bIns="73152" rtlCol="0" anchor="t"/>
+          <a:bodyPr wrap="square" lIns="128016" tIns="91440" rIns="128016" bIns="91440" rtlCol="0" anchor="t"/>
           <a:lstStyle/>
           <a:p>
-            <a:pPr algn="ctr">
+            <a:pPr algn="just">
+              <a:lnSpc>
+                <a:spcPct val="100000"/>
+              </a:lnSpc>
               <a:spcAft>
                 <a:spcPts val="300"/>
               </a:spcAft>
@@ -6629,7 +7205,7 @@
                 </a:solidFill>
                 <a:latin typeface="Calibri" panose="020F0502020204030204"/>
               </a:rPr>
-              <a:t>Capacity, not architecture, sets the ledger's top line</a:t>
+              <a:t>Scaling is real, but overhead-dominated at these windows</a:t>
             </a:r>
             <a:endParaRPr sz="1250" b="1">
               <a:solidFill>
@@ -6639,23 +7215,26 @@
             </a:endParaRPr>
           </a:p>
           <a:p>
-            <a:pPr>
+            <a:pPr algn="just">
               <a:lnSpc>
-                <a:spcPct val="108000"/>
+                <a:spcPct val="106000"/>
               </a:lnSpc>
+              <a:spcAft>
+                <a:spcPts val="0"/>
+              </a:spcAft>
             </a:pPr>
             <a:r>
               <a:rPr sz="1200" b="0">
                 <a:solidFill>
-                  <a:srgbClr val="1A1A1A"/>
-                </a:solidFill>
-                <a:latin typeface="Calibri" panose="020F0502020204030204"/>
-              </a:rPr>
-              <a:t>Param-matched Transformer-S (d_model 32): F1 0.829 → 0.760, statistically indistinguishable from the GRU (p = 0.76). MLP, GRU, RF and Transformer-S form one near-tie; only the 67.8K-parameter Transformer pokes above it, at 4.5× the MLP's weights.</a:t>
+                  <a:srgbClr val="52514E"/>
+                </a:solidFill>
+                <a:latin typeface="Calibri" panose="020F0502020204030204"/>
+              </a:rPr>
+              <a:t>RNNs are O(w), attention O(w²) — but neither surfaces at w ≤ 50: a 5× window costs the Transformer only 1.3×. These readings are fixed per-inference overhead, not scaling. The crossover to 100 ms can't be pinned from three noisy points, and needn't be — the operating point sits 140–480× under the gate.</a:t>
             </a:r>
             <a:endParaRPr sz="1200" b="0">
               <a:solidFill>
-                <a:srgbClr val="1A1A1A"/>
+                <a:srgbClr val="52514E"/>
               </a:solidFill>
               <a:latin typeface="Calibri" panose="020F0502020204030204"/>
             </a:endParaRPr>
@@ -6664,14 +7243,14 @@
       </p:sp>
       <p:sp>
         <p:nvSpPr>
-          <p:cNvPr id="6" name="Rounded Rectangle 5"/>
+          <p:cNvPr id="11" name="Rounded Rectangle 10"/>
           <p:cNvSpPr/>
           <p:nvPr/>
         </p:nvSpPr>
         <p:spPr>
           <a:xfrm>
-            <a:off x="6135624" y="1828800"/>
-            <a:ext cx="5504688" cy="1664208"/>
+            <a:off x="5897880" y="4809744"/>
+            <a:ext cx="5605272" cy="1463040"/>
           </a:xfrm>
           <a:prstGeom prst="roundRect">
             <a:avLst>
@@ -6701,22 +7280,34 @@
           </a:fontRef>
         </p:style>
         <p:txBody>
-          <a:bodyPr wrap="square" lIns="128016" tIns="91440" rIns="128016" bIns="73152" rtlCol="0" anchor="t"/>
+          <a:bodyPr wrap="square" lIns="128016" tIns="91440" rIns="128016" bIns="91440" rtlCol="0" anchor="t"/>
           <a:lstStyle/>
           <a:p>
-            <a:pPr algn="ctr">
+            <a:pPr algn="just">
+              <a:lnSpc>
+                <a:spcPct val="100000"/>
+              </a:lnSpc>
               <a:spcAft>
                 <a:spcPts val="300"/>
               </a:spcAft>
             </a:pPr>
             <a:r>
+              <a:rPr lang="en-US" sz="1250" b="1">
+                <a:solidFill>
+                  <a:srgbClr val="1C5CAB"/>
+                </a:solidFill>
+                <a:latin typeface="Calibri" panose="020F0502020204030204"/>
+              </a:rPr>
+              <a:t>N</a:t>
+            </a:r>
+            <a:r>
               <a:rPr sz="1250" b="1">
                 <a:solidFill>
                   <a:srgbClr val="1C5CAB"/>
                 </a:solidFill>
                 <a:latin typeface="Calibri" panose="020F0502020204030204"/>
               </a:rPr>
-              <a:t>Localisation is the Transformer's real differentiator</a:t>
+              <a:t>o latency–window tradeoff to make here</a:t>
             </a:r>
             <a:endParaRPr sz="1250" b="1">
               <a:solidFill>
@@ -6726,287 +7317,26 @@
             </a:endParaRPr>
           </a:p>
           <a:p>
-            <a:pPr>
+            <a:pPr algn="just">
               <a:lnSpc>
-                <a:spcPct val="108000"/>
+                <a:spcPct val="100000"/>
               </a:lnSpc>
-            </a:pPr>
-            <a:r>
-              <a:rPr sz="1200" b="0">
-                <a:solidFill>
-                  <a:srgbClr val="1A1A1A"/>
-                </a:solidFill>
-                <a:latin typeface="Calibri" panose="020F0502020204030204"/>
-              </a:rPr>
-              <a:t>Attention mass lands on the true fault span in 98% of eligible anomalous windows — median selectivity 5.3× vs the LSTM hidden state's 1.15×. Genuine fault localisation for pointing an operator at where the fault is; an interpretability asset, not detection accuracy.</a:t>
-            </a:r>
-            <a:endParaRPr sz="1200" b="0">
-              <a:solidFill>
-                <a:srgbClr val="1A1A1A"/>
-              </a:solidFill>
-              <a:latin typeface="Calibri" panose="020F0502020204030204"/>
-            </a:endParaRPr>
-          </a:p>
-        </p:txBody>
-      </p:sp>
-      <p:sp>
-        <p:nvSpPr>
-          <p:cNvPr id="7" name="Rounded Rectangle 6"/>
-          <p:cNvSpPr/>
-          <p:nvPr/>
-        </p:nvSpPr>
-        <p:spPr>
-          <a:xfrm>
-            <a:off x="548640" y="3858768"/>
-            <a:ext cx="5504688" cy="1664208"/>
-          </a:xfrm>
-          <a:prstGeom prst="roundRect">
-            <a:avLst>
-              <a:gd name="adj" fmla="val 4500"/>
-            </a:avLst>
-          </a:prstGeom>
-          <a:solidFill>
-            <a:srgbClr val="F2F5FA"/>
-          </a:solidFill>
-          <a:ln>
-            <a:noFill/>
-          </a:ln>
-          <a:effectLst/>
-        </p:spPr>
-        <p:style>
-          <a:lnRef idx="1">
-            <a:schemeClr val="accent1"/>
-          </a:lnRef>
-          <a:fillRef idx="3">
-            <a:schemeClr val="accent1"/>
-          </a:fillRef>
-          <a:effectRef idx="2">
-            <a:schemeClr val="accent1"/>
-          </a:effectRef>
-          <a:fontRef idx="minor">
-            <a:schemeClr val="lt1"/>
-          </a:fontRef>
-        </p:style>
-        <p:txBody>
-          <a:bodyPr wrap="square" lIns="128016" tIns="91440" rIns="128016" bIns="73152" rtlCol="0" anchor="t"/>
-          <a:lstStyle/>
-          <a:p>
-            <a:pPr algn="ctr">
               <a:spcAft>
                 <a:spcPts val="300"/>
               </a:spcAft>
             </a:pPr>
             <a:r>
-              <a:rPr sz="1250" b="1">
-                <a:solidFill>
-                  <a:srgbClr val="1C5CAB"/>
-                </a:solidFill>
-                <a:latin typeface="Calibri" panose="020F0502020204030204"/>
-              </a:rPr>
-              <a:t>Where the residual misses live</a:t>
-            </a:r>
-            <a:endParaRPr sz="1250" b="1">
-              <a:solidFill>
-                <a:srgbClr val="1C5CAB"/>
-              </a:solidFill>
-              <a:latin typeface="Calibri" panose="020F0502020204030204"/>
-            </a:endParaRPr>
-          </a:p>
-          <a:p>
-            <a:pPr>
-              <a:lnSpc>
-                <a:spcPct val="108000"/>
-              </a:lnSpc>
-            </a:pPr>
-            <a:r>
               <a:rPr sz="1200" b="0">
                 <a:solidFill>
-                  <a:srgbClr val="1A1A1A"/>
-                </a:solidFill>
-                <a:latin typeface="Calibri" panose="020F0502020204030204"/>
-              </a:rPr>
-              <a:t>False negatives concentrate in stuck-type faults: all four wheel torques rise together with no cross-wheel asymmetry, so steady-state stuck reads as heavy terrain. Slip-type faults are caught reliably via the engineered cross-channel features.</a:t>
+                  <a:srgbClr val="52514E"/>
+                </a:solidFill>
+                <a:latin typeface="Calibri" panose="020F0502020204030204"/>
+              </a:rPr>
+              <a:t>w = 50 (5 s) follows the 3.1 s mean fault duration, not the compute budget. Detection does fall off past 25 in-window fault steps, but that band is dominated by stuck-type runs — a fault-type composition effect, not evidence against longer context, which stays on the Phase-D candidate list. The O(w²) concern is real in general; at this platform's sampling rate and fault scale it never activates.</a:t>
             </a:r>
             <a:endParaRPr sz="1200" b="0">
               <a:solidFill>
-                <a:srgbClr val="1A1A1A"/>
-              </a:solidFill>
-              <a:latin typeface="Calibri" panose="020F0502020204030204"/>
-            </a:endParaRPr>
-          </a:p>
-        </p:txBody>
-      </p:sp>
-      <p:sp>
-        <p:nvSpPr>
-          <p:cNvPr id="8" name="Rounded Rectangle 7"/>
-          <p:cNvSpPr/>
-          <p:nvPr/>
-        </p:nvSpPr>
-        <p:spPr>
-          <a:xfrm>
-            <a:off x="6135624" y="3858768"/>
-            <a:ext cx="5504688" cy="1664208"/>
-          </a:xfrm>
-          <a:prstGeom prst="roundRect">
-            <a:avLst>
-              <a:gd name="adj" fmla="val 4500"/>
-            </a:avLst>
-          </a:prstGeom>
-          <a:solidFill>
-            <a:srgbClr val="F2F5FA"/>
-          </a:solidFill>
-          <a:ln>
-            <a:noFill/>
-          </a:ln>
-          <a:effectLst/>
-        </p:spPr>
-        <p:style>
-          <a:lnRef idx="1">
-            <a:schemeClr val="accent1"/>
-          </a:lnRef>
-          <a:fillRef idx="3">
-            <a:schemeClr val="accent1"/>
-          </a:fillRef>
-          <a:effectRef idx="2">
-            <a:schemeClr val="accent1"/>
-          </a:effectRef>
-          <a:fontRef idx="minor">
-            <a:schemeClr val="lt1"/>
-          </a:fontRef>
-        </p:style>
-        <p:txBody>
-          <a:bodyPr wrap="square" lIns="128016" tIns="91440" rIns="128016" bIns="73152" rtlCol="0" anchor="t"/>
-          <a:lstStyle/>
-          <a:p>
-            <a:pPr algn="ctr">
-              <a:spcAft>
-                <a:spcPts val="300"/>
-              </a:spcAft>
-            </a:pPr>
-            <a:r>
-              <a:rPr sz="1250" b="1">
-                <a:solidFill>
-                  <a:srgbClr val="1C5CAB"/>
-                </a:solidFill>
-                <a:latin typeface="Calibri" panose="020F0502020204030204"/>
-              </a:rPr>
-              <a:t>Stability, not ranking, is what breaks across folds</a:t>
-            </a:r>
-            <a:endParaRPr sz="1250" b="1">
-              <a:solidFill>
-                <a:srgbClr val="1C5CAB"/>
-              </a:solidFill>
-              <a:latin typeface="Calibri" panose="020F0502020204030204"/>
-            </a:endParaRPr>
-          </a:p>
-          <a:p>
-            <a:pPr>
-              <a:lnSpc>
-                <a:spcPct val="108000"/>
-              </a:lnSpc>
-            </a:pPr>
-            <a:r>
-              <a:rPr sz="1200" b="0">
-                <a:solidFill>
-                  <a:srgbClr val="1A1A1A"/>
-                </a:solidFill>
-                <a:latin typeface="Calibri" panose="020F0502020204030204"/>
-              </a:rPr>
-              <a:t>LSTM is the least fold-stable model in the ledger (±0.16 F1): one fold's val-tuned threshold collapses its F1 to 0.39 while AUC stays 0.97 on the same fold — threshold calibration, not discrimination, is the fragile part.</a:t>
-            </a:r>
-            <a:endParaRPr sz="1200" b="0">
-              <a:solidFill>
-                <a:srgbClr val="1A1A1A"/>
-              </a:solidFill>
-              <a:latin typeface="Calibri" panose="020F0502020204030204"/>
-            </a:endParaRPr>
-          </a:p>
-        </p:txBody>
-      </p:sp>
-      <p:sp>
-        <p:nvSpPr>
-          <p:cNvPr id="9" name="TextBox 8"/>
-          <p:cNvSpPr txBox="1"/>
-          <p:nvPr/>
-        </p:nvSpPr>
-        <p:spPr>
-          <a:xfrm>
-            <a:off x="548640" y="6510528"/>
-            <a:ext cx="8229600" cy="274320"/>
-          </a:xfrm>
-          <a:prstGeom prst="rect">
-            <a:avLst/>
-          </a:prstGeom>
-          <a:noFill/>
-        </p:spPr>
-        <p:txBody>
-          <a:bodyPr wrap="square" lIns="0" tIns="0" rIns="0" bIns="0" anchor="t">
-            <a:spAutoFit/>
-          </a:bodyPr>
-          <a:lstStyle/>
-          <a:p>
-            <a:pPr algn="l">
-              <a:lnSpc>
-                <a:spcPct val="106000"/>
-              </a:lnSpc>
-            </a:pPr>
-            <a:r>
-              <a:rPr sz="900" b="0">
-                <a:solidFill>
-                  <a:srgbClr val="898781"/>
-                </a:solidFill>
-                <a:latin typeface="Calibri" panose="020F0502020204030204"/>
-              </a:rPr>
-              <a:t>InGen Dynamics · ML &amp; NN Analyst Internship — Mid-Point Review (W1–W4)</a:t>
-            </a:r>
-            <a:endParaRPr sz="900" b="0">
-              <a:solidFill>
-                <a:srgbClr val="898781"/>
-              </a:solidFill>
-              <a:latin typeface="Calibri" panose="020F0502020204030204"/>
-            </a:endParaRPr>
-          </a:p>
-        </p:txBody>
-      </p:sp>
-      <p:sp>
-        <p:nvSpPr>
-          <p:cNvPr id="10" name="TextBox 9"/>
-          <p:cNvSpPr txBox="1"/>
-          <p:nvPr/>
-        </p:nvSpPr>
-        <p:spPr>
-          <a:xfrm>
-            <a:off x="10972800" y="6510528"/>
-            <a:ext cx="667512" cy="274320"/>
-          </a:xfrm>
-          <a:prstGeom prst="rect">
-            <a:avLst/>
-          </a:prstGeom>
-          <a:noFill/>
-        </p:spPr>
-        <p:txBody>
-          <a:bodyPr wrap="square" lIns="0" tIns="0" rIns="0" bIns="0" anchor="t">
-            <a:spAutoFit/>
-          </a:bodyPr>
-          <a:lstStyle/>
-          <a:p>
-            <a:pPr algn="r">
-              <a:lnSpc>
-                <a:spcPct val="106000"/>
-              </a:lnSpc>
-            </a:pPr>
-            <a:r>
-              <a:rPr sz="900" b="0">
-                <a:solidFill>
-                  <a:srgbClr val="898781"/>
-                </a:solidFill>
-                <a:latin typeface="Calibri" panose="020F0502020204030204"/>
-              </a:rPr>
-              <a:t>5 / 7</a:t>
-            </a:r>
-            <a:endParaRPr sz="900" b="0">
-              <a:solidFill>
-                <a:srgbClr val="898781"/>
+                <a:srgbClr val="52514E"/>
               </a:solidFill>
               <a:latin typeface="Calibri" panose="020F0502020204030204"/>
             </a:endParaRPr>
@@ -7040,7 +7370,7 @@
         <p:spPr>
           <a:xfrm>
             <a:off x="548640" y="292608"/>
-            <a:ext cx="11091672" cy="566928"/>
+            <a:ext cx="11091672" cy="374650"/>
           </a:xfrm>
           <a:prstGeom prst="rect">
             <a:avLst/>
@@ -7048,7 +7378,7 @@
           <a:noFill/>
         </p:spPr>
         <p:txBody>
-          <a:bodyPr wrap="square" lIns="0" tIns="0" rIns="0" bIns="0" anchor="t">
+          <a:bodyPr wrap="square" lIns="0" tIns="0" rIns="0" bIns="0">
             <a:spAutoFit/>
           </a:bodyPr>
           <a:lstStyle/>
@@ -7065,7 +7395,7 @@
                 </a:solidFill>
                 <a:latin typeface="Calibri" panose="020F0502020204030204"/>
               </a:rPr>
-              <a:t>Trajectory — LSTM is best at every horizon: 1.44 cm mean, 2.18 cm at waypoint 5, 0.34 ms</a:t>
+              <a:t>Trajectory error — LSTM best far, Linear best near</a:t>
             </a:r>
             <a:endParaRPr sz="2300" b="1">
               <a:solidFill>
@@ -7093,7 +7423,7 @@
           <a:noFill/>
         </p:spPr>
         <p:txBody>
-          <a:bodyPr wrap="square" lIns="0" tIns="0" rIns="0" bIns="0" anchor="t">
+          <a:bodyPr wrap="square" lIns="0" tIns="0" rIns="0" bIns="0">
             <a:spAutoFit/>
           </a:bodyPr>
           <a:lstStyle/>
@@ -7110,7 +7440,7 @@
                 </a:solidFill>
                 <a:latin typeface="Calibri" panose="020F0502020204030204"/>
               </a:rPr>
-              <a:t>Aido Humanoid · 10 steps of state → next 5 waypoints · 5,000 synthetic episodes · 5 seeds · 50 ms planning gate</a:t>
+              <a:t>Aido Humanoid · 10 steps of state → next 5 waypoints, 0.1 s apart · 5,000 synthetic episodes · 5 seeds · 50 ms planning gate</a:t>
             </a:r>
             <a:endParaRPr sz="1300" b="0">
               <a:solidFill>
@@ -7165,9 +7495,54 @@
           </a:p>
         </p:txBody>
       </p:sp>
+      <p:sp>
+        <p:nvSpPr>
+          <p:cNvPr id="5" name="TextBox 4"/>
+          <p:cNvSpPr txBox="1"/>
+          <p:nvPr/>
+        </p:nvSpPr>
+        <p:spPr>
+          <a:xfrm>
+            <a:off x="548640" y="6510528"/>
+            <a:ext cx="8229600" cy="274320"/>
+          </a:xfrm>
+          <a:prstGeom prst="rect">
+            <a:avLst/>
+          </a:prstGeom>
+          <a:noFill/>
+        </p:spPr>
+        <p:txBody>
+          <a:bodyPr wrap="square" lIns="0" tIns="0" rIns="0" bIns="0">
+            <a:spAutoFit/>
+          </a:bodyPr>
+          <a:lstStyle/>
+          <a:p>
+            <a:pPr algn="l">
+              <a:lnSpc>
+                <a:spcPct val="106000"/>
+              </a:lnSpc>
+            </a:pPr>
+            <a:r>
+              <a:rPr sz="900" b="0">
+                <a:solidFill>
+                  <a:srgbClr val="898781"/>
+                </a:solidFill>
+                <a:latin typeface="Calibri" panose="020F0502020204030204"/>
+              </a:rPr>
+              <a:t>InGen Dynamics · ML &amp; NN Analyst Internship — Mid-Point Review (W1–W4)</a:t>
+            </a:r>
+            <a:endParaRPr sz="900" b="0">
+              <a:solidFill>
+                <a:srgbClr val="898781"/>
+              </a:solidFill>
+              <a:latin typeface="Calibri" panose="020F0502020204030204"/>
+            </a:endParaRPr>
+          </a:p>
+        </p:txBody>
+      </p:sp>
       <p:graphicFrame>
         <p:nvGraphicFramePr>
-          <p:cNvPr id="5" name="Table 4"/>
+          <p:cNvPr id="7" name="Table 6"/>
           <p:cNvGraphicFramePr>
             <a:graphicFrameLocks noGrp="1"/>
           </p:cNvGraphicFramePr>
@@ -7184,16 +7559,17 @@
                 <a:tableStyleId>{5C22544A-7EE6-4342-B048-85BDC9FD1C3A}</a:tableStyleId>
               </a:tblPr>
               <a:tblGrid>
-                <a:gridCol w="1554480"/>
-                <a:gridCol w="1600200"/>
-                <a:gridCol w="868680"/>
+                <a:gridCol w="1481328"/>
+                <a:gridCol w="731520"/>
+                <a:gridCol w="731520"/>
+                <a:gridCol w="731520"/>
+                <a:gridCol w="1124712"/>
                 <a:gridCol w="822960"/>
-                <a:gridCol w="777240"/>
               </a:tblGrid>
               <a:tr h="329184">
                 <a:tc>
                   <a:txBody>
-                    <a:bodyPr wrap="none"/>
+                    <a:bodyPr wrap="square"/>
                     <a:lstStyle/>
                     <a:p>
                       <a:pPr algn="l"/>
@@ -7214,7 +7590,7 @@
                       </a:endParaRPr>
                     </a:p>
                   </a:txBody>
-                  <a:tcPr marL="73152" marR="54864" marT="18288" marB="18288" anchor="ctr">
+                  <a:tcPr marL="73152" marR="73152" marT="0" marB="0" anchor="ctr">
                     <a:solidFill>
                       <a:srgbClr val="1C5CAB"/>
                     </a:solidFill>
@@ -7222,7 +7598,7 @@
                 </a:tc>
                 <a:tc>
                   <a:txBody>
-                    <a:bodyPr wrap="none"/>
+                    <a:bodyPr wrap="square"/>
                     <a:lstStyle/>
                     <a:p>
                       <a:pPr algn="ctr"/>
@@ -7233,7 +7609,7 @@
                           </a:solidFill>
                           <a:latin typeface="Calibri" panose="020F0502020204030204"/>
                         </a:rPr>
-                        <a:t>Mean Euclid (cm)</a:t>
+                        <a:t>h1</a:t>
                       </a:r>
                       <a:endParaRPr sz="1150" b="1">
                         <a:solidFill>
@@ -7243,7 +7619,7 @@
                       </a:endParaRPr>
                     </a:p>
                   </a:txBody>
-                  <a:tcPr marL="73152" marR="54864" marT="18288" marB="18288" anchor="ctr">
+                  <a:tcPr marL="73152" marR="73152" marT="0" marB="0" anchor="ctr">
                     <a:solidFill>
                       <a:srgbClr val="1C5CAB"/>
                     </a:solidFill>
@@ -7251,7 +7627,7 @@
                 </a:tc>
                 <a:tc>
                   <a:txBody>
-                    <a:bodyPr wrap="none"/>
+                    <a:bodyPr wrap="square"/>
                     <a:lstStyle/>
                     <a:p>
                       <a:pPr algn="ctr"/>
@@ -7262,7 +7638,7 @@
                           </a:solidFill>
                           <a:latin typeface="Calibri" panose="020F0502020204030204"/>
                         </a:rPr>
-                        <a:t>h5 (cm)</a:t>
+                        <a:t>h3</a:t>
                       </a:r>
                       <a:endParaRPr sz="1150" b="1">
                         <a:solidFill>
@@ -7272,7 +7648,7 @@
                       </a:endParaRPr>
                     </a:p>
                   </a:txBody>
-                  <a:tcPr marL="73152" marR="54864" marT="18288" marB="18288" anchor="ctr">
+                  <a:tcPr marL="73152" marR="73152" marT="0" marB="0" anchor="ctr">
                     <a:solidFill>
                       <a:srgbClr val="1C5CAB"/>
                     </a:solidFill>
@@ -7280,7 +7656,65 @@
                 </a:tc>
                 <a:tc>
                   <a:txBody>
-                    <a:bodyPr wrap="none"/>
+                    <a:bodyPr wrap="square"/>
+                    <a:lstStyle/>
+                    <a:p>
+                      <a:pPr algn="ctr"/>
+                      <a:r>
+                        <a:rPr sz="1150" b="1">
+                          <a:solidFill>
+                            <a:srgbClr val="FFFFFF"/>
+                          </a:solidFill>
+                          <a:latin typeface="Calibri" panose="020F0502020204030204"/>
+                        </a:rPr>
+                        <a:t>h5</a:t>
+                      </a:r>
+                      <a:endParaRPr sz="1150" b="1">
+                        <a:solidFill>
+                          <a:srgbClr val="FFFFFF"/>
+                        </a:solidFill>
+                        <a:latin typeface="Calibri" panose="020F0502020204030204"/>
+                      </a:endParaRPr>
+                    </a:p>
+                  </a:txBody>
+                  <a:tcPr marL="73152" marR="73152" marT="0" marB="0" anchor="ctr">
+                    <a:solidFill>
+                      <a:srgbClr val="1C5CAB"/>
+                    </a:solidFill>
+                  </a:tcPr>
+                </a:tc>
+                <a:tc>
+                  <a:txBody>
+                    <a:bodyPr wrap="square"/>
+                    <a:lstStyle/>
+                    <a:p>
+                      <a:pPr algn="ctr"/>
+                      <a:r>
+                        <a:rPr sz="1150" b="1">
+                          <a:solidFill>
+                            <a:srgbClr val="FFFFFF"/>
+                          </a:solidFill>
+                          <a:latin typeface="Calibri" panose="020F0502020204030204"/>
+                        </a:rPr>
+                        <a:t>Mean (cm)</a:t>
+                      </a:r>
+                      <a:endParaRPr sz="1150" b="1">
+                        <a:solidFill>
+                          <a:srgbClr val="FFFFFF"/>
+                        </a:solidFill>
+                        <a:latin typeface="Calibri" panose="020F0502020204030204"/>
+                      </a:endParaRPr>
+                    </a:p>
+                  </a:txBody>
+                  <a:tcPr marL="73152" marR="73152" marT="0" marB="0" anchor="ctr">
+                    <a:solidFill>
+                      <a:srgbClr val="1C5CAB"/>
+                    </a:solidFill>
+                  </a:tcPr>
+                </a:tc>
+                <a:tc>
+                  <a:txBody>
+                    <a:bodyPr wrap="square"/>
                     <a:lstStyle/>
                     <a:p>
                       <a:pPr algn="ctr"/>
@@ -7301,36 +7735,7 @@
                       </a:endParaRPr>
                     </a:p>
                   </a:txBody>
-                  <a:tcPr marL="73152" marR="54864" marT="18288" marB="18288" anchor="ctr">
-                    <a:solidFill>
-                      <a:srgbClr val="1C5CAB"/>
-                    </a:solidFill>
-                  </a:tcPr>
-                </a:tc>
-                <a:tc>
-                  <a:txBody>
-                    <a:bodyPr wrap="none"/>
-                    <a:lstStyle/>
-                    <a:p>
-                      <a:pPr algn="ctr"/>
-                      <a:r>
-                        <a:rPr sz="1150" b="1">
-                          <a:solidFill>
-                            <a:srgbClr val="FFFFFF"/>
-                          </a:solidFill>
-                          <a:latin typeface="Calibri" panose="020F0502020204030204"/>
-                        </a:rPr>
-                        <a:t>≤50 ms</a:t>
-                      </a:r>
-                      <a:endParaRPr sz="1150" b="1">
-                        <a:solidFill>
-                          <a:srgbClr val="FFFFFF"/>
-                        </a:solidFill>
-                        <a:latin typeface="Calibri" panose="020F0502020204030204"/>
-                      </a:endParaRPr>
-                    </a:p>
-                  </a:txBody>
-                  <a:tcPr marL="73152" marR="54864" marT="18288" marB="18288" anchor="ctr">
+                  <a:tcPr marL="73152" marR="73152" marT="0" marB="0" anchor="ctr">
                     <a:solidFill>
                       <a:srgbClr val="1C5CAB"/>
                     </a:solidFill>
@@ -7340,7 +7745,7 @@
               <a:tr h="301752">
                 <a:tc>
                   <a:txBody>
-                    <a:bodyPr wrap="none"/>
+                    <a:bodyPr wrap="square"/>
                     <a:lstStyle/>
                     <a:p>
                       <a:pPr algn="l"/>
@@ -7361,7 +7766,7 @@
                       </a:endParaRPr>
                     </a:p>
                   </a:txBody>
-                  <a:tcPr marL="73152" marR="54864" marT="18288" marB="18288" anchor="ctr">
+                  <a:tcPr marL="73152" marR="73152" marT="0" marB="0" anchor="ctr">
                     <a:solidFill>
                       <a:srgbClr val="FFFFFF"/>
                     </a:solidFill>
@@ -7369,7 +7774,94 @@
                 </a:tc>
                 <a:tc>
                   <a:txBody>
-                    <a:bodyPr wrap="none"/>
+                    <a:bodyPr wrap="square"/>
+                    <a:lstStyle/>
+                    <a:p>
+                      <a:pPr algn="ctr"/>
+                      <a:r>
+                        <a:rPr sz="1150" b="0">
+                          <a:solidFill>
+                            <a:srgbClr val="1A1A1A"/>
+                          </a:solidFill>
+                          <a:latin typeface="Calibri" panose="020F0502020204030204"/>
+                        </a:rPr>
+                        <a:t>1.84</a:t>
+                      </a:r>
+                      <a:endParaRPr sz="1150" b="0">
+                        <a:solidFill>
+                          <a:srgbClr val="1A1A1A"/>
+                        </a:solidFill>
+                        <a:latin typeface="Calibri" panose="020F0502020204030204"/>
+                      </a:endParaRPr>
+                    </a:p>
+                  </a:txBody>
+                  <a:tcPr marL="73152" marR="73152" marT="0" marB="0" anchor="ctr">
+                    <a:solidFill>
+                      <a:srgbClr val="FFFFFF"/>
+                    </a:solidFill>
+                  </a:tcPr>
+                </a:tc>
+                <a:tc>
+                  <a:txBody>
+                    <a:bodyPr wrap="square"/>
+                    <a:lstStyle/>
+                    <a:p>
+                      <a:pPr algn="ctr"/>
+                      <a:r>
+                        <a:rPr sz="1150" b="0">
+                          <a:solidFill>
+                            <a:srgbClr val="1A1A1A"/>
+                          </a:solidFill>
+                          <a:latin typeface="Calibri" panose="020F0502020204030204"/>
+                        </a:rPr>
+                        <a:t>2.47</a:t>
+                      </a:r>
+                      <a:endParaRPr sz="1150" b="0">
+                        <a:solidFill>
+                          <a:srgbClr val="1A1A1A"/>
+                        </a:solidFill>
+                        <a:latin typeface="Calibri" panose="020F0502020204030204"/>
+                      </a:endParaRPr>
+                    </a:p>
+                  </a:txBody>
+                  <a:tcPr marL="73152" marR="73152" marT="0" marB="0" anchor="ctr">
+                    <a:solidFill>
+                      <a:srgbClr val="FFFFFF"/>
+                    </a:solidFill>
+                  </a:tcPr>
+                </a:tc>
+                <a:tc>
+                  <a:txBody>
+                    <a:bodyPr wrap="square"/>
+                    <a:lstStyle/>
+                    <a:p>
+                      <a:pPr algn="ctr"/>
+                      <a:r>
+                        <a:rPr sz="1150" b="0">
+                          <a:solidFill>
+                            <a:srgbClr val="1A1A1A"/>
+                          </a:solidFill>
+                          <a:latin typeface="Calibri" panose="020F0502020204030204"/>
+                        </a:rPr>
+                        <a:t>4.28</a:t>
+                      </a:r>
+                      <a:endParaRPr sz="1150" b="0">
+                        <a:solidFill>
+                          <a:srgbClr val="1A1A1A"/>
+                        </a:solidFill>
+                        <a:latin typeface="Calibri" panose="020F0502020204030204"/>
+                      </a:endParaRPr>
+                    </a:p>
+                  </a:txBody>
+                  <a:tcPr marL="73152" marR="73152" marT="0" marB="0" anchor="ctr">
+                    <a:solidFill>
+                      <a:srgbClr val="FFFFFF"/>
+                    </a:solidFill>
+                  </a:tcPr>
+                </a:tc>
+                <a:tc>
+                  <a:txBody>
+                    <a:bodyPr wrap="square"/>
                     <a:lstStyle/>
                     <a:p>
                       <a:pPr algn="ctr"/>
@@ -7390,7 +7882,7 @@
                       </a:endParaRPr>
                     </a:p>
                   </a:txBody>
-                  <a:tcPr marL="73152" marR="54864" marT="18288" marB="18288" anchor="ctr">
+                  <a:tcPr marL="73152" marR="73152" marT="0" marB="0" anchor="ctr">
                     <a:solidFill>
                       <a:srgbClr val="FFFFFF"/>
                     </a:solidFill>
@@ -7398,36 +7890,7 @@
                 </a:tc>
                 <a:tc>
                   <a:txBody>
-                    <a:bodyPr wrap="none"/>
-                    <a:lstStyle/>
-                    <a:p>
-                      <a:pPr algn="ctr"/>
-                      <a:r>
-                        <a:rPr sz="1150" b="0">
-                          <a:solidFill>
-                            <a:srgbClr val="1A1A1A"/>
-                          </a:solidFill>
-                          <a:latin typeface="Calibri" panose="020F0502020204030204"/>
-                        </a:rPr>
-                        <a:t>4.28</a:t>
-                      </a:r>
-                      <a:endParaRPr sz="1150" b="0">
-                        <a:solidFill>
-                          <a:srgbClr val="1A1A1A"/>
-                        </a:solidFill>
-                        <a:latin typeface="Calibri" panose="020F0502020204030204"/>
-                      </a:endParaRPr>
-                    </a:p>
-                  </a:txBody>
-                  <a:tcPr marL="73152" marR="54864" marT="18288" marB="18288" anchor="ctr">
-                    <a:solidFill>
-                      <a:srgbClr val="FFFFFF"/>
-                    </a:solidFill>
-                  </a:tcPr>
-                </a:tc>
-                <a:tc>
-                  <a:txBody>
-                    <a:bodyPr wrap="none"/>
+                    <a:bodyPr wrap="square"/>
                     <a:lstStyle/>
                     <a:p>
                       <a:pPr algn="ctr"/>
@@ -7448,36 +7911,7 @@
                       </a:endParaRPr>
                     </a:p>
                   </a:txBody>
-                  <a:tcPr marL="73152" marR="54864" marT="18288" marB="18288" anchor="ctr">
-                    <a:solidFill>
-                      <a:srgbClr val="FFFFFF"/>
-                    </a:solidFill>
-                  </a:tcPr>
-                </a:tc>
-                <a:tc>
-                  <a:txBody>
-                    <a:bodyPr wrap="none"/>
-                    <a:lstStyle/>
-                    <a:p>
-                      <a:pPr algn="ctr"/>
-                      <a:r>
-                        <a:rPr sz="1150" b="1">
-                          <a:solidFill>
-                            <a:srgbClr val="006300"/>
-                          </a:solidFill>
-                          <a:latin typeface="Calibri" panose="020F0502020204030204"/>
-                        </a:rPr>
-                        <a:t>PASS</a:t>
-                      </a:r>
-                      <a:endParaRPr sz="1150" b="1">
-                        <a:solidFill>
-                          <a:srgbClr val="006300"/>
-                        </a:solidFill>
-                        <a:latin typeface="Calibri" panose="020F0502020204030204"/>
-                      </a:endParaRPr>
-                    </a:p>
-                  </a:txBody>
-                  <a:tcPr marL="73152" marR="54864" marT="18288" marB="18288" anchor="ctr">
+                  <a:tcPr marL="73152" marR="73152" marT="0" marB="0" anchor="ctr">
                     <a:solidFill>
                       <a:srgbClr val="FFFFFF"/>
                     </a:solidFill>
@@ -7487,7 +7921,7 @@
               <a:tr h="301752">
                 <a:tc>
                   <a:txBody>
-                    <a:bodyPr wrap="none"/>
+                    <a:bodyPr wrap="square"/>
                     <a:lstStyle/>
                     <a:p>
                       <a:pPr algn="l"/>
@@ -7508,7 +7942,7 @@
                       </a:endParaRPr>
                     </a:p>
                   </a:txBody>
-                  <a:tcPr marL="73152" marR="54864" marT="18288" marB="18288" anchor="ctr">
+                  <a:tcPr marL="73152" marR="73152" marT="0" marB="0" anchor="ctr">
                     <a:solidFill>
                       <a:srgbClr val="F7F8FA"/>
                     </a:solidFill>
@@ -7516,7 +7950,94 @@
                 </a:tc>
                 <a:tc>
                   <a:txBody>
-                    <a:bodyPr wrap="none"/>
+                    <a:bodyPr wrap="square"/>
+                    <a:lstStyle/>
+                    <a:p>
+                      <a:pPr algn="ctr"/>
+                      <a:r>
+                        <a:rPr sz="1150" b="0">
+                          <a:solidFill>
+                            <a:srgbClr val="1A1A1A"/>
+                          </a:solidFill>
+                          <a:latin typeface="Calibri" panose="020F0502020204030204"/>
+                        </a:rPr>
+                        <a:t>0.73</a:t>
+                      </a:r>
+                      <a:endParaRPr sz="1150" b="0">
+                        <a:solidFill>
+                          <a:srgbClr val="1A1A1A"/>
+                        </a:solidFill>
+                        <a:latin typeface="Calibri" panose="020F0502020204030204"/>
+                      </a:endParaRPr>
+                    </a:p>
+                  </a:txBody>
+                  <a:tcPr marL="73152" marR="73152" marT="0" marB="0" anchor="ctr">
+                    <a:solidFill>
+                      <a:srgbClr val="F7F8FA"/>
+                    </a:solidFill>
+                  </a:tcPr>
+                </a:tc>
+                <a:tc>
+                  <a:txBody>
+                    <a:bodyPr wrap="square"/>
+                    <a:lstStyle/>
+                    <a:p>
+                      <a:pPr algn="ctr"/>
+                      <a:r>
+                        <a:rPr sz="1150" b="0">
+                          <a:solidFill>
+                            <a:srgbClr val="1A1A1A"/>
+                          </a:solidFill>
+                          <a:latin typeface="Calibri" panose="020F0502020204030204"/>
+                        </a:rPr>
+                        <a:t>1.37</a:t>
+                      </a:r>
+                      <a:endParaRPr sz="1150" b="0">
+                        <a:solidFill>
+                          <a:srgbClr val="1A1A1A"/>
+                        </a:solidFill>
+                        <a:latin typeface="Calibri" panose="020F0502020204030204"/>
+                      </a:endParaRPr>
+                    </a:p>
+                  </a:txBody>
+                  <a:tcPr marL="73152" marR="73152" marT="0" marB="0" anchor="ctr">
+                    <a:solidFill>
+                      <a:srgbClr val="F7F8FA"/>
+                    </a:solidFill>
+                  </a:tcPr>
+                </a:tc>
+                <a:tc>
+                  <a:txBody>
+                    <a:bodyPr wrap="square"/>
+                    <a:lstStyle/>
+                    <a:p>
+                      <a:pPr algn="ctr"/>
+                      <a:r>
+                        <a:rPr sz="1150" b="0">
+                          <a:solidFill>
+                            <a:srgbClr val="1A1A1A"/>
+                          </a:solidFill>
+                          <a:latin typeface="Calibri" panose="020F0502020204030204"/>
+                        </a:rPr>
+                        <a:t>2.56</a:t>
+                      </a:r>
+                      <a:endParaRPr sz="1150" b="0">
+                        <a:solidFill>
+                          <a:srgbClr val="1A1A1A"/>
+                        </a:solidFill>
+                        <a:latin typeface="Calibri" panose="020F0502020204030204"/>
+                      </a:endParaRPr>
+                    </a:p>
+                  </a:txBody>
+                  <a:tcPr marL="73152" marR="73152" marT="0" marB="0" anchor="ctr">
+                    <a:solidFill>
+                      <a:srgbClr val="F7F8FA"/>
+                    </a:solidFill>
+                  </a:tcPr>
+                </a:tc>
+                <a:tc>
+                  <a:txBody>
+                    <a:bodyPr wrap="square"/>
                     <a:lstStyle/>
                     <a:p>
                       <a:pPr algn="ctr"/>
@@ -7537,7 +8058,7 @@
                       </a:endParaRPr>
                     </a:p>
                   </a:txBody>
-                  <a:tcPr marL="73152" marR="54864" marT="18288" marB="18288" anchor="ctr">
+                  <a:tcPr marL="73152" marR="73152" marT="0" marB="0" anchor="ctr">
                     <a:solidFill>
                       <a:srgbClr val="F7F8FA"/>
                     </a:solidFill>
@@ -7545,36 +8066,7 @@
                 </a:tc>
                 <a:tc>
                   <a:txBody>
-                    <a:bodyPr wrap="none"/>
-                    <a:lstStyle/>
-                    <a:p>
-                      <a:pPr algn="ctr"/>
-                      <a:r>
-                        <a:rPr sz="1150" b="0">
-                          <a:solidFill>
-                            <a:srgbClr val="1A1A1A"/>
-                          </a:solidFill>
-                          <a:latin typeface="Calibri" panose="020F0502020204030204"/>
-                        </a:rPr>
-                        <a:t>2.56</a:t>
-                      </a:r>
-                      <a:endParaRPr sz="1150" b="0">
-                        <a:solidFill>
-                          <a:srgbClr val="1A1A1A"/>
-                        </a:solidFill>
-                        <a:latin typeface="Calibri" panose="020F0502020204030204"/>
-                      </a:endParaRPr>
-                    </a:p>
-                  </a:txBody>
-                  <a:tcPr marL="73152" marR="54864" marT="18288" marB="18288" anchor="ctr">
-                    <a:solidFill>
-                      <a:srgbClr val="F7F8FA"/>
-                    </a:solidFill>
-                  </a:tcPr>
-                </a:tc>
-                <a:tc>
-                  <a:txBody>
-                    <a:bodyPr wrap="none"/>
+                    <a:bodyPr wrap="square"/>
                     <a:lstStyle/>
                     <a:p>
                       <a:pPr algn="ctr"/>
@@ -7595,36 +8087,7 @@
                       </a:endParaRPr>
                     </a:p>
                   </a:txBody>
-                  <a:tcPr marL="73152" marR="54864" marT="18288" marB="18288" anchor="ctr">
-                    <a:solidFill>
-                      <a:srgbClr val="F7F8FA"/>
-                    </a:solidFill>
-                  </a:tcPr>
-                </a:tc>
-                <a:tc>
-                  <a:txBody>
-                    <a:bodyPr wrap="none"/>
-                    <a:lstStyle/>
-                    <a:p>
-                      <a:pPr algn="ctr"/>
-                      <a:r>
-                        <a:rPr sz="1150" b="1">
-                          <a:solidFill>
-                            <a:srgbClr val="006300"/>
-                          </a:solidFill>
-                          <a:latin typeface="Calibri" panose="020F0502020204030204"/>
-                        </a:rPr>
-                        <a:t>PASS</a:t>
-                      </a:r>
-                      <a:endParaRPr sz="1150" b="1">
-                        <a:solidFill>
-                          <a:srgbClr val="006300"/>
-                        </a:solidFill>
-                        <a:latin typeface="Calibri" panose="020F0502020204030204"/>
-                      </a:endParaRPr>
-                    </a:p>
-                  </a:txBody>
-                  <a:tcPr marL="73152" marR="54864" marT="18288" marB="18288" anchor="ctr">
+                  <a:tcPr marL="73152" marR="73152" marT="0" marB="0" anchor="ctr">
                     <a:solidFill>
                       <a:srgbClr val="F7F8FA"/>
                     </a:solidFill>
@@ -7634,7 +8097,7 @@
               <a:tr h="301752">
                 <a:tc>
                   <a:txBody>
-                    <a:bodyPr wrap="none"/>
+                    <a:bodyPr wrap="square"/>
                     <a:lstStyle/>
                     <a:p>
                       <a:pPr algn="l"/>
@@ -7655,7 +8118,7 @@
                       </a:endParaRPr>
                     </a:p>
                   </a:txBody>
-                  <a:tcPr marL="73152" marR="54864" marT="18288" marB="18288" anchor="ctr">
+                  <a:tcPr marL="73152" marR="73152" marT="0" marB="0" anchor="ctr">
                     <a:solidFill>
                       <a:srgbClr val="FFFFFF"/>
                     </a:solidFill>
@@ -7663,7 +8126,94 @@
                 </a:tc>
                 <a:tc>
                   <a:txBody>
-                    <a:bodyPr wrap="none"/>
+                    <a:bodyPr wrap="square"/>
+                    <a:lstStyle/>
+                    <a:p>
+                      <a:pPr algn="ctr"/>
+                      <a:r>
+                        <a:rPr sz="1150" b="0">
+                          <a:solidFill>
+                            <a:srgbClr val="1A1A1A"/>
+                          </a:solidFill>
+                          <a:latin typeface="Calibri" panose="020F0502020204030204"/>
+                        </a:rPr>
+                        <a:t>1.12</a:t>
+                      </a:r>
+                      <a:endParaRPr sz="1150" b="0">
+                        <a:solidFill>
+                          <a:srgbClr val="1A1A1A"/>
+                        </a:solidFill>
+                        <a:latin typeface="Calibri" panose="020F0502020204030204"/>
+                      </a:endParaRPr>
+                    </a:p>
+                  </a:txBody>
+                  <a:tcPr marL="73152" marR="73152" marT="0" marB="0" anchor="ctr">
+                    <a:solidFill>
+                      <a:srgbClr val="FFFFFF"/>
+                    </a:solidFill>
+                  </a:tcPr>
+                </a:tc>
+                <a:tc>
+                  <a:txBody>
+                    <a:bodyPr wrap="square"/>
+                    <a:lstStyle/>
+                    <a:p>
+                      <a:pPr algn="ctr"/>
+                      <a:r>
+                        <a:rPr sz="1150" b="0">
+                          <a:solidFill>
+                            <a:srgbClr val="1A1A1A"/>
+                          </a:solidFill>
+                          <a:latin typeface="Calibri" panose="020F0502020204030204"/>
+                        </a:rPr>
+                        <a:t>1.50</a:t>
+                      </a:r>
+                      <a:endParaRPr sz="1150" b="0">
+                        <a:solidFill>
+                          <a:srgbClr val="1A1A1A"/>
+                        </a:solidFill>
+                        <a:latin typeface="Calibri" panose="020F0502020204030204"/>
+                      </a:endParaRPr>
+                    </a:p>
+                  </a:txBody>
+                  <a:tcPr marL="73152" marR="73152" marT="0" marB="0" anchor="ctr">
+                    <a:solidFill>
+                      <a:srgbClr val="FFFFFF"/>
+                    </a:solidFill>
+                  </a:tcPr>
+                </a:tc>
+                <a:tc>
+                  <a:txBody>
+                    <a:bodyPr wrap="square"/>
+                    <a:lstStyle/>
+                    <a:p>
+                      <a:pPr algn="ctr"/>
+                      <a:r>
+                        <a:rPr sz="1150" b="0">
+                          <a:solidFill>
+                            <a:srgbClr val="1A1A1A"/>
+                          </a:solidFill>
+                          <a:latin typeface="Calibri" panose="020F0502020204030204"/>
+                        </a:rPr>
+                        <a:t>2.43</a:t>
+                      </a:r>
+                      <a:endParaRPr sz="1150" b="0">
+                        <a:solidFill>
+                          <a:srgbClr val="1A1A1A"/>
+                        </a:solidFill>
+                        <a:latin typeface="Calibri" panose="020F0502020204030204"/>
+                      </a:endParaRPr>
+                    </a:p>
+                  </a:txBody>
+                  <a:tcPr marL="73152" marR="73152" marT="0" marB="0" anchor="ctr">
+                    <a:solidFill>
+                      <a:srgbClr val="FFFFFF"/>
+                    </a:solidFill>
+                  </a:tcPr>
+                </a:tc>
+                <a:tc>
+                  <a:txBody>
+                    <a:bodyPr wrap="square"/>
                     <a:lstStyle/>
                     <a:p>
                       <a:pPr algn="ctr"/>
@@ -7684,7 +8234,7 @@
                       </a:endParaRPr>
                     </a:p>
                   </a:txBody>
-                  <a:tcPr marL="73152" marR="54864" marT="18288" marB="18288" anchor="ctr">
+                  <a:tcPr marL="73152" marR="73152" marT="0" marB="0" anchor="ctr">
                     <a:solidFill>
                       <a:srgbClr val="FFFFFF"/>
                     </a:solidFill>
@@ -7692,36 +8242,7 @@
                 </a:tc>
                 <a:tc>
                   <a:txBody>
-                    <a:bodyPr wrap="none"/>
-                    <a:lstStyle/>
-                    <a:p>
-                      <a:pPr algn="ctr"/>
-                      <a:r>
-                        <a:rPr sz="1150" b="0">
-                          <a:solidFill>
-                            <a:srgbClr val="1A1A1A"/>
-                          </a:solidFill>
-                          <a:latin typeface="Calibri" panose="020F0502020204030204"/>
-                        </a:rPr>
-                        <a:t>2.43</a:t>
-                      </a:r>
-                      <a:endParaRPr sz="1150" b="0">
-                        <a:solidFill>
-                          <a:srgbClr val="1A1A1A"/>
-                        </a:solidFill>
-                        <a:latin typeface="Calibri" panose="020F0502020204030204"/>
-                      </a:endParaRPr>
-                    </a:p>
-                  </a:txBody>
-                  <a:tcPr marL="73152" marR="54864" marT="18288" marB="18288" anchor="ctr">
-                    <a:solidFill>
-                      <a:srgbClr val="FFFFFF"/>
-                    </a:solidFill>
-                  </a:tcPr>
-                </a:tc>
-                <a:tc>
-                  <a:txBody>
-                    <a:bodyPr wrap="none"/>
+                    <a:bodyPr wrap="square"/>
                     <a:lstStyle/>
                     <a:p>
                       <a:pPr algn="ctr"/>
@@ -7742,36 +8263,7 @@
                       </a:endParaRPr>
                     </a:p>
                   </a:txBody>
-                  <a:tcPr marL="73152" marR="54864" marT="18288" marB="18288" anchor="ctr">
-                    <a:solidFill>
-                      <a:srgbClr val="FFFFFF"/>
-                    </a:solidFill>
-                  </a:tcPr>
-                </a:tc>
-                <a:tc>
-                  <a:txBody>
-                    <a:bodyPr wrap="none"/>
-                    <a:lstStyle/>
-                    <a:p>
-                      <a:pPr algn="ctr"/>
-                      <a:r>
-                        <a:rPr sz="1150" b="1">
-                          <a:solidFill>
-                            <a:srgbClr val="006300"/>
-                          </a:solidFill>
-                          <a:latin typeface="Calibri" panose="020F0502020204030204"/>
-                        </a:rPr>
-                        <a:t>PASS</a:t>
-                      </a:r>
-                      <a:endParaRPr sz="1150" b="1">
-                        <a:solidFill>
-                          <a:srgbClr val="006300"/>
-                        </a:solidFill>
-                        <a:latin typeface="Calibri" panose="020F0502020204030204"/>
-                      </a:endParaRPr>
-                    </a:p>
-                  </a:txBody>
-                  <a:tcPr marL="73152" marR="54864" marT="18288" marB="18288" anchor="ctr">
+                  <a:tcPr marL="73152" marR="73152" marT="0" marB="0" anchor="ctr">
                     <a:solidFill>
                       <a:srgbClr val="FFFFFF"/>
                     </a:solidFill>
@@ -7781,7 +8273,7 @@
               <a:tr h="301752">
                 <a:tc>
                   <a:txBody>
-                    <a:bodyPr wrap="none"/>
+                    <a:bodyPr wrap="square"/>
                     <a:lstStyle/>
                     <a:p>
                       <a:pPr algn="l"/>
@@ -7802,7 +8294,7 @@
                       </a:endParaRPr>
                     </a:p>
                   </a:txBody>
-                  <a:tcPr marL="73152" marR="54864" marT="18288" marB="18288" anchor="ctr">
+                  <a:tcPr marL="73152" marR="73152" marT="0" marB="0" anchor="ctr">
                     <a:solidFill>
                       <a:srgbClr val="FCE9DF"/>
                     </a:solidFill>
@@ -7810,7 +8302,94 @@
                 </a:tc>
                 <a:tc>
                   <a:txBody>
-                    <a:bodyPr wrap="none"/>
+                    <a:bodyPr wrap="square"/>
+                    <a:lstStyle/>
+                    <a:p>
+                      <a:pPr algn="ctr"/>
+                      <a:r>
+                        <a:rPr sz="1150" b="0">
+                          <a:solidFill>
+                            <a:srgbClr val="1A1A1A"/>
+                          </a:solidFill>
+                          <a:latin typeface="Calibri" panose="020F0502020204030204"/>
+                        </a:rPr>
+                        <a:t>0.95</a:t>
+                      </a:r>
+                      <a:endParaRPr sz="1150" b="0">
+                        <a:solidFill>
+                          <a:srgbClr val="1A1A1A"/>
+                        </a:solidFill>
+                        <a:latin typeface="Calibri" panose="020F0502020204030204"/>
+                      </a:endParaRPr>
+                    </a:p>
+                  </a:txBody>
+                  <a:tcPr marL="73152" marR="73152" marT="0" marB="0" anchor="ctr">
+                    <a:solidFill>
+                      <a:srgbClr val="FCE9DF"/>
+                    </a:solidFill>
+                  </a:tcPr>
+                </a:tc>
+                <a:tc>
+                  <a:txBody>
+                    <a:bodyPr wrap="square"/>
+                    <a:lstStyle/>
+                    <a:p>
+                      <a:pPr algn="ctr"/>
+                      <a:r>
+                        <a:rPr sz="1150" b="0">
+                          <a:solidFill>
+                            <a:srgbClr val="1A1A1A"/>
+                          </a:solidFill>
+                          <a:latin typeface="Calibri" panose="020F0502020204030204"/>
+                        </a:rPr>
+                        <a:t>1.32</a:t>
+                      </a:r>
+                      <a:endParaRPr sz="1150" b="0">
+                        <a:solidFill>
+                          <a:srgbClr val="1A1A1A"/>
+                        </a:solidFill>
+                        <a:latin typeface="Calibri" panose="020F0502020204030204"/>
+                      </a:endParaRPr>
+                    </a:p>
+                  </a:txBody>
+                  <a:tcPr marL="73152" marR="73152" marT="0" marB="0" anchor="ctr">
+                    <a:solidFill>
+                      <a:srgbClr val="FCE9DF"/>
+                    </a:solidFill>
+                  </a:tcPr>
+                </a:tc>
+                <a:tc>
+                  <a:txBody>
+                    <a:bodyPr wrap="square"/>
+                    <a:lstStyle/>
+                    <a:p>
+                      <a:pPr algn="ctr"/>
+                      <a:r>
+                        <a:rPr sz="1150" b="0">
+                          <a:solidFill>
+                            <a:srgbClr val="1A1A1A"/>
+                          </a:solidFill>
+                          <a:latin typeface="Calibri" panose="020F0502020204030204"/>
+                        </a:rPr>
+                        <a:t>2.18</a:t>
+                      </a:r>
+                      <a:endParaRPr sz="1150" b="0">
+                        <a:solidFill>
+                          <a:srgbClr val="1A1A1A"/>
+                        </a:solidFill>
+                        <a:latin typeface="Calibri" panose="020F0502020204030204"/>
+                      </a:endParaRPr>
+                    </a:p>
+                  </a:txBody>
+                  <a:tcPr marL="73152" marR="73152" marT="0" marB="0" anchor="ctr">
+                    <a:solidFill>
+                      <a:srgbClr val="FCE9DF"/>
+                    </a:solidFill>
+                  </a:tcPr>
+                </a:tc>
+                <a:tc>
+                  <a:txBody>
+                    <a:bodyPr wrap="square"/>
                     <a:lstStyle/>
                     <a:p>
                       <a:pPr algn="ctr"/>
@@ -7831,7 +8410,7 @@
                       </a:endParaRPr>
                     </a:p>
                   </a:txBody>
-                  <a:tcPr marL="73152" marR="54864" marT="18288" marB="18288" anchor="ctr">
+                  <a:tcPr marL="73152" marR="73152" marT="0" marB="0" anchor="ctr">
                     <a:solidFill>
                       <a:srgbClr val="FCE9DF"/>
                     </a:solidFill>
@@ -7839,36 +8418,7 @@
                 </a:tc>
                 <a:tc>
                   <a:txBody>
-                    <a:bodyPr wrap="none"/>
-                    <a:lstStyle/>
-                    <a:p>
-                      <a:pPr algn="ctr"/>
-                      <a:r>
-                        <a:rPr sz="1150" b="0">
-                          <a:solidFill>
-                            <a:srgbClr val="1A1A1A"/>
-                          </a:solidFill>
-                          <a:latin typeface="Calibri" panose="020F0502020204030204"/>
-                        </a:rPr>
-                        <a:t>2.18</a:t>
-                      </a:r>
-                      <a:endParaRPr sz="1150" b="0">
-                        <a:solidFill>
-                          <a:srgbClr val="1A1A1A"/>
-                        </a:solidFill>
-                        <a:latin typeface="Calibri" panose="020F0502020204030204"/>
-                      </a:endParaRPr>
-                    </a:p>
-                  </a:txBody>
-                  <a:tcPr marL="73152" marR="54864" marT="18288" marB="18288" anchor="ctr">
-                    <a:solidFill>
-                      <a:srgbClr val="FCE9DF"/>
-                    </a:solidFill>
-                  </a:tcPr>
-                </a:tc>
-                <a:tc>
-                  <a:txBody>
-                    <a:bodyPr wrap="none"/>
+                    <a:bodyPr wrap="square"/>
                     <a:lstStyle/>
                     <a:p>
                       <a:pPr algn="ctr"/>
@@ -7889,36 +8439,7 @@
                       </a:endParaRPr>
                     </a:p>
                   </a:txBody>
-                  <a:tcPr marL="73152" marR="54864" marT="18288" marB="18288" anchor="ctr">
-                    <a:solidFill>
-                      <a:srgbClr val="FCE9DF"/>
-                    </a:solidFill>
-                  </a:tcPr>
-                </a:tc>
-                <a:tc>
-                  <a:txBody>
-                    <a:bodyPr wrap="none"/>
-                    <a:lstStyle/>
-                    <a:p>
-                      <a:pPr algn="ctr"/>
-                      <a:r>
-                        <a:rPr sz="1150" b="1">
-                          <a:solidFill>
-                            <a:srgbClr val="006300"/>
-                          </a:solidFill>
-                          <a:latin typeface="Calibri" panose="020F0502020204030204"/>
-                        </a:rPr>
-                        <a:t>PASS</a:t>
-                      </a:r>
-                      <a:endParaRPr sz="1150" b="1">
-                        <a:solidFill>
-                          <a:srgbClr val="006300"/>
-                        </a:solidFill>
-                        <a:latin typeface="Calibri" panose="020F0502020204030204"/>
-                      </a:endParaRPr>
-                    </a:p>
-                  </a:txBody>
-                  <a:tcPr marL="73152" marR="54864" marT="18288" marB="18288" anchor="ctr">
+                  <a:tcPr marL="73152" marR="73152" marT="0" marB="0" anchor="ctr">
                     <a:solidFill>
                       <a:srgbClr val="FCE9DF"/>
                     </a:solidFill>
@@ -7928,7 +8449,7 @@
               <a:tr h="301752">
                 <a:tc>
                   <a:txBody>
-                    <a:bodyPr wrap="none"/>
+                    <a:bodyPr wrap="square"/>
                     <a:lstStyle/>
                     <a:p>
                       <a:pPr algn="l"/>
@@ -7949,7 +8470,7 @@
                       </a:endParaRPr>
                     </a:p>
                   </a:txBody>
-                  <a:tcPr marL="73152" marR="54864" marT="18288" marB="18288" anchor="ctr">
+                  <a:tcPr marL="73152" marR="73152" marT="0" marB="0" anchor="ctr">
                     <a:solidFill>
                       <a:srgbClr val="FFFFFF"/>
                     </a:solidFill>
@@ -7957,7 +8478,94 @@
                 </a:tc>
                 <a:tc>
                   <a:txBody>
-                    <a:bodyPr wrap="none"/>
+                    <a:bodyPr wrap="square"/>
+                    <a:lstStyle/>
+                    <a:p>
+                      <a:pPr algn="ctr"/>
+                      <a:r>
+                        <a:rPr sz="1150" b="0">
+                          <a:solidFill>
+                            <a:srgbClr val="1A1A1A"/>
+                          </a:solidFill>
+                          <a:latin typeface="Calibri" panose="020F0502020204030204"/>
+                        </a:rPr>
+                        <a:t>1.17</a:t>
+                      </a:r>
+                      <a:endParaRPr sz="1150" b="0">
+                        <a:solidFill>
+                          <a:srgbClr val="1A1A1A"/>
+                        </a:solidFill>
+                        <a:latin typeface="Calibri" panose="020F0502020204030204"/>
+                      </a:endParaRPr>
+                    </a:p>
+                  </a:txBody>
+                  <a:tcPr marL="73152" marR="73152" marT="0" marB="0" anchor="ctr">
+                    <a:solidFill>
+                      <a:srgbClr val="FFFFFF"/>
+                    </a:solidFill>
+                  </a:tcPr>
+                </a:tc>
+                <a:tc>
+                  <a:txBody>
+                    <a:bodyPr wrap="square"/>
+                    <a:lstStyle/>
+                    <a:p>
+                      <a:pPr algn="ctr"/>
+                      <a:r>
+                        <a:rPr sz="1150" b="0">
+                          <a:solidFill>
+                            <a:srgbClr val="1A1A1A"/>
+                          </a:solidFill>
+                          <a:latin typeface="Calibri" panose="020F0502020204030204"/>
+                        </a:rPr>
+                        <a:t>1.47</a:t>
+                      </a:r>
+                      <a:endParaRPr sz="1150" b="0">
+                        <a:solidFill>
+                          <a:srgbClr val="1A1A1A"/>
+                        </a:solidFill>
+                        <a:latin typeface="Calibri" panose="020F0502020204030204"/>
+                      </a:endParaRPr>
+                    </a:p>
+                  </a:txBody>
+                  <a:tcPr marL="73152" marR="73152" marT="0" marB="0" anchor="ctr">
+                    <a:solidFill>
+                      <a:srgbClr val="FFFFFF"/>
+                    </a:solidFill>
+                  </a:tcPr>
+                </a:tc>
+                <a:tc>
+                  <a:txBody>
+                    <a:bodyPr wrap="square"/>
+                    <a:lstStyle/>
+                    <a:p>
+                      <a:pPr algn="ctr"/>
+                      <a:r>
+                        <a:rPr sz="1150" b="0">
+                          <a:solidFill>
+                            <a:srgbClr val="1A1A1A"/>
+                          </a:solidFill>
+                          <a:latin typeface="Calibri" panose="020F0502020204030204"/>
+                        </a:rPr>
+                        <a:t>2.32</a:t>
+                      </a:r>
+                      <a:endParaRPr sz="1150" b="0">
+                        <a:solidFill>
+                          <a:srgbClr val="1A1A1A"/>
+                        </a:solidFill>
+                        <a:latin typeface="Calibri" panose="020F0502020204030204"/>
+                      </a:endParaRPr>
+                    </a:p>
+                  </a:txBody>
+                  <a:tcPr marL="73152" marR="73152" marT="0" marB="0" anchor="ctr">
+                    <a:solidFill>
+                      <a:srgbClr val="FFFFFF"/>
+                    </a:solidFill>
+                  </a:tcPr>
+                </a:tc>
+                <a:tc>
+                  <a:txBody>
+                    <a:bodyPr wrap="square"/>
                     <a:lstStyle/>
                     <a:p>
                       <a:pPr algn="ctr"/>
@@ -7978,7 +8586,7 @@
                       </a:endParaRPr>
                     </a:p>
                   </a:txBody>
-                  <a:tcPr marL="73152" marR="54864" marT="18288" marB="18288" anchor="ctr">
+                  <a:tcPr marL="73152" marR="73152" marT="0" marB="0" anchor="ctr">
                     <a:solidFill>
                       <a:srgbClr val="FFFFFF"/>
                     </a:solidFill>
@@ -7986,36 +8594,7 @@
                 </a:tc>
                 <a:tc>
                   <a:txBody>
-                    <a:bodyPr wrap="none"/>
-                    <a:lstStyle/>
-                    <a:p>
-                      <a:pPr algn="ctr"/>
-                      <a:r>
-                        <a:rPr sz="1150" b="0">
-                          <a:solidFill>
-                            <a:srgbClr val="1A1A1A"/>
-                          </a:solidFill>
-                          <a:latin typeface="Calibri" panose="020F0502020204030204"/>
-                        </a:rPr>
-                        <a:t>2.32</a:t>
-                      </a:r>
-                      <a:endParaRPr sz="1150" b="0">
-                        <a:solidFill>
-                          <a:srgbClr val="1A1A1A"/>
-                        </a:solidFill>
-                        <a:latin typeface="Calibri" panose="020F0502020204030204"/>
-                      </a:endParaRPr>
-                    </a:p>
-                  </a:txBody>
-                  <a:tcPr marL="73152" marR="54864" marT="18288" marB="18288" anchor="ctr">
-                    <a:solidFill>
-                      <a:srgbClr val="FFFFFF"/>
-                    </a:solidFill>
-                  </a:tcPr>
-                </a:tc>
-                <a:tc>
-                  <a:txBody>
-                    <a:bodyPr wrap="none"/>
+                    <a:bodyPr wrap="square"/>
                     <a:lstStyle/>
                     <a:p>
                       <a:pPr algn="ctr"/>
@@ -8036,36 +8615,7 @@
                       </a:endParaRPr>
                     </a:p>
                   </a:txBody>
-                  <a:tcPr marL="73152" marR="54864" marT="18288" marB="18288" anchor="ctr">
-                    <a:solidFill>
-                      <a:srgbClr val="FFFFFF"/>
-                    </a:solidFill>
-                  </a:tcPr>
-                </a:tc>
-                <a:tc>
-                  <a:txBody>
-                    <a:bodyPr wrap="none"/>
-                    <a:lstStyle/>
-                    <a:p>
-                      <a:pPr algn="ctr"/>
-                      <a:r>
-                        <a:rPr sz="1150" b="1">
-                          <a:solidFill>
-                            <a:srgbClr val="006300"/>
-                          </a:solidFill>
-                          <a:latin typeface="Calibri" panose="020F0502020204030204"/>
-                        </a:rPr>
-                        <a:t>PASS</a:t>
-                      </a:r>
-                      <a:endParaRPr sz="1150" b="1">
-                        <a:solidFill>
-                          <a:srgbClr val="006300"/>
-                        </a:solidFill>
-                        <a:latin typeface="Calibri" panose="020F0502020204030204"/>
-                      </a:endParaRPr>
-                    </a:p>
-                  </a:txBody>
-                  <a:tcPr marL="73152" marR="54864" marT="18288" marB="18288" anchor="ctr">
+                  <a:tcPr marL="73152" marR="73152" marT="0" marB="0" anchor="ctr">
                     <a:solidFill>
                       <a:srgbClr val="FFFFFF"/>
                     </a:solidFill>
@@ -8078,7 +8628,7 @@
       </p:graphicFrame>
       <p:sp>
         <p:nvSpPr>
-          <p:cNvPr id="6" name="TextBox 5"/>
+          <p:cNvPr id="8" name="TextBox 7"/>
           <p:cNvSpPr txBox="1"/>
           <p:nvPr/>
         </p:nvSpPr>
@@ -8093,7 +8643,7 @@
           <a:noFill/>
         </p:spPr>
         <p:txBody>
-          <a:bodyPr wrap="square" lIns="0" tIns="0" rIns="0" bIns="0" anchor="t">
+          <a:bodyPr wrap="square" lIns="0" tIns="0" rIns="0" bIns="0">
             <a:spAutoFit/>
           </a:bodyPr>
           <a:lstStyle/>
@@ -8110,11 +8660,20 @@
                 </a:solidFill>
                 <a:latin typeface="Calibri" panose="020F0502020204030204"/>
               </a:rPr>
-              <a:t>Mean ± std over 5 training seeds; CV / Linear are deterministic.</a:t>
+              <a:t>Mean Euclidean error (cm), 5-seed mean ± std; CV / Linear deterministic. </a:t>
+            </a:r>
+            <a:r>
+              <a:rPr sz="1100" b="0">
+                <a:solidFill>
+                  <a:srgbClr val="52514E"/>
+                </a:solidFill>
+                <a:latin typeface="Calibri" panose="020F0502020204030204"/>
+              </a:rPr>
+              <a:t>All five PASS ≤50 ms.</a:t>
             </a:r>
             <a:endParaRPr sz="1100" b="0">
               <a:solidFill>
-                <a:srgbClr val="898781"/>
+                <a:srgbClr val="52514E"/>
               </a:solidFill>
               <a:latin typeface="Calibri" panose="020F0502020204030204"/>
             </a:endParaRPr>
@@ -8123,7 +8682,7 @@
       </p:sp>
       <p:pic>
         <p:nvPicPr>
-          <p:cNvPr id="7" name="Picture 6" descr="chartB_per_horizon.png"/>
+          <p:cNvPr id="9" name="Picture 8" descr="image2.png"/>
           <p:cNvPicPr>
             <a:picLocks noChangeAspect="1"/>
           </p:cNvPicPr>
@@ -8147,14 +8706,14 @@
       </p:pic>
       <p:sp>
         <p:nvSpPr>
-          <p:cNvPr id="8" name="TextBox 7"/>
+          <p:cNvPr id="10" name="TextBox 9"/>
           <p:cNvSpPr txBox="1"/>
           <p:nvPr/>
         </p:nvSpPr>
         <p:spPr>
           <a:xfrm>
-            <a:off x="548640" y="3767328"/>
-            <a:ext cx="5715000" cy="2651760"/>
+            <a:off x="548640" y="3639312"/>
+            <a:ext cx="5715000" cy="2656840"/>
           </a:xfrm>
           <a:prstGeom prst="rect">
             <a:avLst/>
@@ -8162,12 +8721,12 @@
           <a:noFill/>
         </p:spPr>
         <p:txBody>
-          <a:bodyPr wrap="square" lIns="0" tIns="0" rIns="0" bIns="0" anchor="t">
+          <a:bodyPr wrap="square" lIns="0" tIns="0" rIns="0" bIns="0">
             <a:spAutoFit/>
           </a:bodyPr>
           <a:lstStyle/>
           <a:p>
-            <a:pPr algn="l">
+            <a:pPr algn="just">
               <a:lnSpc>
                 <a:spcPct val="112000"/>
               </a:lnSpc>
@@ -8178,20 +8737,29 @@
             <a:r>
               <a:rPr sz="1200" b="1">
                 <a:solidFill>
-                  <a:srgbClr val="1C5CAB"/>
-                </a:solidFill>
-                <a:latin typeface="Calibri" panose="020F0502020204030204"/>
-              </a:rPr>
-              <a:t>·  </a:t>
-            </a:r>
-            <a:r>
-              <a:rPr sz="1200" b="1">
-                <a:solidFill>
                   <a:srgbClr val="1A1A1A"/>
                 </a:solidFill>
                 <a:latin typeface="Calibri" panose="020F0502020204030204"/>
               </a:rPr>
-              <a:t>The task is mostly linear</a:t>
+              <a:t>Error grows superlinearly with the horizon</a:t>
+            </a:r>
+            <a:r>
+              <a:rPr lang="en-US" sz="1200" b="1">
+                <a:solidFill>
+                  <a:srgbClr val="1A1A1A"/>
+                </a:solidFill>
+                <a:latin typeface="Calibri" panose="020F0502020204030204"/>
+              </a:rPr>
+              <a:t>: </a:t>
+            </a:r>
+            <a:r>
+              <a:rPr lang="en-US" sz="1200" b="0">
+                <a:solidFill>
+                  <a:srgbClr val="1A1A1A"/>
+                </a:solidFill>
+                <a:latin typeface="Calibri" panose="020F0502020204030204"/>
+              </a:rPr>
+              <a:t>F</a:t>
             </a:r>
             <a:r>
               <a:rPr sz="1200" b="0">
@@ -8200,7 +8768,25 @@
                 </a:solidFill>
                 <a:latin typeface="Calibri" panose="020F0502020204030204"/>
               </a:rPr>
-              <a:t> — Linear wins the near waypoints (0.73 cm at h1: an optimal sway/noise filter); the whole nonlinear gain concentrates in obstacle-avoidance episodes (LSTM 2.86 vs Linear 3.52 cm at h5).</a:t>
+              <a:t>or every model</a:t>
+            </a:r>
+            <a:r>
+              <a:rPr lang="en-US" sz="1200" b="0">
+                <a:solidFill>
+                  <a:srgbClr val="1A1A1A"/>
+                </a:solidFill>
+                <a:latin typeface="Calibri" panose="020F0502020204030204"/>
+              </a:rPr>
+              <a:t>, n</a:t>
+            </a:r>
+            <a:r>
+              <a:rPr sz="1200" b="0">
+                <a:solidFill>
+                  <a:srgbClr val="1A1A1A"/>
+                </a:solidFill>
+                <a:latin typeface="Calibri" panose="020F0502020204030204"/>
+              </a:rPr>
+              <a:t>ear the horizon it is dominated by gait sway and sensor noise; far out, by unanticipated velocity change, which compounds in time — the mechanism that makes long planning horizons expensive for any predictive planner.</a:t>
             </a:r>
             <a:endParaRPr sz="1200" b="0">
               <a:solidFill>
@@ -8210,7 +8796,7 @@
             </a:endParaRPr>
           </a:p>
           <a:p>
-            <a:pPr algn="l">
+            <a:pPr algn="just">
               <a:lnSpc>
                 <a:spcPct val="112000"/>
               </a:lnSpc>
@@ -8221,20 +8807,11 @@
             <a:r>
               <a:rPr sz="1200" b="1">
                 <a:solidFill>
-                  <a:srgbClr val="1C5CAB"/>
-                </a:solidFill>
-                <a:latin typeface="Calibri" panose="020F0502020204030204"/>
-              </a:rPr>
-              <a:t>·  </a:t>
-            </a:r>
-            <a:r>
-              <a:rPr sz="1200" b="1">
-                <a:solidFill>
                   <a:srgbClr val="1A1A1A"/>
                 </a:solidFill>
                 <a:latin typeface="Calibri" panose="020F0502020204030204"/>
               </a:rPr>
-              <a:t>The Transformer does not justify its latency here</a:t>
+              <a:t>The crossover locates the nonlinear part</a:t>
             </a:r>
             <a:r>
               <a:rPr sz="1200" b="0">
@@ -8243,7 +8820,7 @@
                 </a:solidFill>
                 <a:latin typeface="Calibri" panose="020F0502020204030204"/>
               </a:rPr>
-              <a:t>: slower and less accurate than the LSTM, with 3× the seed variance (±0.15); a param-matched control confirms a data-scale limit, not a tuning miss — not significant vs MLP/Linear.</a:t>
+              <a:t>: Linear wins the near waypoints — closed-form least squares is an optimal filter for sway around a quadratic path — and the ordering inverts at the far ones. Almost all the nonlinear gain sits in the obstacle-avoidance episodes, on a single seed; a smaller gap remains on clean ones.</a:t>
             </a:r>
             <a:endParaRPr sz="1200" b="0">
               <a:solidFill>
@@ -8253,7 +8830,7 @@
             </a:endParaRPr>
           </a:p>
           <a:p>
-            <a:pPr algn="l">
+            <a:pPr algn="just">
               <a:lnSpc>
                 <a:spcPct val="112000"/>
               </a:lnSpc>
@@ -8264,20 +8841,11 @@
             <a:r>
               <a:rPr sz="1200" b="1">
                 <a:solidFill>
-                  <a:srgbClr val="1C5CAB"/>
-                </a:solidFill>
-                <a:latin typeface="Calibri" panose="020F0502020204030204"/>
-              </a:rPr>
-              <a:t>·  </a:t>
-            </a:r>
-            <a:r>
-              <a:rPr sz="1200" b="1">
-                <a:solidFill>
                   <a:srgbClr val="1A1A1A"/>
                 </a:solidFill>
                 <a:latin typeface="Calibri" panose="020F0502020204030204"/>
               </a:rPr>
-              <a:t>Attention over the horizon</a:t>
+              <a:t>The Transformer does not justify its cost here</a:t>
             </a:r>
             <a:r>
               <a:rPr sz="1200" b="0">
@@ -8286,101 +8854,29 @@
                 </a:solidFill>
                 <a:latin typeface="Calibri" panose="020F0502020204030204"/>
               </a:rPr>
-              <a:t>: near waypoints read the latest state, far waypoints read progressively older trend context (attention centre-of-mass step 6.7 → 3.1) — the learned analogue of a receding-horizon planner.</a:t>
+              <a:t>:</a:t>
+            </a:r>
+            <a:r>
+              <a:rPr lang="en-US" sz="1200" b="0">
+                <a:solidFill>
+                  <a:srgbClr val="1A1A1A"/>
+                </a:solidFill>
+                <a:latin typeface="Calibri" panose="020F0502020204030204"/>
+              </a:rPr>
+              <a:t> </a:t>
+            </a:r>
+            <a:r>
+              <a:rPr sz="1200" b="0">
+                <a:solidFill>
+                  <a:srgbClr val="1A1A1A"/>
+                </a:solidFill>
+                <a:latin typeface="Calibri" panose="020F0502020204030204"/>
+              </a:rPr>
+              <a:t>slowest, less accurate than the LSTM, and the most seed-sensitive of the three. A param-matched control halves that variance — a data-scale limit, not a tuning miss. The same shrink hurt accuracy in W03, where sequences were longer: a consistent pattern across two tasks, not a proven mechanism.</a:t>
             </a:r>
             <a:endParaRPr sz="1200" b="0">
               <a:solidFill>
                 <a:srgbClr val="1A1A1A"/>
-              </a:solidFill>
-              <a:latin typeface="Calibri" panose="020F0502020204030204"/>
-            </a:endParaRPr>
-          </a:p>
-        </p:txBody>
-      </p:sp>
-      <p:sp>
-        <p:nvSpPr>
-          <p:cNvPr id="9" name="TextBox 8"/>
-          <p:cNvSpPr txBox="1"/>
-          <p:nvPr/>
-        </p:nvSpPr>
-        <p:spPr>
-          <a:xfrm>
-            <a:off x="548640" y="6510528"/>
-            <a:ext cx="8229600" cy="274320"/>
-          </a:xfrm>
-          <a:prstGeom prst="rect">
-            <a:avLst/>
-          </a:prstGeom>
-          <a:noFill/>
-        </p:spPr>
-        <p:txBody>
-          <a:bodyPr wrap="square" lIns="0" tIns="0" rIns="0" bIns="0" anchor="t">
-            <a:spAutoFit/>
-          </a:bodyPr>
-          <a:lstStyle/>
-          <a:p>
-            <a:pPr algn="l">
-              <a:lnSpc>
-                <a:spcPct val="106000"/>
-              </a:lnSpc>
-            </a:pPr>
-            <a:r>
-              <a:rPr sz="900" b="0">
-                <a:solidFill>
-                  <a:srgbClr val="898781"/>
-                </a:solidFill>
-                <a:latin typeface="Calibri" panose="020F0502020204030204"/>
-              </a:rPr>
-              <a:t>InGen Dynamics · ML &amp; NN Analyst Internship — Mid-Point Review (W1–W4)</a:t>
-            </a:r>
-            <a:endParaRPr sz="900" b="0">
-              <a:solidFill>
-                <a:srgbClr val="898781"/>
-              </a:solidFill>
-              <a:latin typeface="Calibri" panose="020F0502020204030204"/>
-            </a:endParaRPr>
-          </a:p>
-        </p:txBody>
-      </p:sp>
-      <p:sp>
-        <p:nvSpPr>
-          <p:cNvPr id="10" name="TextBox 9"/>
-          <p:cNvSpPr txBox="1"/>
-          <p:nvPr/>
-        </p:nvSpPr>
-        <p:spPr>
-          <a:xfrm>
-            <a:off x="10972800" y="6510528"/>
-            <a:ext cx="667512" cy="274320"/>
-          </a:xfrm>
-          <a:prstGeom prst="rect">
-            <a:avLst/>
-          </a:prstGeom>
-          <a:noFill/>
-        </p:spPr>
-        <p:txBody>
-          <a:bodyPr wrap="square" lIns="0" tIns="0" rIns="0" bIns="0" anchor="t">
-            <a:spAutoFit/>
-          </a:bodyPr>
-          <a:lstStyle/>
-          <a:p>
-            <a:pPr algn="r">
-              <a:lnSpc>
-                <a:spcPct val="106000"/>
-              </a:lnSpc>
-            </a:pPr>
-            <a:r>
-              <a:rPr sz="900" b="0">
-                <a:solidFill>
-                  <a:srgbClr val="898781"/>
-                </a:solidFill>
-                <a:latin typeface="Calibri" panose="020F0502020204030204"/>
-              </a:rPr>
-              <a:t>6 / 7</a:t>
-            </a:r>
-            <a:endParaRPr sz="900" b="0">
-              <a:solidFill>
-                <a:srgbClr val="898781"/>
               </a:solidFill>
               <a:latin typeface="Calibri" panose="020F0502020204030204"/>
             </a:endParaRPr>
@@ -8422,7 +8918,7 @@
           <a:noFill/>
         </p:spPr>
         <p:txBody>
-          <a:bodyPr wrap="square" lIns="0" tIns="0" rIns="0" bIns="0" anchor="t">
+          <a:bodyPr wrap="square" lIns="0" tIns="0" rIns="0" bIns="0">
             <a:spAutoFit/>
           </a:bodyPr>
           <a:lstStyle/>
@@ -8439,7 +8935,7 @@
                 </a:solidFill>
                 <a:latin typeface="Calibri" panose="020F0502020204030204"/>
               </a:rPr>
-              <a:t>Latency never binds — quality, stability and interpretability decide deployment</a:t>
+              <a:t>Near waypoints read the present, far waypoints read the trend</a:t>
             </a:r>
             <a:endParaRPr sz="2300" b="1">
               <a:solidFill>
@@ -8467,7 +8963,7 @@
           <a:noFill/>
         </p:spPr>
         <p:txBody>
-          <a:bodyPr wrap="square" lIns="0" tIns="0" rIns="0" bIns="0" anchor="t">
+          <a:bodyPr wrap="square" lIns="0" tIns="0" rIns="0" bIns="0">
             <a:spAutoFit/>
           </a:bodyPr>
           <a:lstStyle/>
@@ -8484,7 +8980,7 @@
                 </a:solidFill>
                 <a:latin typeface="Calibri" panose="020F0502020204030204"/>
               </a:rPr>
-              <a:t>Feasibility verdicts against the platform gates, and the model picks they imply</a:t>
+              <a:t>Week 4 · Transformer horizon-query decoder · attention over the 10-step history, resolved per output waypoint</a:t>
             </a:r>
             <a:endParaRPr sz="1300" b="0">
               <a:solidFill>
@@ -8541,7 +9037,568 @@
       </p:sp>
       <p:sp>
         <p:nvSpPr>
-          <p:cNvPr id="5" name="Rounded Rectangle 4"/>
+          <p:cNvPr id="5" name="TextBox 4"/>
+          <p:cNvSpPr txBox="1"/>
+          <p:nvPr/>
+        </p:nvSpPr>
+        <p:spPr>
+          <a:xfrm>
+            <a:off x="548640" y="6510528"/>
+            <a:ext cx="8229600" cy="274320"/>
+          </a:xfrm>
+          <a:prstGeom prst="rect">
+            <a:avLst/>
+          </a:prstGeom>
+          <a:noFill/>
+        </p:spPr>
+        <p:txBody>
+          <a:bodyPr wrap="square" lIns="0" tIns="0" rIns="0" bIns="0">
+            <a:spAutoFit/>
+          </a:bodyPr>
+          <a:lstStyle/>
+          <a:p>
+            <a:pPr algn="l">
+              <a:lnSpc>
+                <a:spcPct val="106000"/>
+              </a:lnSpc>
+            </a:pPr>
+            <a:r>
+              <a:rPr sz="900" b="0">
+                <a:solidFill>
+                  <a:srgbClr val="898781"/>
+                </a:solidFill>
+                <a:latin typeface="Calibri" panose="020F0502020204030204"/>
+              </a:rPr>
+              <a:t>InGen Dynamics · ML &amp; NN Analyst Internship — Mid-Point Review (W1–W4)</a:t>
+            </a:r>
+            <a:endParaRPr sz="900" b="0">
+              <a:solidFill>
+                <a:srgbClr val="898781"/>
+              </a:solidFill>
+              <a:latin typeface="Calibri" panose="020F0502020204030204"/>
+            </a:endParaRPr>
+          </a:p>
+        </p:txBody>
+      </p:sp>
+      <p:pic>
+        <p:nvPicPr>
+          <p:cNvPr id="7" name="Picture 6" descr="attention_over_horizon.png"/>
+          <p:cNvPicPr>
+            <a:picLocks noChangeAspect="1"/>
+          </p:cNvPicPr>
+          <p:nvPr/>
+        </p:nvPicPr>
+        <p:blipFill>
+          <a:blip r:embed="rId1"/>
+          <a:stretch>
+            <a:fillRect/>
+          </a:stretch>
+        </p:blipFill>
+        <p:spPr>
+          <a:xfrm>
+            <a:off x="548640" y="1353312"/>
+            <a:ext cx="11091672" cy="2957779"/>
+          </a:xfrm>
+          <a:prstGeom prst="rect">
+            <a:avLst/>
+          </a:prstGeom>
+        </p:spPr>
+      </p:pic>
+      <p:sp>
+        <p:nvSpPr>
+          <p:cNvPr id="8" name="Rounded Rectangle 7"/>
+          <p:cNvSpPr/>
+          <p:nvPr/>
+        </p:nvSpPr>
+        <p:spPr>
+          <a:xfrm>
+            <a:off x="548640" y="4517136"/>
+            <a:ext cx="3630168" cy="1755648"/>
+          </a:xfrm>
+          <a:prstGeom prst="roundRect">
+            <a:avLst>
+              <a:gd name="adj" fmla="val 4500"/>
+            </a:avLst>
+          </a:prstGeom>
+          <a:solidFill>
+            <a:srgbClr val="F2F5FA"/>
+          </a:solidFill>
+          <a:ln>
+            <a:noFill/>
+          </a:ln>
+          <a:effectLst/>
+        </p:spPr>
+        <p:style>
+          <a:lnRef idx="1">
+            <a:schemeClr val="accent1"/>
+          </a:lnRef>
+          <a:fillRef idx="3">
+            <a:schemeClr val="accent1"/>
+          </a:fillRef>
+          <a:effectRef idx="2">
+            <a:schemeClr val="accent1"/>
+          </a:effectRef>
+          <a:fontRef idx="minor">
+            <a:schemeClr val="lt1"/>
+          </a:fontRef>
+        </p:style>
+        <p:txBody>
+          <a:bodyPr wrap="square" lIns="128016" tIns="91440" rIns="128016" bIns="91440" rtlCol="0" anchor="t"/>
+          <a:lstStyle/>
+          <a:p>
+            <a:pPr algn="just">
+              <a:lnSpc>
+                <a:spcPct val="100000"/>
+              </a:lnSpc>
+              <a:spcAft>
+                <a:spcPts val="300"/>
+              </a:spcAft>
+            </a:pPr>
+            <a:r>
+              <a:rPr sz="1200" b="1">
+                <a:solidFill>
+                  <a:srgbClr val="1C5CAB"/>
+                </a:solidFill>
+                <a:latin typeface="Calibri" panose="020F0502020204030204"/>
+              </a:rPr>
+              <a:t>The centre of mass slides monotonically earlier</a:t>
+            </a:r>
+            <a:endParaRPr sz="1200" b="1">
+              <a:solidFill>
+                <a:srgbClr val="1C5CAB"/>
+              </a:solidFill>
+              <a:latin typeface="Calibri" panose="020F0502020204030204"/>
+            </a:endParaRPr>
+          </a:p>
+          <a:p>
+            <a:pPr algn="just">
+              <a:lnSpc>
+                <a:spcPct val="106000"/>
+              </a:lnSpc>
+              <a:spcAft>
+                <a:spcPts val="0"/>
+              </a:spcAft>
+            </a:pPr>
+            <a:r>
+              <a:rPr sz="1150" b="0">
+                <a:solidFill>
+                  <a:srgbClr val="52514E"/>
+                </a:solidFill>
+                <a:latin typeface="Calibri" panose="020F0502020204030204"/>
+              </a:rPr>
+              <a:t>Averaged over the test set, attention mass moves steadily back through the history as the horizon grows — centre of mass 6.7 → 3.1. One decoder, five different read patterns from the same input, none of them specified.</a:t>
+            </a:r>
+            <a:endParaRPr sz="1150" b="0">
+              <a:solidFill>
+                <a:srgbClr val="52514E"/>
+              </a:solidFill>
+              <a:latin typeface="Calibri" panose="020F0502020204030204"/>
+            </a:endParaRPr>
+          </a:p>
+          <a:p>
+            <a:pPr algn="just">
+              <a:lnSpc>
+                <a:spcPct val="106000"/>
+              </a:lnSpc>
+              <a:spcAft>
+                <a:spcPts val="0"/>
+              </a:spcAft>
+            </a:pPr>
+            <a:endParaRPr sz="1150" b="0">
+              <a:solidFill>
+                <a:srgbClr val="52514E"/>
+              </a:solidFill>
+              <a:latin typeface="Calibri" panose="020F0502020204030204"/>
+            </a:endParaRPr>
+          </a:p>
+        </p:txBody>
+      </p:sp>
+      <p:sp>
+        <p:nvSpPr>
+          <p:cNvPr id="9" name="Rounded Rectangle 8"/>
+          <p:cNvSpPr/>
+          <p:nvPr/>
+        </p:nvSpPr>
+        <p:spPr>
+          <a:xfrm>
+            <a:off x="4279392" y="4517136"/>
+            <a:ext cx="3630168" cy="1755648"/>
+          </a:xfrm>
+          <a:prstGeom prst="roundRect">
+            <a:avLst>
+              <a:gd name="adj" fmla="val 4500"/>
+            </a:avLst>
+          </a:prstGeom>
+          <a:solidFill>
+            <a:srgbClr val="F2F5FA"/>
+          </a:solidFill>
+          <a:ln>
+            <a:noFill/>
+          </a:ln>
+          <a:effectLst/>
+        </p:spPr>
+        <p:style>
+          <a:lnRef idx="1">
+            <a:schemeClr val="accent1"/>
+          </a:lnRef>
+          <a:fillRef idx="3">
+            <a:schemeClr val="accent1"/>
+          </a:fillRef>
+          <a:effectRef idx="2">
+            <a:schemeClr val="accent1"/>
+          </a:effectRef>
+          <a:fontRef idx="minor">
+            <a:schemeClr val="lt1"/>
+          </a:fontRef>
+        </p:style>
+        <p:txBody>
+          <a:bodyPr wrap="square" lIns="128016" tIns="91440" rIns="128016" bIns="91440" rtlCol="0" anchor="t"/>
+          <a:lstStyle/>
+          <a:p>
+            <a:pPr algn="just">
+              <a:lnSpc>
+                <a:spcPct val="100000"/>
+              </a:lnSpc>
+              <a:spcAft>
+                <a:spcPts val="300"/>
+              </a:spcAft>
+            </a:pPr>
+            <a:r>
+              <a:rPr sz="1200" b="1">
+                <a:solidFill>
+                  <a:srgbClr val="1C5CAB"/>
+                </a:solidFill>
+                <a:latin typeface="Calibri" panose="020F0502020204030204"/>
+              </a:rPr>
+              <a:t>h1 tilts to the latest state, h5 to the earliest</a:t>
+            </a:r>
+            <a:endParaRPr sz="1200" b="1">
+              <a:solidFill>
+                <a:srgbClr val="1C5CAB"/>
+              </a:solidFill>
+              <a:latin typeface="Calibri" panose="020F0502020204030204"/>
+            </a:endParaRPr>
+          </a:p>
+          <a:p>
+            <a:pPr algn="just">
+              <a:lnSpc>
+                <a:spcPct val="106000"/>
+              </a:lnSpc>
+              <a:spcAft>
+                <a:spcPts val="0"/>
+              </a:spcAft>
+            </a:pPr>
+            <a:r>
+              <a:rPr sz="1150" b="0">
+                <a:solidFill>
+                  <a:srgbClr val="52514E"/>
+                </a:solidFill>
+                <a:latin typeface="Calibri" panose="020F0502020204030204"/>
+              </a:rPr>
+              <a:t>The near waypoint leans on the last couple of steps, where current velocity is close to the answer; the far waypoint leans on the earliest, where the trend to be extrapolated is anchored. A tilt rather than a concentration — most of the mass sits elsewhere in both cases.</a:t>
+            </a:r>
+            <a:endParaRPr sz="1150" b="0">
+              <a:solidFill>
+                <a:srgbClr val="52514E"/>
+              </a:solidFill>
+              <a:latin typeface="Calibri" panose="020F0502020204030204"/>
+            </a:endParaRPr>
+          </a:p>
+        </p:txBody>
+      </p:sp>
+      <p:sp>
+        <p:nvSpPr>
+          <p:cNvPr id="10" name="Rounded Rectangle 9"/>
+          <p:cNvSpPr/>
+          <p:nvPr/>
+        </p:nvSpPr>
+        <p:spPr>
+          <a:xfrm>
+            <a:off x="8010144" y="4517136"/>
+            <a:ext cx="3630168" cy="1755648"/>
+          </a:xfrm>
+          <a:prstGeom prst="roundRect">
+            <a:avLst>
+              <a:gd name="adj" fmla="val 4500"/>
+            </a:avLst>
+          </a:prstGeom>
+          <a:solidFill>
+            <a:srgbClr val="F2F5FA"/>
+          </a:solidFill>
+          <a:ln>
+            <a:noFill/>
+          </a:ln>
+          <a:effectLst/>
+        </p:spPr>
+        <p:style>
+          <a:lnRef idx="1">
+            <a:schemeClr val="accent1"/>
+          </a:lnRef>
+          <a:fillRef idx="3">
+            <a:schemeClr val="accent1"/>
+          </a:fillRef>
+          <a:effectRef idx="2">
+            <a:schemeClr val="accent1"/>
+          </a:effectRef>
+          <a:fontRef idx="minor">
+            <a:schemeClr val="lt1"/>
+          </a:fontRef>
+        </p:style>
+        <p:txBody>
+          <a:bodyPr wrap="square" lIns="128016" tIns="91440" rIns="128016" bIns="91440" rtlCol="0" anchor="t"/>
+          <a:lstStyle/>
+          <a:p>
+            <a:pPr algn="just">
+              <a:lnSpc>
+                <a:spcPct val="100000"/>
+              </a:lnSpc>
+              <a:spcAft>
+                <a:spcPts val="300"/>
+              </a:spcAft>
+            </a:pPr>
+            <a:r>
+              <a:rPr sz="1200" b="1">
+                <a:solidFill>
+                  <a:srgbClr val="1C5CAB"/>
+                </a:solidFill>
+                <a:latin typeface="Calibri" panose="020F0502020204030204"/>
+              </a:rPr>
+              <a:t>The learned analogue of a receding-horizon planner</a:t>
+            </a:r>
+            <a:endParaRPr sz="1200" b="1">
+              <a:solidFill>
+                <a:srgbClr val="1C5CAB"/>
+              </a:solidFill>
+              <a:latin typeface="Calibri" panose="020F0502020204030204"/>
+            </a:endParaRPr>
+          </a:p>
+          <a:p>
+            <a:pPr algn="just">
+              <a:lnSpc>
+                <a:spcPct val="106000"/>
+              </a:lnSpc>
+              <a:spcAft>
+                <a:spcPts val="0"/>
+              </a:spcAft>
+            </a:pPr>
+            <a:r>
+              <a:rPr sz="1150" b="0">
+                <a:solidFill>
+                  <a:srgbClr val="52514E"/>
+                </a:solidFill>
+                <a:latin typeface="Calibri" panose="020F0502020204030204"/>
+              </a:rPr>
+              <a:t>The avoidance example sharpens the same structure. Instantaneous state for the immediate control step, trend and context for the tail of the horizon — how a predictive planner weights its own window. Read as a description of the attention pattern, not a mechanism the model was shown to use.</a:t>
+            </a:r>
+            <a:endParaRPr sz="1150" b="0">
+              <a:solidFill>
+                <a:srgbClr val="52514E"/>
+              </a:solidFill>
+              <a:latin typeface="Calibri" panose="020F0502020204030204"/>
+            </a:endParaRPr>
+          </a:p>
+        </p:txBody>
+      </p:sp>
+    </p:spTree>
+  </p:cSld>
+  <p:clrMapOvr>
+    <a:masterClrMapping/>
+  </p:clrMapOvr>
+</p:sld>
+</file>
+
+<file path=ppt/slides/slide8.xml><?xml version="1.0" encoding="utf-8"?>
+<p:sld xmlns:a="http://schemas.openxmlformats.org/drawingml/2006/main" xmlns:r="http://schemas.openxmlformats.org/officeDocument/2006/relationships" xmlns:p="http://schemas.openxmlformats.org/presentationml/2006/main">
+  <p:cSld>
+    <p:spTree>
+      <p:nvGrpSpPr>
+        <p:cNvPr id="1" name=""/>
+        <p:cNvGrpSpPr/>
+        <p:nvPr/>
+      </p:nvGrpSpPr>
+      <p:grpSpPr/>
+      <p:sp>
+        <p:nvSpPr>
+          <p:cNvPr id="2" name="TextBox 1"/>
+          <p:cNvSpPr txBox="1"/>
+          <p:nvPr/>
+        </p:nvSpPr>
+        <p:spPr>
+          <a:xfrm>
+            <a:off x="548640" y="292608"/>
+            <a:ext cx="11091672" cy="566928"/>
+          </a:xfrm>
+          <a:prstGeom prst="rect">
+            <a:avLst/>
+          </a:prstGeom>
+          <a:noFill/>
+        </p:spPr>
+        <p:txBody>
+          <a:bodyPr wrap="square" lIns="0" tIns="0" rIns="0" bIns="0">
+            <a:spAutoFit/>
+          </a:bodyPr>
+          <a:lstStyle/>
+          <a:p>
+            <a:pPr algn="l">
+              <a:lnSpc>
+                <a:spcPct val="106000"/>
+              </a:lnSpc>
+            </a:pPr>
+            <a:r>
+              <a:rPr sz="2300" b="1">
+                <a:solidFill>
+                  <a:srgbClr val="1A1A1A"/>
+                </a:solidFill>
+                <a:latin typeface="Calibri" panose="020F0502020204030204"/>
+              </a:rPr>
+              <a:t>Latency never binds — quality, stability and interpretability decide deployment</a:t>
+            </a:r>
+            <a:endParaRPr sz="2300" b="1">
+              <a:solidFill>
+                <a:srgbClr val="1A1A1A"/>
+              </a:solidFill>
+              <a:latin typeface="Calibri" panose="020F0502020204030204"/>
+            </a:endParaRPr>
+          </a:p>
+        </p:txBody>
+      </p:sp>
+      <p:sp>
+        <p:nvSpPr>
+          <p:cNvPr id="3" name="TextBox 2"/>
+          <p:cNvSpPr txBox="1"/>
+          <p:nvPr/>
+        </p:nvSpPr>
+        <p:spPr>
+          <a:xfrm>
+            <a:off x="548640" y="804672"/>
+            <a:ext cx="11091672" cy="292608"/>
+          </a:xfrm>
+          <a:prstGeom prst="rect">
+            <a:avLst/>
+          </a:prstGeom>
+          <a:noFill/>
+        </p:spPr>
+        <p:txBody>
+          <a:bodyPr wrap="square" lIns="0" tIns="0" rIns="0" bIns="0">
+            <a:spAutoFit/>
+          </a:bodyPr>
+          <a:lstStyle/>
+          <a:p>
+            <a:pPr algn="l">
+              <a:lnSpc>
+                <a:spcPct val="106000"/>
+              </a:lnSpc>
+            </a:pPr>
+            <a:r>
+              <a:rPr sz="1300" b="0">
+                <a:solidFill>
+                  <a:srgbClr val="52514E"/>
+                </a:solidFill>
+                <a:latin typeface="Calibri" panose="020F0502020204030204"/>
+              </a:rPr>
+              <a:t>Feasibility verdicts against the platform gates, and the model picks they imply</a:t>
+            </a:r>
+            <a:endParaRPr sz="1300" b="0">
+              <a:solidFill>
+                <a:srgbClr val="52514E"/>
+              </a:solidFill>
+              <a:latin typeface="Calibri" panose="020F0502020204030204"/>
+            </a:endParaRPr>
+          </a:p>
+        </p:txBody>
+      </p:sp>
+      <p:sp>
+        <p:nvSpPr>
+          <p:cNvPr id="4" name="Rectangle 3"/>
+          <p:cNvSpPr/>
+          <p:nvPr/>
+        </p:nvSpPr>
+        <p:spPr>
+          <a:xfrm>
+            <a:off x="548640" y="1133856"/>
+            <a:ext cx="11091672" cy="27432"/>
+          </a:xfrm>
+          <a:prstGeom prst="rect">
+            <a:avLst/>
+          </a:prstGeom>
+          <a:solidFill>
+            <a:srgbClr val="1C5CAB"/>
+          </a:solidFill>
+          <a:ln>
+            <a:noFill/>
+          </a:ln>
+          <a:effectLst/>
+        </p:spPr>
+        <p:style>
+          <a:lnRef idx="1">
+            <a:schemeClr val="accent1"/>
+          </a:lnRef>
+          <a:fillRef idx="3">
+            <a:schemeClr val="accent1"/>
+          </a:fillRef>
+          <a:effectRef idx="2">
+            <a:schemeClr val="accent1"/>
+          </a:effectRef>
+          <a:fontRef idx="minor">
+            <a:schemeClr val="lt1"/>
+          </a:fontRef>
+        </p:style>
+        <p:txBody>
+          <a:bodyPr rtlCol="0" anchor="ctr"/>
+          <a:lstStyle/>
+          <a:p>
+            <a:pPr algn="ctr"/>
+          </a:p>
+        </p:txBody>
+      </p:sp>
+      <p:sp>
+        <p:nvSpPr>
+          <p:cNvPr id="5" name="TextBox 4"/>
+          <p:cNvSpPr txBox="1"/>
+          <p:nvPr/>
+        </p:nvSpPr>
+        <p:spPr>
+          <a:xfrm>
+            <a:off x="548640" y="6510528"/>
+            <a:ext cx="8229600" cy="274320"/>
+          </a:xfrm>
+          <a:prstGeom prst="rect">
+            <a:avLst/>
+          </a:prstGeom>
+          <a:noFill/>
+        </p:spPr>
+        <p:txBody>
+          <a:bodyPr wrap="square" lIns="0" tIns="0" rIns="0" bIns="0">
+            <a:spAutoFit/>
+          </a:bodyPr>
+          <a:lstStyle/>
+          <a:p>
+            <a:pPr algn="l">
+              <a:lnSpc>
+                <a:spcPct val="106000"/>
+              </a:lnSpc>
+            </a:pPr>
+            <a:r>
+              <a:rPr sz="900" b="0">
+                <a:solidFill>
+                  <a:srgbClr val="898781"/>
+                </a:solidFill>
+                <a:latin typeface="Calibri" panose="020F0502020204030204"/>
+              </a:rPr>
+              <a:t>InGen Dynamics · ML &amp; NN Analyst Internship — Mid-Point Review (W1–W4)</a:t>
+            </a:r>
+            <a:endParaRPr sz="900" b="0">
+              <a:solidFill>
+                <a:srgbClr val="898781"/>
+              </a:solidFill>
+              <a:latin typeface="Calibri" panose="020F0502020204030204"/>
+            </a:endParaRPr>
+          </a:p>
+        </p:txBody>
+      </p:sp>
+      <p:sp>
+        <p:nvSpPr>
+          <p:cNvPr id="7" name="Rounded Rectangle 6"/>
           <p:cNvSpPr/>
           <p:nvPr/>
         </p:nvSpPr>
@@ -8578,10 +9635,13 @@
           </a:fontRef>
         </p:style>
         <p:txBody>
-          <a:bodyPr wrap="square" lIns="128016" tIns="91440" rIns="128016" bIns="73152" rtlCol="0" anchor="t"/>
+          <a:bodyPr wrap="square" lIns="128016" tIns="91440" rIns="128016" bIns="91440" rtlCol="0" anchor="t"/>
           <a:lstStyle/>
           <a:p>
-            <a:pPr algn="ctr">
+            <a:pPr algn="l">
+              <a:lnSpc>
+                <a:spcPct val="100000"/>
+              </a:lnSpc>
               <a:spcAft>
                 <a:spcPts val="300"/>
               </a:spcAft>
@@ -8593,7 +9653,7 @@
                 </a:solidFill>
                 <a:latin typeface="Calibri" panose="020F0502020204030204"/>
               </a:rPr>
-              <a:t>Aido Rover — 100 ms streaming gate: all six PASS</a:t>
+              <a:t>Aido Rover — 100 ms streaming gate: all PASS</a:t>
             </a:r>
             <a:endParaRPr sz="1250" b="1">
               <a:solidFill>
@@ -8603,23 +9663,26 @@
             </a:endParaRPr>
           </a:p>
           <a:p>
-            <a:pPr>
+            <a:pPr algn="l">
               <a:lnSpc>
-                <a:spcPct val="108000"/>
+                <a:spcPct val="106000"/>
               </a:lnSpc>
+              <a:spcAft>
+                <a:spcPts val="0"/>
+              </a:spcAft>
             </a:pPr>
             <a:r>
               <a:rPr sz="1200" b="0">
                 <a:solidFill>
-                  <a:srgbClr val="1A1A1A"/>
-                </a:solidFill>
-                <a:latin typeface="Calibri" panose="020F0502020204030204"/>
-              </a:rPr>
-              <a:t>Worst model (RandomForest, 7.9 ms) sits &gt;12× under the gate; the neural models sit 150–740× under it. Window-scaling fits put attention's breach point at hundreds of seconds of buffer — far beyond the 5 s that measured fault durations justify.</a:t>
+                  <a:srgbClr val="52514E"/>
+                </a:solidFill>
+                <a:latin typeface="Calibri" panose="020F0502020204030204"/>
+              </a:rPr>
+              <a:t>The worst model (RandomForest, 7.9 ms) sits &gt;12× under the gate; the neural models are all sub-millisecond, two to three orders of magnitude under it, and the window-scaling analysis puts the breach point far beyond anything measured fault durations justify.</a:t>
             </a:r>
             <a:endParaRPr sz="1200" b="0">
               <a:solidFill>
-                <a:srgbClr val="1A1A1A"/>
+                <a:srgbClr val="52514E"/>
               </a:solidFill>
               <a:latin typeface="Calibri" panose="020F0502020204030204"/>
             </a:endParaRPr>
@@ -8628,7 +9691,7 @@
       </p:sp>
       <p:sp>
         <p:nvSpPr>
-          <p:cNvPr id="6" name="Rounded Rectangle 5"/>
+          <p:cNvPr id="8" name="Rounded Rectangle 7"/>
           <p:cNvSpPr/>
           <p:nvPr/>
         </p:nvSpPr>
@@ -8665,10 +9728,13 @@
           </a:fontRef>
         </p:style>
         <p:txBody>
-          <a:bodyPr wrap="square" lIns="128016" tIns="91440" rIns="128016" bIns="73152" rtlCol="0" anchor="t"/>
+          <a:bodyPr wrap="square" lIns="128016" tIns="91440" rIns="128016" bIns="91440" rtlCol="0" anchor="t"/>
           <a:lstStyle/>
           <a:p>
-            <a:pPr algn="ctr">
+            <a:pPr algn="l">
+              <a:lnSpc>
+                <a:spcPct val="100000"/>
+              </a:lnSpc>
               <a:spcAft>
                 <a:spcPts val="300"/>
               </a:spcAft>
@@ -8680,7 +9746,25 @@
                 </a:solidFill>
                 <a:latin typeface="Calibri" panose="020F0502020204030204"/>
               </a:rPr>
-              <a:t>Aido Humanoid — 50 ms planning gate: all five PASS</a:t>
+              <a:t>Aido Humanoid — 50 ms planning gate: all</a:t>
+            </a:r>
+            <a:r>
+              <a:rPr lang="en-US" sz="1250" b="1">
+                <a:solidFill>
+                  <a:srgbClr val="1C5CAB"/>
+                </a:solidFill>
+                <a:latin typeface="Calibri" panose="020F0502020204030204"/>
+              </a:rPr>
+              <a:t> </a:t>
+            </a:r>
+            <a:r>
+              <a:rPr sz="1250" b="1">
+                <a:solidFill>
+                  <a:srgbClr val="1C5CAB"/>
+                </a:solidFill>
+                <a:latin typeface="Calibri" panose="020F0502020204030204"/>
+              </a:rPr>
+              <a:t>PASS</a:t>
             </a:r>
             <a:endParaRPr sz="1250" b="1">
               <a:solidFill>
@@ -8690,23 +9774,26 @@
             </a:endParaRPr>
           </a:p>
           <a:p>
-            <a:pPr>
+            <a:pPr algn="l">
               <a:lnSpc>
-                <a:spcPct val="108000"/>
+                <a:spcPct val="106000"/>
               </a:lnSpc>
+              <a:spcAft>
+                <a:spcPts val="0"/>
+              </a:spcAft>
             </a:pPr>
             <a:r>
               <a:rPr sz="1200" b="0">
                 <a:solidFill>
-                  <a:srgbClr val="1A1A1A"/>
-                </a:solidFill>
-                <a:latin typeface="Calibri" panose="020F0502020204030204"/>
-              </a:rPr>
-              <a:t>Plan-defined gate (product docs specify 10 ms whole-body MPC / 150 ms grasp planning — discrepancy recorded, plan wins per convention); every regressor clears it by two or more orders of magnitude.</a:t>
+                  <a:srgbClr val="52514E"/>
+                </a:solidFill>
+                <a:latin typeface="Calibri" panose="020F0502020204030204"/>
+              </a:rPr>
+              <a:t>Plan-defined gate (product docs specify 10 ms whole-body MPC / 150 ms grasp planning — discrepancy recorded, plan wins per convention); every regressor clears it by roughly two orders of magnitude.</a:t>
             </a:r>
             <a:endParaRPr sz="1200" b="0">
               <a:solidFill>
-                <a:srgbClr val="1A1A1A"/>
+                <a:srgbClr val="52514E"/>
               </a:solidFill>
               <a:latin typeface="Calibri" panose="020F0502020204030204"/>
             </a:endParaRPr>
@@ -8715,7 +9802,7 @@
       </p:sp>
       <p:sp>
         <p:nvSpPr>
-          <p:cNvPr id="7" name="Rounded Rectangle 6"/>
+          <p:cNvPr id="9" name="Rounded Rectangle 8"/>
           <p:cNvSpPr/>
           <p:nvPr/>
         </p:nvSpPr>
@@ -8752,10 +9839,13 @@
           </a:fontRef>
         </p:style>
         <p:txBody>
-          <a:bodyPr wrap="square" lIns="128016" tIns="91440" rIns="128016" bIns="73152" rtlCol="0" anchor="t"/>
+          <a:bodyPr wrap="square" lIns="128016" tIns="91440" rIns="128016" bIns="91440" rtlCol="0" anchor="t"/>
           <a:lstStyle/>
           <a:p>
-            <a:pPr algn="ctr">
+            <a:pPr algn="l">
+              <a:lnSpc>
+                <a:spcPct val="100000"/>
+              </a:lnSpc>
               <a:spcAft>
                 <a:spcPts val="300"/>
               </a:spcAft>
@@ -8777,15 +9867,18 @@
             </a:endParaRPr>
           </a:p>
           <a:p>
-            <a:pPr>
+            <a:pPr algn="l">
               <a:lnSpc>
-                <a:spcPct val="108000"/>
+                <a:spcPct val="106000"/>
               </a:lnSpc>
+              <a:spcAft>
+                <a:spcPts val="0"/>
+              </a:spcAft>
             </a:pPr>
             <a:r>
               <a:rPr sz="1200" b="0">
                 <a:solidFill>
-                  <a:srgbClr val="1A1A1A"/>
+                  <a:srgbClr val="52514E"/>
                 </a:solidFill>
                 <a:latin typeface="Calibri" panose="020F0502020204030204"/>
               </a:rPr>
@@ -8793,7 +9886,7 @@
             </a:r>
             <a:endParaRPr sz="1200" b="0">
               <a:solidFill>
-                <a:srgbClr val="1A1A1A"/>
+                <a:srgbClr val="52514E"/>
               </a:solidFill>
               <a:latin typeface="Calibri" panose="020F0502020204030204"/>
             </a:endParaRPr>
@@ -8802,7 +9895,7 @@
       </p:sp>
       <p:sp>
         <p:nvSpPr>
-          <p:cNvPr id="8" name="Rounded Rectangle 7"/>
+          <p:cNvPr id="10" name="Rounded Rectangle 9"/>
           <p:cNvSpPr/>
           <p:nvPr/>
         </p:nvSpPr>
@@ -8839,10 +9932,13 @@
           </a:fontRef>
         </p:style>
         <p:txBody>
-          <a:bodyPr wrap="square" lIns="128016" tIns="91440" rIns="128016" bIns="73152" rtlCol="0" anchor="t"/>
+          <a:bodyPr wrap="square" lIns="128016" tIns="91440" rIns="128016" bIns="91440" rtlCol="0" anchor="t"/>
           <a:lstStyle/>
           <a:p>
-            <a:pPr algn="ctr">
+            <a:pPr algn="l">
+              <a:lnSpc>
+                <a:spcPct val="100000"/>
+              </a:lnSpc>
               <a:spcAft>
                 <a:spcPts val="300"/>
               </a:spcAft>
@@ -8864,113 +9960,26 @@
             </a:endParaRPr>
           </a:p>
           <a:p>
-            <a:pPr>
-              <a:lnSpc>
-                <a:spcPct val="108000"/>
-              </a:lnSpc>
-            </a:pPr>
-            <a:r>
-              <a:rPr sz="1200" b="0">
-                <a:solidFill>
-                  <a:srgbClr val="1A1A1A"/>
-                </a:solidFill>
-                <a:latin typeface="Calibri" panose="020F0502020204030204"/>
-              </a:rPr>
-              <a:t>Stuck-type steady-state faults cap recall (no cross-wheel asymmetry to key on); candidate fixes — longer-horizon context or a terrain-conditioned feature — are queued behind the RL work.</a:t>
-            </a:r>
-            <a:endParaRPr sz="1200" b="0">
-              <a:solidFill>
-                <a:srgbClr val="1A1A1A"/>
-              </a:solidFill>
-              <a:latin typeface="Calibri" panose="020F0502020204030204"/>
-            </a:endParaRPr>
-          </a:p>
-        </p:txBody>
-      </p:sp>
-      <p:sp>
-        <p:nvSpPr>
-          <p:cNvPr id="9" name="TextBox 8"/>
-          <p:cNvSpPr txBox="1"/>
-          <p:nvPr/>
-        </p:nvSpPr>
-        <p:spPr>
-          <a:xfrm>
-            <a:off x="548640" y="6510528"/>
-            <a:ext cx="8229600" cy="274320"/>
-          </a:xfrm>
-          <a:prstGeom prst="rect">
-            <a:avLst/>
-          </a:prstGeom>
-          <a:noFill/>
-        </p:spPr>
-        <p:txBody>
-          <a:bodyPr wrap="square" lIns="0" tIns="0" rIns="0" bIns="0" anchor="t">
-            <a:spAutoFit/>
-          </a:bodyPr>
-          <a:lstStyle/>
-          <a:p>
             <a:pPr algn="l">
               <a:lnSpc>
                 <a:spcPct val="106000"/>
               </a:lnSpc>
+              <a:spcAft>
+                <a:spcPts val="0"/>
+              </a:spcAft>
             </a:pPr>
             <a:r>
-              <a:rPr sz="900" b="0">
-                <a:solidFill>
-                  <a:srgbClr val="898781"/>
-                </a:solidFill>
-                <a:latin typeface="Calibri" panose="020F0502020204030204"/>
-              </a:rPr>
-              <a:t>InGen Dynamics · ML &amp; NN Analyst Internship — Mid-Point Review (W1–W4)</a:t>
-            </a:r>
-            <a:endParaRPr sz="900" b="0">
+              <a:rPr sz="1200" b="0">
+                <a:solidFill>
+                  <a:srgbClr val="52514E"/>
+                </a:solidFill>
+                <a:latin typeface="Calibri" panose="020F0502020204030204"/>
+              </a:rPr>
+              <a:t>Stuck-type steady-state faults cap recall (no cross-wheel asymmetry to key on); candidate fixes — longer-horizon context or a terrain-conditioned feature — are queued behind the RL work.</a:t>
+            </a:r>
+            <a:endParaRPr sz="1200" b="0">
               <a:solidFill>
-                <a:srgbClr val="898781"/>
-              </a:solidFill>
-              <a:latin typeface="Calibri" panose="020F0502020204030204"/>
-            </a:endParaRPr>
-          </a:p>
-        </p:txBody>
-      </p:sp>
-      <p:sp>
-        <p:nvSpPr>
-          <p:cNvPr id="10" name="TextBox 9"/>
-          <p:cNvSpPr txBox="1"/>
-          <p:nvPr/>
-        </p:nvSpPr>
-        <p:spPr>
-          <a:xfrm>
-            <a:off x="10972800" y="6510528"/>
-            <a:ext cx="667512" cy="274320"/>
-          </a:xfrm>
-          <a:prstGeom prst="rect">
-            <a:avLst/>
-          </a:prstGeom>
-          <a:noFill/>
-        </p:spPr>
-        <p:txBody>
-          <a:bodyPr wrap="square" lIns="0" tIns="0" rIns="0" bIns="0" anchor="t">
-            <a:spAutoFit/>
-          </a:bodyPr>
-          <a:lstStyle/>
-          <a:p>
-            <a:pPr algn="r">
-              <a:lnSpc>
-                <a:spcPct val="106000"/>
-              </a:lnSpc>
-            </a:pPr>
-            <a:r>
-              <a:rPr sz="900" b="0">
-                <a:solidFill>
-                  <a:srgbClr val="898781"/>
-                </a:solidFill>
-                <a:latin typeface="Calibri" panose="020F0502020204030204"/>
-              </a:rPr>
-              <a:t>7 / 7</a:t>
-            </a:r>
-            <a:endParaRPr sz="900" b="0">
-              <a:solidFill>
-                <a:srgbClr val="898781"/>
+                <a:srgbClr val="52514E"/>
               </a:solidFill>
               <a:latin typeface="Calibri" panose="020F0502020204030204"/>
             </a:endParaRPr>
